--- a/output/wordlabs-semi-prefix-3day.pptx
+++ b/output/wordlabs-semi-prefix-3day.pptx
@@ -4240,7 +4240,7 @@
                 <a:ea typeface="Calibri" pitchFamily="34" charset="-122"/>
                 <a:cs typeface="Calibri" pitchFamily="34" charset="-120"/>
               </a:rPr>
-              <a:t>"half, partly, or incomplete"</a:t>
+              <a:t>"half, partly, or almost"</a:t>
             </a:r>
             <a:endParaRPr lang="en-US" sz="2200" dirty="0"/>
           </a:p>
@@ -5288,7 +5288,7 @@
                 <a:ea typeface="Calibri" pitchFamily="34" charset="-122"/>
                 <a:cs typeface="Calibri" pitchFamily="34" charset="-120"/>
               </a:rPr>
-              <a:t>Word Labs  •  wordlabs.app  •  Prefix: 'semi-' = half, partly, or incomplete</a:t>
+              <a:t>Word Labs  •  wordlabs.app  •  Prefix: 'semi-' = half, partly, or almost</a:t>
             </a:r>
             <a:endParaRPr lang="en-US" sz="800" dirty="0"/>
           </a:p>
@@ -5928,7 +5928,7 @@
                 <a:ea typeface="Calibri" pitchFamily="34" charset="-122"/>
                 <a:cs typeface="Calibri" pitchFamily="34" charset="-120"/>
               </a:rPr>
-              <a:t>Word Labs  •  wordlabs.app  •  Prefix: 'semi-' = half, partly, or incomplete</a:t>
+              <a:t>Word Labs  •  wordlabs.app  •  Prefix: 'semi-' = half, partly, or almost</a:t>
             </a:r>
             <a:endParaRPr lang="en-US" sz="800" dirty="0"/>
           </a:p>
@@ -6040,7 +6040,7 @@
                 <a:ea typeface="Calibri" pitchFamily="34" charset="-122"/>
                 <a:cs typeface="Calibri" pitchFamily="34" charset="-120"/>
               </a:rPr>
-              <a:t>The architect designed a </a:t>
+              <a:t>The class sat in a </a:t>
             </a:r>
             <a:pPr algn="l" indent="0" marL="0">
               <a:buNone/>
@@ -6057,7 +6057,7 @@
                 <a:ea typeface="Calibri" pitchFamily="34" charset="-122"/>
                 <a:cs typeface="Calibri" pitchFamily="34" charset="-120"/>
               </a:rPr>
-              <a:t>semidetached</a:t>
+              <a:t>semicircle</a:t>
             </a:r>
             <a:pPr algn="l" indent="0" marL="0">
               <a:buNone/>
@@ -6071,7 +6071,7 @@
                 <a:ea typeface="Calibri" pitchFamily="34" charset="-122"/>
                 <a:cs typeface="Calibri" pitchFamily="34" charset="-120"/>
               </a:rPr>
-              <a:t> house with a </a:t>
+              <a:t> and cheered for their team in the </a:t>
             </a:r>
             <a:pPr algn="l" indent="0" marL="0">
               <a:buNone/>
@@ -6088,7 +6088,7 @@
                 <a:ea typeface="Calibri" pitchFamily="34" charset="-122"/>
                 <a:cs typeface="Calibri" pitchFamily="34" charset="-120"/>
               </a:rPr>
-              <a:t>semicircle</a:t>
+              <a:t>semifinal</a:t>
             </a:r>
             <a:pPr algn="l" indent="0" marL="0">
               <a:buNone/>
@@ -6102,7 +6102,7 @@
                 <a:ea typeface="Calibri" pitchFamily="34" charset="-122"/>
                 <a:cs typeface="Calibri" pitchFamily="34" charset="-120"/>
               </a:rPr>
-              <a:t> above the front door.</a:t>
+              <a:t>.</a:t>
             </a:r>
             <a:endParaRPr lang="en-US" sz="1800" dirty="0"/>
           </a:p>
@@ -6257,7 +6257,7 @@
                 <a:ea typeface="Trebuchet MS" pitchFamily="34" charset="-122"/>
                 <a:cs typeface="Trebuchet MS" pitchFamily="34" charset="-120"/>
               </a:rPr>
-              <a:t>semidetached</a:t>
+              <a:t>semicircle</a:t>
             </a:r>
             <a:endParaRPr lang="en-US" sz="1400" dirty="0"/>
           </a:p>
@@ -6385,7 +6385,7 @@
                 <a:ea typeface="Trebuchet MS" pitchFamily="34" charset="-122"/>
                 <a:cs typeface="Trebuchet MS" pitchFamily="34" charset="-120"/>
               </a:rPr>
-              <a:t>semicircle</a:t>
+              <a:t>semifinal</a:t>
             </a:r>
             <a:endParaRPr lang="en-US" sz="1400" dirty="0"/>
           </a:p>
@@ -6716,7 +6716,7 @@
                 <a:ea typeface="Calibri" pitchFamily="34" charset="-122"/>
                 <a:cs typeface="Calibri" pitchFamily="34" charset="-120"/>
               </a:rPr>
-              <a:t>Word Labs  •  wordlabs.app  •  Prefix: 'semi-' = half, partly, or incomplete</a:t>
+              <a:t>Word Labs  •  wordlabs.app  •  Prefix: 'semi-' = half, partly, or almost</a:t>
             </a:r>
             <a:endParaRPr lang="en-US" sz="800" dirty="0"/>
           </a:p>
@@ -6855,7 +6855,7 @@
                 <a:ea typeface="Trebuchet MS" pitchFamily="34" charset="-122"/>
                 <a:cs typeface="Trebuchet MS" pitchFamily="34" charset="-120"/>
               </a:rPr>
-              <a:t>semidetached</a:t>
+              <a:t>semicircle</a:t>
             </a:r>
             <a:endParaRPr lang="en-US" sz="2800" dirty="0"/>
           </a:p>
@@ -7543,7 +7543,7 @@
                 <a:ea typeface="Calibri" pitchFamily="34" charset="-122"/>
                 <a:cs typeface="Calibri" pitchFamily="34" charset="-120"/>
               </a:rPr>
-              <a:t>Word Labs  •  wordlabs.app  •  Prefix: 'semi-' = half, partly, or incomplete</a:t>
+              <a:t>Word Labs  •  wordlabs.app  •  Prefix: 'semi-' = half, partly, or almost</a:t>
             </a:r>
             <a:endParaRPr lang="en-US" sz="800" dirty="0"/>
           </a:p>
@@ -7682,7 +7682,7 @@
                 <a:ea typeface="Trebuchet MS" pitchFamily="34" charset="-122"/>
                 <a:cs typeface="Trebuchet MS" pitchFamily="34" charset="-120"/>
               </a:rPr>
-              <a:t>semidetached</a:t>
+              <a:t>semicircle</a:t>
             </a:r>
             <a:endParaRPr lang="en-US" sz="2800" dirty="0"/>
           </a:p>
@@ -7762,7 +7762,7 @@
         </p:nvSpPr>
         <p:spPr>
           <a:xfrm>
-            <a:off x="2221992" y="2258568"/>
+            <a:off x="2938272" y="2258568"/>
             <a:ext cx="1828800" cy="292608"/>
           </a:xfrm>
           <a:prstGeom prst="rect">
@@ -7796,7 +7796,7 @@
         </p:nvSpPr>
         <p:spPr>
           <a:xfrm>
-            <a:off x="2221992" y="2258568"/>
+            <a:off x="2938272" y="2258568"/>
             <a:ext cx="1828800" cy="292608"/>
           </a:xfrm>
           <a:prstGeom prst="rect">
@@ -7835,7 +7835,7 @@
         </p:nvSpPr>
         <p:spPr>
           <a:xfrm>
-            <a:off x="2221992" y="2569464"/>
+            <a:off x="2938272" y="2569464"/>
             <a:ext cx="1828800" cy="201168"/>
           </a:xfrm>
           <a:prstGeom prst="rect">
@@ -7860,7 +7860,7 @@
                 <a:ea typeface="Calibri" pitchFamily="34" charset="-122"/>
                 <a:cs typeface="Calibri" pitchFamily="34" charset="-120"/>
               </a:rPr>
-              <a:t>half, partly</a:t>
+              <a:t>half</a:t>
             </a:r>
             <a:endParaRPr lang="en-US" sz="850" dirty="0"/>
           </a:p>
@@ -7874,7 +7874,7 @@
         </p:nvSpPr>
         <p:spPr>
           <a:xfrm>
-            <a:off x="4370832" y="2258568"/>
+            <a:off x="5803392" y="2258568"/>
             <a:ext cx="1828800" cy="292608"/>
           </a:xfrm>
           <a:prstGeom prst="rect">
@@ -7908,7 +7908,7 @@
         </p:nvSpPr>
         <p:spPr>
           <a:xfrm>
-            <a:off x="4370832" y="2258568"/>
+            <a:off x="5803392" y="2258568"/>
             <a:ext cx="1828800" cy="292608"/>
           </a:xfrm>
           <a:prstGeom prst="rect">
@@ -7933,7 +7933,7 @@
                 <a:ea typeface="Trebuchet MS" pitchFamily="34" charset="-122"/>
                 <a:cs typeface="Trebuchet MS" pitchFamily="34" charset="-120"/>
               </a:rPr>
-              <a:t>detach</a:t>
+              <a:t>circle</a:t>
             </a:r>
             <a:endParaRPr lang="en-US" sz="1300" dirty="0"/>
           </a:p>
@@ -7947,7 +7947,7 @@
         </p:nvSpPr>
         <p:spPr>
           <a:xfrm>
-            <a:off x="4370832" y="2569464"/>
+            <a:off x="5803392" y="2569464"/>
             <a:ext cx="1828800" cy="201168"/>
           </a:xfrm>
           <a:prstGeom prst="rect">
@@ -7972,7 +7972,7 @@
                 <a:ea typeface="Calibri" pitchFamily="34" charset="-122"/>
                 <a:cs typeface="Calibri" pitchFamily="34" charset="-120"/>
               </a:rPr>
-              <a:t>to separate or disconnect</a:t>
+              <a:t>round shape</a:t>
             </a:r>
             <a:endParaRPr lang="en-US" sz="850" dirty="0"/>
           </a:p>
@@ -7986,30 +7986,23 @@
         </p:nvSpPr>
         <p:spPr>
           <a:xfrm>
-            <a:off x="6519672" y="2258568"/>
-            <a:ext cx="1828800" cy="292608"/>
+            <a:off x="365760" y="3273552"/>
+            <a:ext cx="1371600" cy="658368"/>
           </a:xfrm>
           <a:prstGeom prst="rect">
             <a:avLst>
-              <a:gd name="adj" fmla="val 25000"/>
+              <a:gd name="adj" fmla="val 8333"/>
             </a:avLst>
           </a:prstGeom>
           <a:solidFill>
-            <a:srgbClr val="FCE7F3"/>
-          </a:solidFill>
-          <a:ln w="19050">
-            <a:solidFill>
-              <a:srgbClr val="DB2777"/>
-            </a:solidFill>
-            <a:prstDash val="solid"/>
-          </a:ln>
-          <a:effectLst>
-            <a:outerShdw sx="100000" sy="100000" kx="0" ky="0" algn="bl" rotWithShape="0" blurRad="101600" dist="38100" dir="8100000">
-              <a:srgbClr val="000000">
-                <a:alpha val="12000"/>
-              </a:srgbClr>
-            </a:outerShdw>
-          </a:effectLst>
+            <a:srgbClr val="E2E8F0"/>
+          </a:solidFill>
+          <a:ln w="12700">
+            <a:solidFill>
+              <a:srgbClr val="E2E8F0"/>
+            </a:solidFill>
+            <a:prstDash val="solid"/>
+          </a:ln>
         </p:spPr>
       </p:sp>
       <p:sp>
@@ -8020,90 +8013,117 @@
         </p:nvSpPr>
         <p:spPr>
           <a:xfrm>
-            <a:off x="6519672" y="2258568"/>
-            <a:ext cx="1828800" cy="292608"/>
-          </a:xfrm>
-          <a:prstGeom prst="rect">
-            <a:avLst/>
-          </a:prstGeom>
-          <a:noFill/>
-          <a:ln/>
-        </p:spPr>
-        <p:txBody>
-          <a:bodyPr wrap="square" lIns="0" tIns="0" rIns="0" bIns="0" rtlCol="0" anchor="ctr"/>
-          <a:lstStyle/>
-          <a:p>
-            <a:pPr algn="ctr" indent="0" marL="0">
-              <a:buNone/>
-            </a:pPr>
-            <a:r>
-              <a:rPr lang="en-US" sz="1300" b="1" dirty="0">
-                <a:solidFill>
-                  <a:srgbClr val="9D174D"/>
+            <a:off x="365760" y="3273552"/>
+            <a:ext cx="1371600" cy="658368"/>
+          </a:xfrm>
+          <a:prstGeom prst="rect">
+            <a:avLst/>
+          </a:prstGeom>
+          <a:noFill/>
+          <a:ln/>
+        </p:spPr>
+        <p:txBody>
+          <a:bodyPr wrap="square" lIns="0" tIns="0" rIns="0" bIns="0" rtlCol="0" anchor="ctr"/>
+          <a:lstStyle/>
+          <a:p>
+            <a:pPr algn="ctr" indent="0" marL="0">
+              <a:buNone/>
+            </a:pPr>
+            <a:r>
+              <a:rPr lang="en-US" sz="1100" b="1" dirty="0">
+                <a:solidFill>
+                  <a:srgbClr val="475569"/>
                 </a:solidFill>
                 <a:latin typeface="Trebuchet MS" pitchFamily="34" charset="0"/>
                 <a:ea typeface="Trebuchet MS" pitchFamily="34" charset="-122"/>
                 <a:cs typeface="Trebuchet MS" pitchFamily="34" charset="-120"/>
               </a:rPr>
-              <a:t>ed</a:t>
-            </a:r>
-            <a:endParaRPr lang="en-US" sz="1300" dirty="0"/>
-          </a:p>
-        </p:txBody>
-      </p:sp>
-      <p:sp>
-        <p:nvSpPr>
-          <p:cNvPr id="24" name="Text 22"/>
-          <p:cNvSpPr/>
-          <p:nvPr/>
-        </p:nvSpPr>
-        <p:spPr>
-          <a:xfrm>
-            <a:off x="6519672" y="2569464"/>
-            <a:ext cx="1828800" cy="201168"/>
-          </a:xfrm>
-          <a:prstGeom prst="rect">
-            <a:avLst/>
-          </a:prstGeom>
-          <a:noFill/>
-          <a:ln/>
-        </p:spPr>
-        <p:txBody>
-          <a:bodyPr wrap="square" lIns="0" tIns="0" rIns="0" bIns="0" rtlCol="0" anchor="t"/>
-          <a:lstStyle/>
-          <a:p>
-            <a:pPr algn="ctr" indent="0" marL="0">
-              <a:buNone/>
-            </a:pPr>
-            <a:r>
-              <a:rPr lang="en-US" sz="850" dirty="0">
-                <a:solidFill>
-                  <a:srgbClr val="475569"/>
+              <a:t>Syllables</a:t>
+            </a:r>
+            <a:endParaRPr lang="en-US" sz="1100" dirty="0"/>
+          </a:p>
+        </p:txBody>
+      </p:sp>
+      <p:sp>
+        <p:nvSpPr>
+          <p:cNvPr id="24" name="Shape 22"/>
+          <p:cNvSpPr/>
+          <p:nvPr/>
+        </p:nvSpPr>
+        <p:spPr>
+          <a:xfrm>
+            <a:off x="1874520" y="3273552"/>
+            <a:ext cx="6903720" cy="658368"/>
+          </a:xfrm>
+          <a:prstGeom prst="rect">
+            <a:avLst>
+              <a:gd name="adj" fmla="val 8333"/>
+            </a:avLst>
+          </a:prstGeom>
+          <a:solidFill>
+            <a:srgbClr val="F8FAFC"/>
+          </a:solidFill>
+          <a:ln w="12700">
+            <a:solidFill>
+              <a:srgbClr val="E2E8F0"/>
+            </a:solidFill>
+            <a:prstDash val="dash"/>
+          </a:ln>
+        </p:spPr>
+      </p:sp>
+      <p:sp>
+        <p:nvSpPr>
+          <p:cNvPr id="25" name="Text 23"/>
+          <p:cNvSpPr/>
+          <p:nvPr/>
+        </p:nvSpPr>
+        <p:spPr>
+          <a:xfrm>
+            <a:off x="1874520" y="3273552"/>
+            <a:ext cx="6903720" cy="658368"/>
+          </a:xfrm>
+          <a:prstGeom prst="rect">
+            <a:avLst/>
+          </a:prstGeom>
+          <a:noFill/>
+          <a:ln/>
+        </p:spPr>
+        <p:txBody>
+          <a:bodyPr wrap="square" rtlCol="0" anchor="ctr"/>
+          <a:lstStyle/>
+          <a:p>
+            <a:pPr algn="ctr" indent="0" marL="0">
+              <a:buNone/>
+            </a:pPr>
+            <a:r>
+              <a:rPr lang="en-US" sz="1100" i="1" dirty="0">
+                <a:solidFill>
+                  <a:srgbClr val="CBD5E1"/>
                 </a:solidFill>
                 <a:latin typeface="Calibri" pitchFamily="34" charset="0"/>
                 <a:ea typeface="Calibri" pitchFamily="34" charset="-122"/>
                 <a:cs typeface="Calibri" pitchFamily="34" charset="-120"/>
               </a:rPr>
-              <a:t>past tense or describing a state</a:t>
-            </a:r>
-            <a:endParaRPr lang="en-US" sz="850" dirty="0"/>
-          </a:p>
-        </p:txBody>
-      </p:sp>
-      <p:sp>
-        <p:nvSpPr>
-          <p:cNvPr id="25" name="Shape 23"/>
-          <p:cNvSpPr/>
-          <p:nvPr/>
-        </p:nvSpPr>
-        <p:spPr>
-          <a:xfrm>
-            <a:off x="365760" y="3273552"/>
-            <a:ext cx="1371600" cy="658368"/>
+              <a:t>Write here...</a:t>
+            </a:r>
+            <a:endParaRPr lang="en-US" sz="1100" dirty="0"/>
+          </a:p>
+        </p:txBody>
+      </p:sp>
+      <p:sp>
+        <p:nvSpPr>
+          <p:cNvPr id="26" name="Shape 24"/>
+          <p:cNvSpPr/>
+          <p:nvPr/>
+        </p:nvSpPr>
+        <p:spPr>
+          <a:xfrm>
+            <a:off x="365760" y="4096512"/>
+            <a:ext cx="1371600" cy="804672"/>
           </a:xfrm>
           <a:prstGeom prst="rect">
             <a:avLst>
-              <a:gd name="adj" fmla="val 8333"/>
+              <a:gd name="adj" fmla="val 6818"/>
             </a:avLst>
           </a:prstGeom>
           <a:solidFill>
@@ -8119,14 +8139,14 @@
       </p:sp>
       <p:sp>
         <p:nvSpPr>
-          <p:cNvPr id="26" name="Text 24"/>
-          <p:cNvSpPr/>
-          <p:nvPr/>
-        </p:nvSpPr>
-        <p:spPr>
-          <a:xfrm>
-            <a:off x="365760" y="3273552"/>
-            <a:ext cx="1371600" cy="658368"/>
+          <p:cNvPr id="27" name="Text 25"/>
+          <p:cNvSpPr/>
+          <p:nvPr/>
+        </p:nvSpPr>
+        <p:spPr>
+          <a:xfrm>
+            <a:off x="365760" y="4096512"/>
+            <a:ext cx="1371600" cy="804672"/>
           </a:xfrm>
           <a:prstGeom prst="rect">
             <a:avLst/>
@@ -8150,7 +8170,7 @@
                 <a:ea typeface="Trebuchet MS" pitchFamily="34" charset="-122"/>
                 <a:cs typeface="Trebuchet MS" pitchFamily="34" charset="-120"/>
               </a:rPr>
-              <a:t>Syllables</a:t>
+              <a:t>Phonemes</a:t>
             </a:r>
             <a:endParaRPr lang="en-US" sz="1100" dirty="0"/>
           </a:p>
@@ -8158,80 +8178,14 @@
       </p:sp>
       <p:sp>
         <p:nvSpPr>
-          <p:cNvPr id="27" name="Shape 25"/>
-          <p:cNvSpPr/>
-          <p:nvPr/>
-        </p:nvSpPr>
-        <p:spPr>
-          <a:xfrm>
-            <a:off x="1874520" y="3273552"/>
-            <a:ext cx="6903720" cy="658368"/>
-          </a:xfrm>
-          <a:prstGeom prst="rect">
-            <a:avLst>
-              <a:gd name="adj" fmla="val 8333"/>
-            </a:avLst>
-          </a:prstGeom>
-          <a:solidFill>
-            <a:srgbClr val="F8FAFC"/>
-          </a:solidFill>
-          <a:ln w="12700">
-            <a:solidFill>
-              <a:srgbClr val="E2E8F0"/>
-            </a:solidFill>
-            <a:prstDash val="dash"/>
-          </a:ln>
-        </p:spPr>
-      </p:sp>
-      <p:sp>
-        <p:nvSpPr>
-          <p:cNvPr id="28" name="Text 26"/>
-          <p:cNvSpPr/>
-          <p:nvPr/>
-        </p:nvSpPr>
-        <p:spPr>
-          <a:xfrm>
-            <a:off x="1874520" y="3273552"/>
-            <a:ext cx="6903720" cy="658368"/>
-          </a:xfrm>
-          <a:prstGeom prst="rect">
-            <a:avLst/>
-          </a:prstGeom>
-          <a:noFill/>
-          <a:ln/>
-        </p:spPr>
-        <p:txBody>
-          <a:bodyPr wrap="square" rtlCol="0" anchor="ctr"/>
-          <a:lstStyle/>
-          <a:p>
-            <a:pPr algn="ctr" indent="0" marL="0">
-              <a:buNone/>
-            </a:pPr>
-            <a:r>
-              <a:rPr lang="en-US" sz="1100" i="1" dirty="0">
-                <a:solidFill>
-                  <a:srgbClr val="CBD5E1"/>
-                </a:solidFill>
-                <a:latin typeface="Calibri" pitchFamily="34" charset="0"/>
-                <a:ea typeface="Calibri" pitchFamily="34" charset="-122"/>
-                <a:cs typeface="Calibri" pitchFamily="34" charset="-120"/>
-              </a:rPr>
-              <a:t>Write here...</a:t>
-            </a:r>
-            <a:endParaRPr lang="en-US" sz="1100" dirty="0"/>
-          </a:p>
-        </p:txBody>
-      </p:sp>
-      <p:sp>
-        <p:nvSpPr>
-          <p:cNvPr id="29" name="Shape 27"/>
-          <p:cNvSpPr/>
-          <p:nvPr/>
-        </p:nvSpPr>
-        <p:spPr>
-          <a:xfrm>
-            <a:off x="365760" y="4096512"/>
-            <a:ext cx="1371600" cy="804672"/>
+          <p:cNvPr id="28" name="Shape 26"/>
+          <p:cNvSpPr/>
+          <p:nvPr/>
+        </p:nvSpPr>
+        <p:spPr>
+          <a:xfrm>
+            <a:off x="1874520" y="4096512"/>
+            <a:ext cx="6903720" cy="804672"/>
           </a:xfrm>
           <a:prstGeom prst="rect">
             <a:avLst>
@@ -8239,85 +8193,19 @@
             </a:avLst>
           </a:prstGeom>
           <a:solidFill>
-            <a:srgbClr val="E2E8F0"/>
+            <a:srgbClr val="F8FAFC"/>
           </a:solidFill>
           <a:ln w="12700">
             <a:solidFill>
               <a:srgbClr val="E2E8F0"/>
             </a:solidFill>
-            <a:prstDash val="solid"/>
-          </a:ln>
-        </p:spPr>
-      </p:sp>
-      <p:sp>
-        <p:nvSpPr>
-          <p:cNvPr id="30" name="Text 28"/>
-          <p:cNvSpPr/>
-          <p:nvPr/>
-        </p:nvSpPr>
-        <p:spPr>
-          <a:xfrm>
-            <a:off x="365760" y="4096512"/>
-            <a:ext cx="1371600" cy="804672"/>
-          </a:xfrm>
-          <a:prstGeom prst="rect">
-            <a:avLst/>
-          </a:prstGeom>
-          <a:noFill/>
-          <a:ln/>
-        </p:spPr>
-        <p:txBody>
-          <a:bodyPr wrap="square" lIns="0" tIns="0" rIns="0" bIns="0" rtlCol="0" anchor="ctr"/>
-          <a:lstStyle/>
-          <a:p>
-            <a:pPr algn="ctr" indent="0" marL="0">
-              <a:buNone/>
-            </a:pPr>
-            <a:r>
-              <a:rPr lang="en-US" sz="1100" b="1" dirty="0">
-                <a:solidFill>
-                  <a:srgbClr val="475569"/>
-                </a:solidFill>
-                <a:latin typeface="Trebuchet MS" pitchFamily="34" charset="0"/>
-                <a:ea typeface="Trebuchet MS" pitchFamily="34" charset="-122"/>
-                <a:cs typeface="Trebuchet MS" pitchFamily="34" charset="-120"/>
-              </a:rPr>
-              <a:t>Phonemes</a:t>
-            </a:r>
-            <a:endParaRPr lang="en-US" sz="1100" dirty="0"/>
-          </a:p>
-        </p:txBody>
-      </p:sp>
-      <p:sp>
-        <p:nvSpPr>
-          <p:cNvPr id="31" name="Shape 29"/>
-          <p:cNvSpPr/>
-          <p:nvPr/>
-        </p:nvSpPr>
-        <p:spPr>
-          <a:xfrm>
-            <a:off x="1874520" y="4096512"/>
-            <a:ext cx="6903720" cy="804672"/>
-          </a:xfrm>
-          <a:prstGeom prst="rect">
-            <a:avLst>
-              <a:gd name="adj" fmla="val 6818"/>
-            </a:avLst>
-          </a:prstGeom>
-          <a:solidFill>
-            <a:srgbClr val="F8FAFC"/>
-          </a:solidFill>
-          <a:ln w="12700">
-            <a:solidFill>
-              <a:srgbClr val="E2E8F0"/>
-            </a:solidFill>
             <a:prstDash val="dash"/>
           </a:ln>
         </p:spPr>
       </p:sp>
       <p:sp>
         <p:nvSpPr>
-          <p:cNvPr id="32" name="Text 30"/>
+          <p:cNvPr id="29" name="Text 27"/>
           <p:cNvSpPr/>
           <p:nvPr/>
         </p:nvSpPr>
@@ -8640,7 +8528,7 @@
                 <a:ea typeface="Calibri" pitchFamily="34" charset="-122"/>
                 <a:cs typeface="Calibri" pitchFamily="34" charset="-120"/>
               </a:rPr>
-              <a:t>Word Labs  •  wordlabs.app  •  Prefix: 'semi-' = half, partly, or incomplete</a:t>
+              <a:t>Word Labs  •  wordlabs.app  •  Prefix: 'semi-' = half, partly, or almost</a:t>
             </a:r>
             <a:endParaRPr lang="en-US" sz="800" dirty="0"/>
           </a:p>
@@ -8779,7 +8667,7 @@
                 <a:ea typeface="Trebuchet MS" pitchFamily="34" charset="-122"/>
                 <a:cs typeface="Trebuchet MS" pitchFamily="34" charset="-120"/>
               </a:rPr>
-              <a:t>semidetached</a:t>
+              <a:t>semicircle</a:t>
             </a:r>
             <a:endParaRPr lang="en-US" sz="2800" dirty="0"/>
           </a:p>
@@ -8859,7 +8747,7 @@
         </p:nvSpPr>
         <p:spPr>
           <a:xfrm>
-            <a:off x="2221992" y="2258568"/>
+            <a:off x="2938272" y="2258568"/>
             <a:ext cx="1828800" cy="292608"/>
           </a:xfrm>
           <a:prstGeom prst="rect">
@@ -8893,7 +8781,7 @@
         </p:nvSpPr>
         <p:spPr>
           <a:xfrm>
-            <a:off x="2221992" y="2258568"/>
+            <a:off x="2938272" y="2258568"/>
             <a:ext cx="1828800" cy="292608"/>
           </a:xfrm>
           <a:prstGeom prst="rect">
@@ -8932,7 +8820,7 @@
         </p:nvSpPr>
         <p:spPr>
           <a:xfrm>
-            <a:off x="2221992" y="2569464"/>
+            <a:off x="2938272" y="2569464"/>
             <a:ext cx="1828800" cy="201168"/>
           </a:xfrm>
           <a:prstGeom prst="rect">
@@ -8957,7 +8845,7 @@
                 <a:ea typeface="Calibri" pitchFamily="34" charset="-122"/>
                 <a:cs typeface="Calibri" pitchFamily="34" charset="-120"/>
               </a:rPr>
-              <a:t>half, partly</a:t>
+              <a:t>half</a:t>
             </a:r>
             <a:endParaRPr lang="en-US" sz="850" dirty="0"/>
           </a:p>
@@ -8971,7 +8859,7 @@
         </p:nvSpPr>
         <p:spPr>
           <a:xfrm>
-            <a:off x="4370832" y="2258568"/>
+            <a:off x="5803392" y="2258568"/>
             <a:ext cx="1828800" cy="292608"/>
           </a:xfrm>
           <a:prstGeom prst="rect">
@@ -9005,7 +8893,7 @@
         </p:nvSpPr>
         <p:spPr>
           <a:xfrm>
-            <a:off x="4370832" y="2258568"/>
+            <a:off x="5803392" y="2258568"/>
             <a:ext cx="1828800" cy="292608"/>
           </a:xfrm>
           <a:prstGeom prst="rect">
@@ -9030,7 +8918,7 @@
                 <a:ea typeface="Trebuchet MS" pitchFamily="34" charset="-122"/>
                 <a:cs typeface="Trebuchet MS" pitchFamily="34" charset="-120"/>
               </a:rPr>
-              <a:t>detach</a:t>
+              <a:t>circle</a:t>
             </a:r>
             <a:endParaRPr lang="en-US" sz="1300" dirty="0"/>
           </a:p>
@@ -9044,7 +8932,7 @@
         </p:nvSpPr>
         <p:spPr>
           <a:xfrm>
-            <a:off x="4370832" y="2569464"/>
+            <a:off x="5803392" y="2569464"/>
             <a:ext cx="1828800" cy="201168"/>
           </a:xfrm>
           <a:prstGeom prst="rect">
@@ -9069,7 +8957,7 @@
                 <a:ea typeface="Calibri" pitchFamily="34" charset="-122"/>
                 <a:cs typeface="Calibri" pitchFamily="34" charset="-120"/>
               </a:rPr>
-              <a:t>to separate or disconnect</a:t>
+              <a:t>round shape</a:t>
             </a:r>
             <a:endParaRPr lang="en-US" sz="850" dirty="0"/>
           </a:p>
@@ -9083,30 +8971,23 @@
         </p:nvSpPr>
         <p:spPr>
           <a:xfrm>
-            <a:off x="6519672" y="2258568"/>
-            <a:ext cx="1828800" cy="292608"/>
+            <a:off x="365760" y="3273552"/>
+            <a:ext cx="1371600" cy="658368"/>
           </a:xfrm>
           <a:prstGeom prst="rect">
             <a:avLst>
-              <a:gd name="adj" fmla="val 25000"/>
+              <a:gd name="adj" fmla="val 8333"/>
             </a:avLst>
           </a:prstGeom>
           <a:solidFill>
-            <a:srgbClr val="FCE7F3"/>
-          </a:solidFill>
-          <a:ln w="19050">
-            <a:solidFill>
-              <a:srgbClr val="DB2777"/>
-            </a:solidFill>
-            <a:prstDash val="solid"/>
-          </a:ln>
-          <a:effectLst>
-            <a:outerShdw sx="100000" sy="100000" kx="0" ky="0" algn="bl" rotWithShape="0" blurRad="101600" dist="38100" dir="8100000">
-              <a:srgbClr val="000000">
-                <a:alpha val="12000"/>
-              </a:srgbClr>
-            </a:outerShdw>
-          </a:effectLst>
+            <a:srgbClr val="E2E8F0"/>
+          </a:solidFill>
+          <a:ln w="12700">
+            <a:solidFill>
+              <a:srgbClr val="E2E8F0"/>
+            </a:solidFill>
+            <a:prstDash val="solid"/>
+          </a:ln>
         </p:spPr>
       </p:sp>
       <p:sp>
@@ -9117,86 +8998,47 @@
         </p:nvSpPr>
         <p:spPr>
           <a:xfrm>
-            <a:off x="6519672" y="2258568"/>
-            <a:ext cx="1828800" cy="292608"/>
-          </a:xfrm>
-          <a:prstGeom prst="rect">
-            <a:avLst/>
-          </a:prstGeom>
-          <a:noFill/>
-          <a:ln/>
-        </p:spPr>
-        <p:txBody>
-          <a:bodyPr wrap="square" lIns="0" tIns="0" rIns="0" bIns="0" rtlCol="0" anchor="ctr"/>
-          <a:lstStyle/>
-          <a:p>
-            <a:pPr algn="ctr" indent="0" marL="0">
-              <a:buNone/>
-            </a:pPr>
-            <a:r>
-              <a:rPr lang="en-US" sz="1300" b="1" dirty="0">
-                <a:solidFill>
-                  <a:srgbClr val="9D174D"/>
+            <a:off x="365760" y="3273552"/>
+            <a:ext cx="1371600" cy="658368"/>
+          </a:xfrm>
+          <a:prstGeom prst="rect">
+            <a:avLst/>
+          </a:prstGeom>
+          <a:noFill/>
+          <a:ln/>
+        </p:spPr>
+        <p:txBody>
+          <a:bodyPr wrap="square" lIns="0" tIns="0" rIns="0" bIns="0" rtlCol="0" anchor="ctr"/>
+          <a:lstStyle/>
+          <a:p>
+            <a:pPr algn="ctr" indent="0" marL="0">
+              <a:buNone/>
+            </a:pPr>
+            <a:r>
+              <a:rPr lang="en-US" sz="1100" b="1" dirty="0">
+                <a:solidFill>
+                  <a:srgbClr val="475569"/>
                 </a:solidFill>
                 <a:latin typeface="Trebuchet MS" pitchFamily="34" charset="0"/>
                 <a:ea typeface="Trebuchet MS" pitchFamily="34" charset="-122"/>
                 <a:cs typeface="Trebuchet MS" pitchFamily="34" charset="-120"/>
               </a:rPr>
-              <a:t>ed</a:t>
-            </a:r>
-            <a:endParaRPr lang="en-US" sz="1300" dirty="0"/>
-          </a:p>
-        </p:txBody>
-      </p:sp>
-      <p:sp>
-        <p:nvSpPr>
-          <p:cNvPr id="24" name="Text 22"/>
-          <p:cNvSpPr/>
-          <p:nvPr/>
-        </p:nvSpPr>
-        <p:spPr>
-          <a:xfrm>
-            <a:off x="6519672" y="2569464"/>
-            <a:ext cx="1828800" cy="201168"/>
-          </a:xfrm>
-          <a:prstGeom prst="rect">
-            <a:avLst/>
-          </a:prstGeom>
-          <a:noFill/>
-          <a:ln/>
-        </p:spPr>
-        <p:txBody>
-          <a:bodyPr wrap="square" lIns="0" tIns="0" rIns="0" bIns="0" rtlCol="0" anchor="t"/>
-          <a:lstStyle/>
-          <a:p>
-            <a:pPr algn="ctr" indent="0" marL="0">
-              <a:buNone/>
-            </a:pPr>
-            <a:r>
-              <a:rPr lang="en-US" sz="850" dirty="0">
-                <a:solidFill>
-                  <a:srgbClr val="475569"/>
-                </a:solidFill>
-                <a:latin typeface="Calibri" pitchFamily="34" charset="0"/>
-                <a:ea typeface="Calibri" pitchFamily="34" charset="-122"/>
-                <a:cs typeface="Calibri" pitchFamily="34" charset="-120"/>
-              </a:rPr>
-              <a:t>past tense or describing a state</a:t>
-            </a:r>
-            <a:endParaRPr lang="en-US" sz="850" dirty="0"/>
-          </a:p>
-        </p:txBody>
-      </p:sp>
-      <p:sp>
-        <p:nvSpPr>
-          <p:cNvPr id="25" name="Shape 23"/>
-          <p:cNvSpPr/>
-          <p:nvPr/>
-        </p:nvSpPr>
-        <p:spPr>
-          <a:xfrm>
-            <a:off x="365760" y="3273552"/>
-            <a:ext cx="1371600" cy="658368"/>
+              <a:t>Syllables</a:t>
+            </a:r>
+            <a:endParaRPr lang="en-US" sz="1100" dirty="0"/>
+          </a:p>
+        </p:txBody>
+      </p:sp>
+      <p:sp>
+        <p:nvSpPr>
+          <p:cNvPr id="24" name="Shape 22"/>
+          <p:cNvSpPr/>
+          <p:nvPr/>
+        </p:nvSpPr>
+        <p:spPr>
+          <a:xfrm>
+            <a:off x="1874520" y="3273552"/>
+            <a:ext cx="6903720" cy="658368"/>
           </a:xfrm>
           <a:prstGeom prst="rect">
             <a:avLst>
@@ -9204,11 +9046,38 @@
             </a:avLst>
           </a:prstGeom>
           <a:solidFill>
-            <a:srgbClr val="E2E8F0"/>
-          </a:solidFill>
-          <a:ln w="12700">
-            <a:solidFill>
-              <a:srgbClr val="E2E8F0"/>
+            <a:srgbClr val="CCFBF1"/>
+          </a:solidFill>
+          <a:ln w="12700">
+            <a:solidFill>
+              <a:srgbClr val="0D9488"/>
+            </a:solidFill>
+            <a:prstDash val="solid"/>
+          </a:ln>
+        </p:spPr>
+      </p:sp>
+      <p:sp>
+        <p:nvSpPr>
+          <p:cNvPr id="25" name="Shape 23"/>
+          <p:cNvSpPr/>
+          <p:nvPr/>
+        </p:nvSpPr>
+        <p:spPr>
+          <a:xfrm>
+            <a:off x="1975104" y="3364992"/>
+            <a:ext cx="1554480" cy="475488"/>
+          </a:xfrm>
+          <a:prstGeom prst="rect">
+            <a:avLst>
+              <a:gd name="adj" fmla="val 9615"/>
+            </a:avLst>
+          </a:prstGeom>
+          <a:solidFill>
+            <a:srgbClr val="FFFFFF"/>
+          </a:solidFill>
+          <a:ln w="12700">
+            <a:solidFill>
+              <a:srgbClr val="0D9488"/>
             </a:solidFill>
             <a:prstDash val="solid"/>
           </a:ln>
@@ -9222,63 +9091,75 @@
         </p:nvSpPr>
         <p:spPr>
           <a:xfrm>
-            <a:off x="365760" y="3273552"/>
-            <a:ext cx="1371600" cy="658368"/>
-          </a:xfrm>
-          <a:prstGeom prst="rect">
-            <a:avLst/>
-          </a:prstGeom>
-          <a:noFill/>
-          <a:ln/>
-        </p:spPr>
-        <p:txBody>
-          <a:bodyPr wrap="square" lIns="0" tIns="0" rIns="0" bIns="0" rtlCol="0" anchor="ctr"/>
-          <a:lstStyle/>
-          <a:p>
-            <a:pPr algn="ctr" indent="0" marL="0">
-              <a:buNone/>
-            </a:pPr>
-            <a:r>
-              <a:rPr lang="en-US" sz="1100" b="1" dirty="0">
-                <a:solidFill>
-                  <a:srgbClr val="475569"/>
+            <a:off x="1975104" y="3364992"/>
+            <a:ext cx="1554480" cy="475488"/>
+          </a:xfrm>
+          <a:prstGeom prst="rect">
+            <a:avLst/>
+          </a:prstGeom>
+          <a:noFill/>
+          <a:ln/>
+        </p:spPr>
+        <p:txBody>
+          <a:bodyPr wrap="square" lIns="0" tIns="0" rIns="0" bIns="0" rtlCol="0" anchor="ctr"/>
+          <a:lstStyle/>
+          <a:p>
+            <a:pPr algn="ctr" indent="0" marL="0">
+              <a:buNone/>
+            </a:pPr>
+            <a:r>
+              <a:rPr lang="en-US" sz="1400" b="1" dirty="0">
+                <a:solidFill>
+                  <a:srgbClr val="0D9488"/>
                 </a:solidFill>
                 <a:latin typeface="Trebuchet MS" pitchFamily="34" charset="0"/>
                 <a:ea typeface="Trebuchet MS" pitchFamily="34" charset="-122"/>
                 <a:cs typeface="Trebuchet MS" pitchFamily="34" charset="-120"/>
               </a:rPr>
-              <a:t>Syllables</a:t>
-            </a:r>
-            <a:endParaRPr lang="en-US" sz="1100" dirty="0"/>
-          </a:p>
-        </p:txBody>
-      </p:sp>
-      <p:sp>
-        <p:nvSpPr>
-          <p:cNvPr id="27" name="Shape 25"/>
-          <p:cNvSpPr/>
-          <p:nvPr/>
-        </p:nvSpPr>
-        <p:spPr>
-          <a:xfrm>
-            <a:off x="1874520" y="3273552"/>
-            <a:ext cx="6903720" cy="658368"/>
-          </a:xfrm>
-          <a:prstGeom prst="rect">
-            <a:avLst>
-              <a:gd name="adj" fmla="val 8333"/>
-            </a:avLst>
-          </a:prstGeom>
-          <a:solidFill>
-            <a:srgbClr val="CCFBF1"/>
-          </a:solidFill>
-          <a:ln w="12700">
-            <a:solidFill>
-              <a:srgbClr val="0D9488"/>
-            </a:solidFill>
-            <a:prstDash val="solid"/>
-          </a:ln>
-        </p:spPr>
+              <a:t>sem</a:t>
+            </a:r>
+            <a:endParaRPr lang="en-US" sz="1400" dirty="0"/>
+          </a:p>
+        </p:txBody>
+      </p:sp>
+      <p:sp>
+        <p:nvSpPr>
+          <p:cNvPr id="27" name="Text 25"/>
+          <p:cNvSpPr/>
+          <p:nvPr/>
+        </p:nvSpPr>
+        <p:spPr>
+          <a:xfrm>
+            <a:off x="3529584" y="3364992"/>
+            <a:ext cx="73152" cy="475488"/>
+          </a:xfrm>
+          <a:prstGeom prst="rect">
+            <a:avLst/>
+          </a:prstGeom>
+          <a:noFill/>
+          <a:ln/>
+        </p:spPr>
+        <p:txBody>
+          <a:bodyPr wrap="square" lIns="0" tIns="0" rIns="0" bIns="0" rtlCol="0" anchor="ctr"/>
+          <a:lstStyle/>
+          <a:p>
+            <a:pPr algn="ctr" indent="0" marL="0">
+              <a:buNone/>
+            </a:pPr>
+            <a:r>
+              <a:rPr lang="en-US" sz="1600" b="1" dirty="0">
+                <a:solidFill>
+                  <a:srgbClr val="0D9488"/>
+                </a:solidFill>
+                <a:latin typeface="Trebuchet MS" pitchFamily="34" charset="0"/>
+                <a:ea typeface="Trebuchet MS" pitchFamily="34" charset="-122"/>
+                <a:cs typeface="Trebuchet MS" pitchFamily="34" charset="-120"/>
+              </a:rPr>
+              <a:t>·</a:t>
+            </a:r>
+            <a:endParaRPr lang="en-US" sz="1600" dirty="0"/>
+          </a:p>
+        </p:txBody>
       </p:sp>
       <p:sp>
         <p:nvSpPr>
@@ -9288,7 +9169,7 @@
         </p:nvSpPr>
         <p:spPr>
           <a:xfrm>
-            <a:off x="1975104" y="3364992"/>
+            <a:off x="3602736" y="3364992"/>
             <a:ext cx="1554480" cy="475488"/>
           </a:xfrm>
           <a:prstGeom prst="rect">
@@ -9315,7 +9196,7 @@
         </p:nvSpPr>
         <p:spPr>
           <a:xfrm>
-            <a:off x="1975104" y="3364992"/>
+            <a:off x="3602736" y="3364992"/>
             <a:ext cx="1554480" cy="475488"/>
           </a:xfrm>
           <a:prstGeom prst="rect">
@@ -9340,7 +9221,7 @@
                 <a:ea typeface="Trebuchet MS" pitchFamily="34" charset="-122"/>
                 <a:cs typeface="Trebuchet MS" pitchFamily="34" charset="-120"/>
               </a:rPr>
-              <a:t>sem</a:t>
+              <a:t>i</a:t>
             </a:r>
             <a:endParaRPr lang="en-US" sz="1400" dirty="0"/>
           </a:p>
@@ -9354,7 +9235,7 @@
         </p:nvSpPr>
         <p:spPr>
           <a:xfrm>
-            <a:off x="3529584" y="3364992"/>
+            <a:off x="5157216" y="3364992"/>
             <a:ext cx="73152" cy="475488"/>
           </a:xfrm>
           <a:prstGeom prst="rect">
@@ -9393,7 +9274,7 @@
         </p:nvSpPr>
         <p:spPr>
           <a:xfrm>
-            <a:off x="3602736" y="3364992"/>
+            <a:off x="5230368" y="3364992"/>
             <a:ext cx="1554480" cy="475488"/>
           </a:xfrm>
           <a:prstGeom prst="rect">
@@ -9420,7 +9301,7 @@
         </p:nvSpPr>
         <p:spPr>
           <a:xfrm>
-            <a:off x="3602736" y="3364992"/>
+            <a:off x="5230368" y="3364992"/>
             <a:ext cx="1554480" cy="475488"/>
           </a:xfrm>
           <a:prstGeom prst="rect">
@@ -9445,7 +9326,7 @@
                 <a:ea typeface="Trebuchet MS" pitchFamily="34" charset="-122"/>
                 <a:cs typeface="Trebuchet MS" pitchFamily="34" charset="-120"/>
               </a:rPr>
-              <a:t>i</a:t>
+              <a:t>cir</a:t>
             </a:r>
             <a:endParaRPr lang="en-US" sz="1400" dirty="0"/>
           </a:p>
@@ -9459,7 +9340,7 @@
         </p:nvSpPr>
         <p:spPr>
           <a:xfrm>
-            <a:off x="5157216" y="3364992"/>
+            <a:off x="6784848" y="3364992"/>
             <a:ext cx="73152" cy="475488"/>
           </a:xfrm>
           <a:prstGeom prst="rect">
@@ -9498,7 +9379,7 @@
         </p:nvSpPr>
         <p:spPr>
           <a:xfrm>
-            <a:off x="5230368" y="3364992"/>
+            <a:off x="6858000" y="3364992"/>
             <a:ext cx="1554480" cy="475488"/>
           </a:xfrm>
           <a:prstGeom prst="rect">
@@ -9525,7 +9406,7 @@
         </p:nvSpPr>
         <p:spPr>
           <a:xfrm>
-            <a:off x="5230368" y="3364992"/>
+            <a:off x="6858000" y="3364992"/>
             <a:ext cx="1554480" cy="475488"/>
           </a:xfrm>
           <a:prstGeom prst="rect">
@@ -9550,7 +9431,7 @@
                 <a:ea typeface="Trebuchet MS" pitchFamily="34" charset="-122"/>
                 <a:cs typeface="Trebuchet MS" pitchFamily="34" charset="-120"/>
               </a:rPr>
-              <a:t>de</a:t>
+              <a:t>cle</a:t>
             </a:r>
             <a:endParaRPr lang="en-US" sz="1400" dirty="0"/>
           </a:p>
@@ -9558,119 +9439,80 @@
       </p:sp>
       <p:sp>
         <p:nvSpPr>
-          <p:cNvPr id="36" name="Text 34"/>
-          <p:cNvSpPr/>
-          <p:nvPr/>
-        </p:nvSpPr>
-        <p:spPr>
-          <a:xfrm>
-            <a:off x="6784848" y="3364992"/>
-            <a:ext cx="73152" cy="475488"/>
-          </a:xfrm>
-          <a:prstGeom prst="rect">
-            <a:avLst/>
-          </a:prstGeom>
-          <a:noFill/>
-          <a:ln/>
-        </p:spPr>
-        <p:txBody>
-          <a:bodyPr wrap="square" lIns="0" tIns="0" rIns="0" bIns="0" rtlCol="0" anchor="ctr"/>
-          <a:lstStyle/>
-          <a:p>
-            <a:pPr algn="ctr" indent="0" marL="0">
-              <a:buNone/>
-            </a:pPr>
-            <a:r>
-              <a:rPr lang="en-US" sz="1600" b="1" dirty="0">
-                <a:solidFill>
-                  <a:srgbClr val="0D9488"/>
+          <p:cNvPr id="36" name="Shape 34"/>
+          <p:cNvSpPr/>
+          <p:nvPr/>
+        </p:nvSpPr>
+        <p:spPr>
+          <a:xfrm>
+            <a:off x="365760" y="4096512"/>
+            <a:ext cx="1371600" cy="804672"/>
+          </a:xfrm>
+          <a:prstGeom prst="rect">
+            <a:avLst>
+              <a:gd name="adj" fmla="val 6818"/>
+            </a:avLst>
+          </a:prstGeom>
+          <a:solidFill>
+            <a:srgbClr val="E2E8F0"/>
+          </a:solidFill>
+          <a:ln w="12700">
+            <a:solidFill>
+              <a:srgbClr val="E2E8F0"/>
+            </a:solidFill>
+            <a:prstDash val="solid"/>
+          </a:ln>
+        </p:spPr>
+      </p:sp>
+      <p:sp>
+        <p:nvSpPr>
+          <p:cNvPr id="37" name="Text 35"/>
+          <p:cNvSpPr/>
+          <p:nvPr/>
+        </p:nvSpPr>
+        <p:spPr>
+          <a:xfrm>
+            <a:off x="365760" y="4096512"/>
+            <a:ext cx="1371600" cy="804672"/>
+          </a:xfrm>
+          <a:prstGeom prst="rect">
+            <a:avLst/>
+          </a:prstGeom>
+          <a:noFill/>
+          <a:ln/>
+        </p:spPr>
+        <p:txBody>
+          <a:bodyPr wrap="square" lIns="0" tIns="0" rIns="0" bIns="0" rtlCol="0" anchor="ctr"/>
+          <a:lstStyle/>
+          <a:p>
+            <a:pPr algn="ctr" indent="0" marL="0">
+              <a:buNone/>
+            </a:pPr>
+            <a:r>
+              <a:rPr lang="en-US" sz="1100" b="1" dirty="0">
+                <a:solidFill>
+                  <a:srgbClr val="475569"/>
                 </a:solidFill>
                 <a:latin typeface="Trebuchet MS" pitchFamily="34" charset="0"/>
                 <a:ea typeface="Trebuchet MS" pitchFamily="34" charset="-122"/>
                 <a:cs typeface="Trebuchet MS" pitchFamily="34" charset="-120"/>
               </a:rPr>
-              <a:t>·</a:t>
-            </a:r>
-            <a:endParaRPr lang="en-US" sz="1600" dirty="0"/>
-          </a:p>
-        </p:txBody>
-      </p:sp>
-      <p:sp>
-        <p:nvSpPr>
-          <p:cNvPr id="37" name="Shape 35"/>
-          <p:cNvSpPr/>
-          <p:nvPr/>
-        </p:nvSpPr>
-        <p:spPr>
-          <a:xfrm>
-            <a:off x="6858000" y="3364992"/>
-            <a:ext cx="1554480" cy="475488"/>
-          </a:xfrm>
-          <a:prstGeom prst="rect">
-            <a:avLst>
-              <a:gd name="adj" fmla="val 9615"/>
-            </a:avLst>
-          </a:prstGeom>
-          <a:solidFill>
-            <a:srgbClr val="FFFFFF"/>
-          </a:solidFill>
-          <a:ln w="12700">
-            <a:solidFill>
-              <a:srgbClr val="0D9488"/>
-            </a:solidFill>
-            <a:prstDash val="solid"/>
-          </a:ln>
-        </p:spPr>
-      </p:sp>
-      <p:sp>
-        <p:nvSpPr>
-          <p:cNvPr id="38" name="Text 36"/>
-          <p:cNvSpPr/>
-          <p:nvPr/>
-        </p:nvSpPr>
-        <p:spPr>
-          <a:xfrm>
-            <a:off x="6858000" y="3364992"/>
-            <a:ext cx="1554480" cy="475488"/>
-          </a:xfrm>
-          <a:prstGeom prst="rect">
-            <a:avLst/>
-          </a:prstGeom>
-          <a:noFill/>
-          <a:ln/>
-        </p:spPr>
-        <p:txBody>
-          <a:bodyPr wrap="square" lIns="0" tIns="0" rIns="0" bIns="0" rtlCol="0" anchor="ctr"/>
-          <a:lstStyle/>
-          <a:p>
-            <a:pPr algn="ctr" indent="0" marL="0">
-              <a:buNone/>
-            </a:pPr>
-            <a:r>
-              <a:rPr lang="en-US" sz="1400" b="1" dirty="0">
-                <a:solidFill>
-                  <a:srgbClr val="0D9488"/>
-                </a:solidFill>
-                <a:latin typeface="Trebuchet MS" pitchFamily="34" charset="0"/>
-                <a:ea typeface="Trebuchet MS" pitchFamily="34" charset="-122"/>
-                <a:cs typeface="Trebuchet MS" pitchFamily="34" charset="-120"/>
-              </a:rPr>
-              <a:t>tached</a:t>
-            </a:r>
-            <a:endParaRPr lang="en-US" sz="1400" dirty="0"/>
-          </a:p>
-        </p:txBody>
-      </p:sp>
-      <p:sp>
-        <p:nvSpPr>
-          <p:cNvPr id="39" name="Shape 37"/>
-          <p:cNvSpPr/>
-          <p:nvPr/>
-        </p:nvSpPr>
-        <p:spPr>
-          <a:xfrm>
-            <a:off x="365760" y="4096512"/>
-            <a:ext cx="1371600" cy="804672"/>
+              <a:t>Phonemes</a:t>
+            </a:r>
+            <a:endParaRPr lang="en-US" sz="1100" dirty="0"/>
+          </a:p>
+        </p:txBody>
+      </p:sp>
+      <p:sp>
+        <p:nvSpPr>
+          <p:cNvPr id="38" name="Shape 36"/>
+          <p:cNvSpPr/>
+          <p:nvPr/>
+        </p:nvSpPr>
+        <p:spPr>
+          <a:xfrm>
+            <a:off x="1874520" y="4096512"/>
+            <a:ext cx="6903720" cy="804672"/>
           </a:xfrm>
           <a:prstGeom prst="rect">
             <a:avLst>
@@ -9678,85 +9520,19 @@
             </a:avLst>
           </a:prstGeom>
           <a:solidFill>
-            <a:srgbClr val="E2E8F0"/>
+            <a:srgbClr val="F8FAFC"/>
           </a:solidFill>
           <a:ln w="12700">
             <a:solidFill>
               <a:srgbClr val="E2E8F0"/>
             </a:solidFill>
-            <a:prstDash val="solid"/>
-          </a:ln>
-        </p:spPr>
-      </p:sp>
-      <p:sp>
-        <p:nvSpPr>
-          <p:cNvPr id="40" name="Text 38"/>
-          <p:cNvSpPr/>
-          <p:nvPr/>
-        </p:nvSpPr>
-        <p:spPr>
-          <a:xfrm>
-            <a:off x="365760" y="4096512"/>
-            <a:ext cx="1371600" cy="804672"/>
-          </a:xfrm>
-          <a:prstGeom prst="rect">
-            <a:avLst/>
-          </a:prstGeom>
-          <a:noFill/>
-          <a:ln/>
-        </p:spPr>
-        <p:txBody>
-          <a:bodyPr wrap="square" lIns="0" tIns="0" rIns="0" bIns="0" rtlCol="0" anchor="ctr"/>
-          <a:lstStyle/>
-          <a:p>
-            <a:pPr algn="ctr" indent="0" marL="0">
-              <a:buNone/>
-            </a:pPr>
-            <a:r>
-              <a:rPr lang="en-US" sz="1100" b="1" dirty="0">
-                <a:solidFill>
-                  <a:srgbClr val="475569"/>
-                </a:solidFill>
-                <a:latin typeface="Trebuchet MS" pitchFamily="34" charset="0"/>
-                <a:ea typeface="Trebuchet MS" pitchFamily="34" charset="-122"/>
-                <a:cs typeface="Trebuchet MS" pitchFamily="34" charset="-120"/>
-              </a:rPr>
-              <a:t>Phonemes</a:t>
-            </a:r>
-            <a:endParaRPr lang="en-US" sz="1100" dirty="0"/>
-          </a:p>
-        </p:txBody>
-      </p:sp>
-      <p:sp>
-        <p:nvSpPr>
-          <p:cNvPr id="41" name="Shape 39"/>
-          <p:cNvSpPr/>
-          <p:nvPr/>
-        </p:nvSpPr>
-        <p:spPr>
-          <a:xfrm>
-            <a:off x="1874520" y="4096512"/>
-            <a:ext cx="6903720" cy="804672"/>
-          </a:xfrm>
-          <a:prstGeom prst="rect">
-            <a:avLst>
-              <a:gd name="adj" fmla="val 6818"/>
-            </a:avLst>
-          </a:prstGeom>
-          <a:solidFill>
-            <a:srgbClr val="F8FAFC"/>
-          </a:solidFill>
-          <a:ln w="12700">
-            <a:solidFill>
-              <a:srgbClr val="E2E8F0"/>
-            </a:solidFill>
             <a:prstDash val="dash"/>
           </a:ln>
         </p:spPr>
       </p:sp>
       <p:sp>
         <p:nvSpPr>
-          <p:cNvPr id="42" name="Text 40"/>
+          <p:cNvPr id="39" name="Text 37"/>
           <p:cNvSpPr/>
           <p:nvPr/>
         </p:nvSpPr>
@@ -10079,7 +9855,7 @@
                 <a:ea typeface="Calibri" pitchFamily="34" charset="-122"/>
                 <a:cs typeface="Calibri" pitchFamily="34" charset="-120"/>
               </a:rPr>
-              <a:t>Word Labs  •  wordlabs.app  •  Prefix: 'semi-' = half, partly, or incomplete</a:t>
+              <a:t>Word Labs  •  wordlabs.app  •  Prefix: 'semi-' = half, partly, or almost</a:t>
             </a:r>
             <a:endParaRPr lang="en-US" sz="800" dirty="0"/>
           </a:p>
@@ -10218,7 +9994,7 @@
                 <a:ea typeface="Trebuchet MS" pitchFamily="34" charset="-122"/>
                 <a:cs typeface="Trebuchet MS" pitchFamily="34" charset="-120"/>
               </a:rPr>
-              <a:t>semidetached</a:t>
+              <a:t>semicircle</a:t>
             </a:r>
             <a:endParaRPr lang="en-US" sz="2800" dirty="0"/>
           </a:p>
@@ -10298,7 +10074,7 @@
         </p:nvSpPr>
         <p:spPr>
           <a:xfrm>
-            <a:off x="2221992" y="2258568"/>
+            <a:off x="2938272" y="2258568"/>
             <a:ext cx="1828800" cy="292608"/>
           </a:xfrm>
           <a:prstGeom prst="rect">
@@ -10332,7 +10108,7 @@
         </p:nvSpPr>
         <p:spPr>
           <a:xfrm>
-            <a:off x="2221992" y="2258568"/>
+            <a:off x="2938272" y="2258568"/>
             <a:ext cx="1828800" cy="292608"/>
           </a:xfrm>
           <a:prstGeom prst="rect">
@@ -10371,7 +10147,7 @@
         </p:nvSpPr>
         <p:spPr>
           <a:xfrm>
-            <a:off x="2221992" y="2569464"/>
+            <a:off x="2938272" y="2569464"/>
             <a:ext cx="1828800" cy="201168"/>
           </a:xfrm>
           <a:prstGeom prst="rect">
@@ -10396,7 +10172,7 @@
                 <a:ea typeface="Calibri" pitchFamily="34" charset="-122"/>
                 <a:cs typeface="Calibri" pitchFamily="34" charset="-120"/>
               </a:rPr>
-              <a:t>half, partly</a:t>
+              <a:t>half</a:t>
             </a:r>
             <a:endParaRPr lang="en-US" sz="850" dirty="0"/>
           </a:p>
@@ -10410,7 +10186,7 @@
         </p:nvSpPr>
         <p:spPr>
           <a:xfrm>
-            <a:off x="4370832" y="2258568"/>
+            <a:off x="5803392" y="2258568"/>
             <a:ext cx="1828800" cy="292608"/>
           </a:xfrm>
           <a:prstGeom prst="rect">
@@ -10444,7 +10220,7 @@
         </p:nvSpPr>
         <p:spPr>
           <a:xfrm>
-            <a:off x="4370832" y="2258568"/>
+            <a:off x="5803392" y="2258568"/>
             <a:ext cx="1828800" cy="292608"/>
           </a:xfrm>
           <a:prstGeom prst="rect">
@@ -10469,7 +10245,7 @@
                 <a:ea typeface="Trebuchet MS" pitchFamily="34" charset="-122"/>
                 <a:cs typeface="Trebuchet MS" pitchFamily="34" charset="-120"/>
               </a:rPr>
-              <a:t>detach</a:t>
+              <a:t>circle</a:t>
             </a:r>
             <a:endParaRPr lang="en-US" sz="1300" dirty="0"/>
           </a:p>
@@ -10483,7 +10259,7 @@
         </p:nvSpPr>
         <p:spPr>
           <a:xfrm>
-            <a:off x="4370832" y="2569464"/>
+            <a:off x="5803392" y="2569464"/>
             <a:ext cx="1828800" cy="201168"/>
           </a:xfrm>
           <a:prstGeom prst="rect">
@@ -10508,7 +10284,7 @@
                 <a:ea typeface="Calibri" pitchFamily="34" charset="-122"/>
                 <a:cs typeface="Calibri" pitchFamily="34" charset="-120"/>
               </a:rPr>
-              <a:t>to separate or disconnect</a:t>
+              <a:t>round shape</a:t>
             </a:r>
             <a:endParaRPr lang="en-US" sz="850" dirty="0"/>
           </a:p>
@@ -10522,30 +10298,23 @@
         </p:nvSpPr>
         <p:spPr>
           <a:xfrm>
-            <a:off x="6519672" y="2258568"/>
-            <a:ext cx="1828800" cy="292608"/>
+            <a:off x="365760" y="3273552"/>
+            <a:ext cx="1371600" cy="658368"/>
           </a:xfrm>
           <a:prstGeom prst="rect">
             <a:avLst>
-              <a:gd name="adj" fmla="val 25000"/>
+              <a:gd name="adj" fmla="val 8333"/>
             </a:avLst>
           </a:prstGeom>
           <a:solidFill>
-            <a:srgbClr val="FCE7F3"/>
-          </a:solidFill>
-          <a:ln w="19050">
-            <a:solidFill>
-              <a:srgbClr val="DB2777"/>
-            </a:solidFill>
-            <a:prstDash val="solid"/>
-          </a:ln>
-          <a:effectLst>
-            <a:outerShdw sx="100000" sy="100000" kx="0" ky="0" algn="bl" rotWithShape="0" blurRad="101600" dist="38100" dir="8100000">
-              <a:srgbClr val="000000">
-                <a:alpha val="12000"/>
-              </a:srgbClr>
-            </a:outerShdw>
-          </a:effectLst>
+            <a:srgbClr val="E2E8F0"/>
+          </a:solidFill>
+          <a:ln w="12700">
+            <a:solidFill>
+              <a:srgbClr val="E2E8F0"/>
+            </a:solidFill>
+            <a:prstDash val="solid"/>
+          </a:ln>
         </p:spPr>
       </p:sp>
       <p:sp>
@@ -10556,86 +10325,47 @@
         </p:nvSpPr>
         <p:spPr>
           <a:xfrm>
-            <a:off x="6519672" y="2258568"/>
-            <a:ext cx="1828800" cy="292608"/>
-          </a:xfrm>
-          <a:prstGeom prst="rect">
-            <a:avLst/>
-          </a:prstGeom>
-          <a:noFill/>
-          <a:ln/>
-        </p:spPr>
-        <p:txBody>
-          <a:bodyPr wrap="square" lIns="0" tIns="0" rIns="0" bIns="0" rtlCol="0" anchor="ctr"/>
-          <a:lstStyle/>
-          <a:p>
-            <a:pPr algn="ctr" indent="0" marL="0">
-              <a:buNone/>
-            </a:pPr>
-            <a:r>
-              <a:rPr lang="en-US" sz="1300" b="1" dirty="0">
-                <a:solidFill>
-                  <a:srgbClr val="9D174D"/>
+            <a:off x="365760" y="3273552"/>
+            <a:ext cx="1371600" cy="658368"/>
+          </a:xfrm>
+          <a:prstGeom prst="rect">
+            <a:avLst/>
+          </a:prstGeom>
+          <a:noFill/>
+          <a:ln/>
+        </p:spPr>
+        <p:txBody>
+          <a:bodyPr wrap="square" lIns="0" tIns="0" rIns="0" bIns="0" rtlCol="0" anchor="ctr"/>
+          <a:lstStyle/>
+          <a:p>
+            <a:pPr algn="ctr" indent="0" marL="0">
+              <a:buNone/>
+            </a:pPr>
+            <a:r>
+              <a:rPr lang="en-US" sz="1100" b="1" dirty="0">
+                <a:solidFill>
+                  <a:srgbClr val="475569"/>
                 </a:solidFill>
                 <a:latin typeface="Trebuchet MS" pitchFamily="34" charset="0"/>
                 <a:ea typeface="Trebuchet MS" pitchFamily="34" charset="-122"/>
                 <a:cs typeface="Trebuchet MS" pitchFamily="34" charset="-120"/>
               </a:rPr>
-              <a:t>ed</a:t>
-            </a:r>
-            <a:endParaRPr lang="en-US" sz="1300" dirty="0"/>
-          </a:p>
-        </p:txBody>
-      </p:sp>
-      <p:sp>
-        <p:nvSpPr>
-          <p:cNvPr id="24" name="Text 22"/>
-          <p:cNvSpPr/>
-          <p:nvPr/>
-        </p:nvSpPr>
-        <p:spPr>
-          <a:xfrm>
-            <a:off x="6519672" y="2569464"/>
-            <a:ext cx="1828800" cy="201168"/>
-          </a:xfrm>
-          <a:prstGeom prst="rect">
-            <a:avLst/>
-          </a:prstGeom>
-          <a:noFill/>
-          <a:ln/>
-        </p:spPr>
-        <p:txBody>
-          <a:bodyPr wrap="square" lIns="0" tIns="0" rIns="0" bIns="0" rtlCol="0" anchor="t"/>
-          <a:lstStyle/>
-          <a:p>
-            <a:pPr algn="ctr" indent="0" marL="0">
-              <a:buNone/>
-            </a:pPr>
-            <a:r>
-              <a:rPr lang="en-US" sz="850" dirty="0">
-                <a:solidFill>
-                  <a:srgbClr val="475569"/>
-                </a:solidFill>
-                <a:latin typeface="Calibri" pitchFamily="34" charset="0"/>
-                <a:ea typeface="Calibri" pitchFamily="34" charset="-122"/>
-                <a:cs typeface="Calibri" pitchFamily="34" charset="-120"/>
-              </a:rPr>
-              <a:t>past tense or describing a state</a:t>
-            </a:r>
-            <a:endParaRPr lang="en-US" sz="850" dirty="0"/>
-          </a:p>
-        </p:txBody>
-      </p:sp>
-      <p:sp>
-        <p:nvSpPr>
-          <p:cNvPr id="25" name="Shape 23"/>
-          <p:cNvSpPr/>
-          <p:nvPr/>
-        </p:nvSpPr>
-        <p:spPr>
-          <a:xfrm>
-            <a:off x="365760" y="3273552"/>
-            <a:ext cx="1371600" cy="658368"/>
+              <a:t>Syllables</a:t>
+            </a:r>
+            <a:endParaRPr lang="en-US" sz="1100" dirty="0"/>
+          </a:p>
+        </p:txBody>
+      </p:sp>
+      <p:sp>
+        <p:nvSpPr>
+          <p:cNvPr id="24" name="Shape 22"/>
+          <p:cNvSpPr/>
+          <p:nvPr/>
+        </p:nvSpPr>
+        <p:spPr>
+          <a:xfrm>
+            <a:off x="1874520" y="3273552"/>
+            <a:ext cx="6903720" cy="658368"/>
           </a:xfrm>
           <a:prstGeom prst="rect">
             <a:avLst>
@@ -10643,11 +10373,38 @@
             </a:avLst>
           </a:prstGeom>
           <a:solidFill>
-            <a:srgbClr val="E2E8F0"/>
-          </a:solidFill>
-          <a:ln w="12700">
-            <a:solidFill>
-              <a:srgbClr val="E2E8F0"/>
+            <a:srgbClr val="CCFBF1"/>
+          </a:solidFill>
+          <a:ln w="12700">
+            <a:solidFill>
+              <a:srgbClr val="0D9488"/>
+            </a:solidFill>
+            <a:prstDash val="solid"/>
+          </a:ln>
+        </p:spPr>
+      </p:sp>
+      <p:sp>
+        <p:nvSpPr>
+          <p:cNvPr id="25" name="Shape 23"/>
+          <p:cNvSpPr/>
+          <p:nvPr/>
+        </p:nvSpPr>
+        <p:spPr>
+          <a:xfrm>
+            <a:off x="1975104" y="3364992"/>
+            <a:ext cx="1554480" cy="475488"/>
+          </a:xfrm>
+          <a:prstGeom prst="rect">
+            <a:avLst>
+              <a:gd name="adj" fmla="val 9615"/>
+            </a:avLst>
+          </a:prstGeom>
+          <a:solidFill>
+            <a:srgbClr val="FFFFFF"/>
+          </a:solidFill>
+          <a:ln w="12700">
+            <a:solidFill>
+              <a:srgbClr val="0D9488"/>
             </a:solidFill>
             <a:prstDash val="solid"/>
           </a:ln>
@@ -10661,32 +10418,413 @@
         </p:nvSpPr>
         <p:spPr>
           <a:xfrm>
-            <a:off x="365760" y="3273552"/>
-            <a:ext cx="1371600" cy="658368"/>
-          </a:xfrm>
-          <a:prstGeom prst="rect">
-            <a:avLst/>
-          </a:prstGeom>
-          <a:noFill/>
-          <a:ln/>
-        </p:spPr>
-        <p:txBody>
-          <a:bodyPr wrap="square" lIns="0" tIns="0" rIns="0" bIns="0" rtlCol="0" anchor="ctr"/>
-          <a:lstStyle/>
-          <a:p>
-            <a:pPr algn="ctr" indent="0" marL="0">
-              <a:buNone/>
-            </a:pPr>
-            <a:r>
-              <a:rPr lang="en-US" sz="1100" b="1" dirty="0">
-                <a:solidFill>
-                  <a:srgbClr val="475569"/>
+            <a:off x="1975104" y="3364992"/>
+            <a:ext cx="1554480" cy="475488"/>
+          </a:xfrm>
+          <a:prstGeom prst="rect">
+            <a:avLst/>
+          </a:prstGeom>
+          <a:noFill/>
+          <a:ln/>
+        </p:spPr>
+        <p:txBody>
+          <a:bodyPr wrap="square" lIns="0" tIns="0" rIns="0" bIns="0" rtlCol="0" anchor="ctr"/>
+          <a:lstStyle/>
+          <a:p>
+            <a:pPr algn="ctr" indent="0" marL="0">
+              <a:buNone/>
+            </a:pPr>
+            <a:r>
+              <a:rPr lang="en-US" sz="1400" b="1" dirty="0">
+                <a:solidFill>
+                  <a:srgbClr val="0D9488"/>
                 </a:solidFill>
                 <a:latin typeface="Trebuchet MS" pitchFamily="34" charset="0"/>
                 <a:ea typeface="Trebuchet MS" pitchFamily="34" charset="-122"/>
                 <a:cs typeface="Trebuchet MS" pitchFamily="34" charset="-120"/>
               </a:rPr>
-              <a:t>Syllables</a:t>
+              <a:t>sem</a:t>
+            </a:r>
+            <a:endParaRPr lang="en-US" sz="1400" dirty="0"/>
+          </a:p>
+        </p:txBody>
+      </p:sp>
+      <p:sp>
+        <p:nvSpPr>
+          <p:cNvPr id="27" name="Text 25"/>
+          <p:cNvSpPr/>
+          <p:nvPr/>
+        </p:nvSpPr>
+        <p:spPr>
+          <a:xfrm>
+            <a:off x="3529584" y="3364992"/>
+            <a:ext cx="73152" cy="475488"/>
+          </a:xfrm>
+          <a:prstGeom prst="rect">
+            <a:avLst/>
+          </a:prstGeom>
+          <a:noFill/>
+          <a:ln/>
+        </p:spPr>
+        <p:txBody>
+          <a:bodyPr wrap="square" lIns="0" tIns="0" rIns="0" bIns="0" rtlCol="0" anchor="ctr"/>
+          <a:lstStyle/>
+          <a:p>
+            <a:pPr algn="ctr" indent="0" marL="0">
+              <a:buNone/>
+            </a:pPr>
+            <a:r>
+              <a:rPr lang="en-US" sz="1600" b="1" dirty="0">
+                <a:solidFill>
+                  <a:srgbClr val="0D9488"/>
+                </a:solidFill>
+                <a:latin typeface="Trebuchet MS" pitchFamily="34" charset="0"/>
+                <a:ea typeface="Trebuchet MS" pitchFamily="34" charset="-122"/>
+                <a:cs typeface="Trebuchet MS" pitchFamily="34" charset="-120"/>
+              </a:rPr>
+              <a:t>·</a:t>
+            </a:r>
+            <a:endParaRPr lang="en-US" sz="1600" dirty="0"/>
+          </a:p>
+        </p:txBody>
+      </p:sp>
+      <p:sp>
+        <p:nvSpPr>
+          <p:cNvPr id="28" name="Shape 26"/>
+          <p:cNvSpPr/>
+          <p:nvPr/>
+        </p:nvSpPr>
+        <p:spPr>
+          <a:xfrm>
+            <a:off x="3602736" y="3364992"/>
+            <a:ext cx="1554480" cy="475488"/>
+          </a:xfrm>
+          <a:prstGeom prst="rect">
+            <a:avLst>
+              <a:gd name="adj" fmla="val 9615"/>
+            </a:avLst>
+          </a:prstGeom>
+          <a:solidFill>
+            <a:srgbClr val="FFFFFF"/>
+          </a:solidFill>
+          <a:ln w="12700">
+            <a:solidFill>
+              <a:srgbClr val="0D9488"/>
+            </a:solidFill>
+            <a:prstDash val="solid"/>
+          </a:ln>
+        </p:spPr>
+      </p:sp>
+      <p:sp>
+        <p:nvSpPr>
+          <p:cNvPr id="29" name="Text 27"/>
+          <p:cNvSpPr/>
+          <p:nvPr/>
+        </p:nvSpPr>
+        <p:spPr>
+          <a:xfrm>
+            <a:off x="3602736" y="3364992"/>
+            <a:ext cx="1554480" cy="475488"/>
+          </a:xfrm>
+          <a:prstGeom prst="rect">
+            <a:avLst/>
+          </a:prstGeom>
+          <a:noFill/>
+          <a:ln/>
+        </p:spPr>
+        <p:txBody>
+          <a:bodyPr wrap="square" lIns="0" tIns="0" rIns="0" bIns="0" rtlCol="0" anchor="ctr"/>
+          <a:lstStyle/>
+          <a:p>
+            <a:pPr algn="ctr" indent="0" marL="0">
+              <a:buNone/>
+            </a:pPr>
+            <a:r>
+              <a:rPr lang="en-US" sz="1400" b="1" dirty="0">
+                <a:solidFill>
+                  <a:srgbClr val="0D9488"/>
+                </a:solidFill>
+                <a:latin typeface="Trebuchet MS" pitchFamily="34" charset="0"/>
+                <a:ea typeface="Trebuchet MS" pitchFamily="34" charset="-122"/>
+                <a:cs typeface="Trebuchet MS" pitchFamily="34" charset="-120"/>
+              </a:rPr>
+              <a:t>i</a:t>
+            </a:r>
+            <a:endParaRPr lang="en-US" sz="1400" dirty="0"/>
+          </a:p>
+        </p:txBody>
+      </p:sp>
+      <p:sp>
+        <p:nvSpPr>
+          <p:cNvPr id="30" name="Text 28"/>
+          <p:cNvSpPr/>
+          <p:nvPr/>
+        </p:nvSpPr>
+        <p:spPr>
+          <a:xfrm>
+            <a:off x="5157216" y="3364992"/>
+            <a:ext cx="73152" cy="475488"/>
+          </a:xfrm>
+          <a:prstGeom prst="rect">
+            <a:avLst/>
+          </a:prstGeom>
+          <a:noFill/>
+          <a:ln/>
+        </p:spPr>
+        <p:txBody>
+          <a:bodyPr wrap="square" lIns="0" tIns="0" rIns="0" bIns="0" rtlCol="0" anchor="ctr"/>
+          <a:lstStyle/>
+          <a:p>
+            <a:pPr algn="ctr" indent="0" marL="0">
+              <a:buNone/>
+            </a:pPr>
+            <a:r>
+              <a:rPr lang="en-US" sz="1600" b="1" dirty="0">
+                <a:solidFill>
+                  <a:srgbClr val="0D9488"/>
+                </a:solidFill>
+                <a:latin typeface="Trebuchet MS" pitchFamily="34" charset="0"/>
+                <a:ea typeface="Trebuchet MS" pitchFamily="34" charset="-122"/>
+                <a:cs typeface="Trebuchet MS" pitchFamily="34" charset="-120"/>
+              </a:rPr>
+              <a:t>·</a:t>
+            </a:r>
+            <a:endParaRPr lang="en-US" sz="1600" dirty="0"/>
+          </a:p>
+        </p:txBody>
+      </p:sp>
+      <p:sp>
+        <p:nvSpPr>
+          <p:cNvPr id="31" name="Shape 29"/>
+          <p:cNvSpPr/>
+          <p:nvPr/>
+        </p:nvSpPr>
+        <p:spPr>
+          <a:xfrm>
+            <a:off x="5230368" y="3364992"/>
+            <a:ext cx="1554480" cy="475488"/>
+          </a:xfrm>
+          <a:prstGeom prst="rect">
+            <a:avLst>
+              <a:gd name="adj" fmla="val 9615"/>
+            </a:avLst>
+          </a:prstGeom>
+          <a:solidFill>
+            <a:srgbClr val="FFFFFF"/>
+          </a:solidFill>
+          <a:ln w="12700">
+            <a:solidFill>
+              <a:srgbClr val="0D9488"/>
+            </a:solidFill>
+            <a:prstDash val="solid"/>
+          </a:ln>
+        </p:spPr>
+      </p:sp>
+      <p:sp>
+        <p:nvSpPr>
+          <p:cNvPr id="32" name="Text 30"/>
+          <p:cNvSpPr/>
+          <p:nvPr/>
+        </p:nvSpPr>
+        <p:spPr>
+          <a:xfrm>
+            <a:off x="5230368" y="3364992"/>
+            <a:ext cx="1554480" cy="475488"/>
+          </a:xfrm>
+          <a:prstGeom prst="rect">
+            <a:avLst/>
+          </a:prstGeom>
+          <a:noFill/>
+          <a:ln/>
+        </p:spPr>
+        <p:txBody>
+          <a:bodyPr wrap="square" lIns="0" tIns="0" rIns="0" bIns="0" rtlCol="0" anchor="ctr"/>
+          <a:lstStyle/>
+          <a:p>
+            <a:pPr algn="ctr" indent="0" marL="0">
+              <a:buNone/>
+            </a:pPr>
+            <a:r>
+              <a:rPr lang="en-US" sz="1400" b="1" dirty="0">
+                <a:solidFill>
+                  <a:srgbClr val="0D9488"/>
+                </a:solidFill>
+                <a:latin typeface="Trebuchet MS" pitchFamily="34" charset="0"/>
+                <a:ea typeface="Trebuchet MS" pitchFamily="34" charset="-122"/>
+                <a:cs typeface="Trebuchet MS" pitchFamily="34" charset="-120"/>
+              </a:rPr>
+              <a:t>cir</a:t>
+            </a:r>
+            <a:endParaRPr lang="en-US" sz="1400" dirty="0"/>
+          </a:p>
+        </p:txBody>
+      </p:sp>
+      <p:sp>
+        <p:nvSpPr>
+          <p:cNvPr id="33" name="Text 31"/>
+          <p:cNvSpPr/>
+          <p:nvPr/>
+        </p:nvSpPr>
+        <p:spPr>
+          <a:xfrm>
+            <a:off x="6784848" y="3364992"/>
+            <a:ext cx="73152" cy="475488"/>
+          </a:xfrm>
+          <a:prstGeom prst="rect">
+            <a:avLst/>
+          </a:prstGeom>
+          <a:noFill/>
+          <a:ln/>
+        </p:spPr>
+        <p:txBody>
+          <a:bodyPr wrap="square" lIns="0" tIns="0" rIns="0" bIns="0" rtlCol="0" anchor="ctr"/>
+          <a:lstStyle/>
+          <a:p>
+            <a:pPr algn="ctr" indent="0" marL="0">
+              <a:buNone/>
+            </a:pPr>
+            <a:r>
+              <a:rPr lang="en-US" sz="1600" b="1" dirty="0">
+                <a:solidFill>
+                  <a:srgbClr val="0D9488"/>
+                </a:solidFill>
+                <a:latin typeface="Trebuchet MS" pitchFamily="34" charset="0"/>
+                <a:ea typeface="Trebuchet MS" pitchFamily="34" charset="-122"/>
+                <a:cs typeface="Trebuchet MS" pitchFamily="34" charset="-120"/>
+              </a:rPr>
+              <a:t>·</a:t>
+            </a:r>
+            <a:endParaRPr lang="en-US" sz="1600" dirty="0"/>
+          </a:p>
+        </p:txBody>
+      </p:sp>
+      <p:sp>
+        <p:nvSpPr>
+          <p:cNvPr id="34" name="Shape 32"/>
+          <p:cNvSpPr/>
+          <p:nvPr/>
+        </p:nvSpPr>
+        <p:spPr>
+          <a:xfrm>
+            <a:off x="6858000" y="3364992"/>
+            <a:ext cx="1554480" cy="475488"/>
+          </a:xfrm>
+          <a:prstGeom prst="rect">
+            <a:avLst>
+              <a:gd name="adj" fmla="val 9615"/>
+            </a:avLst>
+          </a:prstGeom>
+          <a:solidFill>
+            <a:srgbClr val="FFFFFF"/>
+          </a:solidFill>
+          <a:ln w="12700">
+            <a:solidFill>
+              <a:srgbClr val="0D9488"/>
+            </a:solidFill>
+            <a:prstDash val="solid"/>
+          </a:ln>
+        </p:spPr>
+      </p:sp>
+      <p:sp>
+        <p:nvSpPr>
+          <p:cNvPr id="35" name="Text 33"/>
+          <p:cNvSpPr/>
+          <p:nvPr/>
+        </p:nvSpPr>
+        <p:spPr>
+          <a:xfrm>
+            <a:off x="6858000" y="3364992"/>
+            <a:ext cx="1554480" cy="475488"/>
+          </a:xfrm>
+          <a:prstGeom prst="rect">
+            <a:avLst/>
+          </a:prstGeom>
+          <a:noFill/>
+          <a:ln/>
+        </p:spPr>
+        <p:txBody>
+          <a:bodyPr wrap="square" lIns="0" tIns="0" rIns="0" bIns="0" rtlCol="0" anchor="ctr"/>
+          <a:lstStyle/>
+          <a:p>
+            <a:pPr algn="ctr" indent="0" marL="0">
+              <a:buNone/>
+            </a:pPr>
+            <a:r>
+              <a:rPr lang="en-US" sz="1400" b="1" dirty="0">
+                <a:solidFill>
+                  <a:srgbClr val="0D9488"/>
+                </a:solidFill>
+                <a:latin typeface="Trebuchet MS" pitchFamily="34" charset="0"/>
+                <a:ea typeface="Trebuchet MS" pitchFamily="34" charset="-122"/>
+                <a:cs typeface="Trebuchet MS" pitchFamily="34" charset="-120"/>
+              </a:rPr>
+              <a:t>cle</a:t>
+            </a:r>
+            <a:endParaRPr lang="en-US" sz="1400" dirty="0"/>
+          </a:p>
+        </p:txBody>
+      </p:sp>
+      <p:sp>
+        <p:nvSpPr>
+          <p:cNvPr id="36" name="Shape 34"/>
+          <p:cNvSpPr/>
+          <p:nvPr/>
+        </p:nvSpPr>
+        <p:spPr>
+          <a:xfrm>
+            <a:off x="365760" y="4096512"/>
+            <a:ext cx="1371600" cy="804672"/>
+          </a:xfrm>
+          <a:prstGeom prst="rect">
+            <a:avLst>
+              <a:gd name="adj" fmla="val 6818"/>
+            </a:avLst>
+          </a:prstGeom>
+          <a:solidFill>
+            <a:srgbClr val="E2E8F0"/>
+          </a:solidFill>
+          <a:ln w="12700">
+            <a:solidFill>
+              <a:srgbClr val="E2E8F0"/>
+            </a:solidFill>
+            <a:prstDash val="solid"/>
+          </a:ln>
+        </p:spPr>
+      </p:sp>
+      <p:sp>
+        <p:nvSpPr>
+          <p:cNvPr id="37" name="Text 35"/>
+          <p:cNvSpPr/>
+          <p:nvPr/>
+        </p:nvSpPr>
+        <p:spPr>
+          <a:xfrm>
+            <a:off x="365760" y="4096512"/>
+            <a:ext cx="1371600" cy="804672"/>
+          </a:xfrm>
+          <a:prstGeom prst="rect">
+            <a:avLst/>
+          </a:prstGeom>
+          <a:noFill/>
+          <a:ln/>
+        </p:spPr>
+        <p:txBody>
+          <a:bodyPr wrap="square" lIns="0" tIns="0" rIns="0" bIns="0" rtlCol="0" anchor="ctr"/>
+          <a:lstStyle/>
+          <a:p>
+            <a:pPr algn="ctr" indent="0" marL="0">
+              <a:buNone/>
+            </a:pPr>
+            <a:r>
+              <a:rPr lang="en-US" sz="1100" b="1" dirty="0">
+                <a:solidFill>
+                  <a:srgbClr val="475569"/>
+                </a:solidFill>
+                <a:latin typeface="Trebuchet MS" pitchFamily="34" charset="0"/>
+                <a:ea typeface="Trebuchet MS" pitchFamily="34" charset="-122"/>
+                <a:cs typeface="Trebuchet MS" pitchFamily="34" charset="-120"/>
+              </a:rPr>
+              <a:t>Phonemes</a:t>
             </a:r>
             <a:endParaRPr lang="en-US" sz="1100" dirty="0"/>
           </a:p>
@@ -10694,13 +10832,13 @@
       </p:sp>
       <p:sp>
         <p:nvSpPr>
-          <p:cNvPr id="27" name="Shape 25"/>
-          <p:cNvSpPr/>
-          <p:nvPr/>
-        </p:nvSpPr>
-        <p:spPr>
-          <a:xfrm>
-            <a:off x="1874520" y="3273552"/>
+          <p:cNvPr id="38" name="Shape 36"/>
+          <p:cNvSpPr/>
+          <p:nvPr/>
+        </p:nvSpPr>
+        <p:spPr>
+          <a:xfrm>
+            <a:off x="1874520" y="4096512"/>
             <a:ext cx="6903720" cy="658368"/>
           </a:xfrm>
           <a:prstGeom prst="rect">
@@ -10709,30 +10847,30 @@
             </a:avLst>
           </a:prstGeom>
           <a:solidFill>
-            <a:srgbClr val="CCFBF1"/>
-          </a:solidFill>
-          <a:ln w="12700">
-            <a:solidFill>
-              <a:srgbClr val="0D9488"/>
-            </a:solidFill>
-            <a:prstDash val="solid"/>
-          </a:ln>
-        </p:spPr>
-      </p:sp>
-      <p:sp>
-        <p:nvSpPr>
-          <p:cNvPr id="28" name="Shape 26"/>
-          <p:cNvSpPr/>
-          <p:nvPr/>
-        </p:nvSpPr>
-        <p:spPr>
-          <a:xfrm>
-            <a:off x="1975104" y="3364992"/>
-            <a:ext cx="1554480" cy="475488"/>
+            <a:srgbClr val="FCE7F3"/>
+          </a:solidFill>
+          <a:ln w="12700">
+            <a:solidFill>
+              <a:srgbClr val="DB2777"/>
+            </a:solidFill>
+            <a:prstDash val="solid"/>
+          </a:ln>
+        </p:spPr>
+      </p:sp>
+      <p:sp>
+        <p:nvSpPr>
+          <p:cNvPr id="39" name="Shape 37"/>
+          <p:cNvSpPr/>
+          <p:nvPr/>
+        </p:nvSpPr>
+        <p:spPr>
+          <a:xfrm>
+            <a:off x="2023872" y="4169664"/>
+            <a:ext cx="685800" cy="475488"/>
           </a:xfrm>
           <a:prstGeom prst="rect">
             <a:avLst>
-              <a:gd name="adj" fmla="val 9615"/>
+              <a:gd name="adj" fmla="val 7692"/>
             </a:avLst>
           </a:prstGeom>
           <a:solidFill>
@@ -10740,104 +10878,131 @@
           </a:solidFill>
           <a:ln w="12700">
             <a:solidFill>
-              <a:srgbClr val="0D9488"/>
-            </a:solidFill>
-            <a:prstDash val="solid"/>
-          </a:ln>
-        </p:spPr>
-      </p:sp>
-      <p:sp>
-        <p:nvSpPr>
-          <p:cNvPr id="29" name="Text 27"/>
-          <p:cNvSpPr/>
-          <p:nvPr/>
-        </p:nvSpPr>
-        <p:spPr>
-          <a:xfrm>
-            <a:off x="1975104" y="3364992"/>
-            <a:ext cx="1554480" cy="475488"/>
-          </a:xfrm>
-          <a:prstGeom prst="rect">
-            <a:avLst/>
-          </a:prstGeom>
-          <a:noFill/>
-          <a:ln/>
-        </p:spPr>
-        <p:txBody>
-          <a:bodyPr wrap="square" lIns="0" tIns="0" rIns="0" bIns="0" rtlCol="0" anchor="ctr"/>
-          <a:lstStyle/>
-          <a:p>
-            <a:pPr algn="ctr" indent="0" marL="0">
-              <a:buNone/>
-            </a:pPr>
-            <a:r>
-              <a:rPr lang="en-US" sz="1400" b="1" dirty="0">
-                <a:solidFill>
-                  <a:srgbClr val="0D9488"/>
+              <a:srgbClr val="DB2777"/>
+            </a:solidFill>
+            <a:prstDash val="solid"/>
+          </a:ln>
+        </p:spPr>
+      </p:sp>
+      <p:sp>
+        <p:nvSpPr>
+          <p:cNvPr id="40" name="Text 38"/>
+          <p:cNvSpPr/>
+          <p:nvPr/>
+        </p:nvSpPr>
+        <p:spPr>
+          <a:xfrm>
+            <a:off x="2023872" y="4169664"/>
+            <a:ext cx="685800" cy="475488"/>
+          </a:xfrm>
+          <a:prstGeom prst="rect">
+            <a:avLst/>
+          </a:prstGeom>
+          <a:noFill/>
+          <a:ln/>
+        </p:spPr>
+        <p:txBody>
+          <a:bodyPr wrap="square" lIns="0" tIns="0" rIns="0" bIns="0" rtlCol="0" anchor="ctr"/>
+          <a:lstStyle/>
+          <a:p>
+            <a:pPr algn="ctr" indent="0" marL="0">
+              <a:buNone/>
+            </a:pPr>
+            <a:r>
+              <a:rPr lang="en-US" sz="900" b="1" dirty="0">
+                <a:solidFill>
+                  <a:srgbClr val="9D174D"/>
                 </a:solidFill>
                 <a:latin typeface="Trebuchet MS" pitchFamily="34" charset="0"/>
                 <a:ea typeface="Trebuchet MS" pitchFamily="34" charset="-122"/>
                 <a:cs typeface="Trebuchet MS" pitchFamily="34" charset="-120"/>
               </a:rPr>
-              <a:t>sem</a:t>
-            </a:r>
-            <a:endParaRPr lang="en-US" sz="1400" dirty="0"/>
-          </a:p>
-        </p:txBody>
-      </p:sp>
-      <p:sp>
-        <p:nvSpPr>
-          <p:cNvPr id="30" name="Text 28"/>
-          <p:cNvSpPr/>
-          <p:nvPr/>
-        </p:nvSpPr>
-        <p:spPr>
-          <a:xfrm>
-            <a:off x="3529584" y="3364992"/>
-            <a:ext cx="73152" cy="475488"/>
-          </a:xfrm>
-          <a:prstGeom prst="rect">
-            <a:avLst/>
-          </a:prstGeom>
-          <a:noFill/>
-          <a:ln/>
-        </p:spPr>
-        <p:txBody>
-          <a:bodyPr wrap="square" lIns="0" tIns="0" rIns="0" bIns="0" rtlCol="0" anchor="ctr"/>
-          <a:lstStyle/>
-          <a:p>
-            <a:pPr algn="ctr" indent="0" marL="0">
-              <a:buNone/>
-            </a:pPr>
-            <a:r>
-              <a:rPr lang="en-US" sz="1600" b="1" dirty="0">
-                <a:solidFill>
-                  <a:srgbClr val="0D9488"/>
+              <a:t>s</a:t>
+            </a:r>
+            <a:endParaRPr lang="en-US" sz="900" dirty="0"/>
+          </a:p>
+        </p:txBody>
+      </p:sp>
+      <p:sp>
+        <p:nvSpPr>
+          <p:cNvPr id="41" name="Shape 39"/>
+          <p:cNvSpPr/>
+          <p:nvPr/>
+        </p:nvSpPr>
+        <p:spPr>
+          <a:xfrm>
+            <a:off x="2831592" y="4169664"/>
+            <a:ext cx="685800" cy="475488"/>
+          </a:xfrm>
+          <a:prstGeom prst="rect">
+            <a:avLst>
+              <a:gd name="adj" fmla="val 7692"/>
+            </a:avLst>
+          </a:prstGeom>
+          <a:solidFill>
+            <a:srgbClr val="FFFFFF"/>
+          </a:solidFill>
+          <a:ln w="12700">
+            <a:solidFill>
+              <a:srgbClr val="DB2777"/>
+            </a:solidFill>
+            <a:prstDash val="solid"/>
+          </a:ln>
+        </p:spPr>
+      </p:sp>
+      <p:sp>
+        <p:nvSpPr>
+          <p:cNvPr id="42" name="Text 40"/>
+          <p:cNvSpPr/>
+          <p:nvPr/>
+        </p:nvSpPr>
+        <p:spPr>
+          <a:xfrm>
+            <a:off x="2831592" y="4169664"/>
+            <a:ext cx="685800" cy="475488"/>
+          </a:xfrm>
+          <a:prstGeom prst="rect">
+            <a:avLst/>
+          </a:prstGeom>
+          <a:noFill/>
+          <a:ln/>
+        </p:spPr>
+        <p:txBody>
+          <a:bodyPr wrap="square" lIns="0" tIns="0" rIns="0" bIns="0" rtlCol="0" anchor="ctr"/>
+          <a:lstStyle/>
+          <a:p>
+            <a:pPr algn="ctr" indent="0" marL="0">
+              <a:buNone/>
+            </a:pPr>
+            <a:r>
+              <a:rPr lang="en-US" sz="900" b="1" dirty="0">
+                <a:solidFill>
+                  <a:srgbClr val="9D174D"/>
                 </a:solidFill>
                 <a:latin typeface="Trebuchet MS" pitchFamily="34" charset="0"/>
                 <a:ea typeface="Trebuchet MS" pitchFamily="34" charset="-122"/>
                 <a:cs typeface="Trebuchet MS" pitchFamily="34" charset="-120"/>
               </a:rPr>
-              <a:t>·</a:t>
-            </a:r>
-            <a:endParaRPr lang="en-US" sz="1600" dirty="0"/>
-          </a:p>
-        </p:txBody>
-      </p:sp>
-      <p:sp>
-        <p:nvSpPr>
-          <p:cNvPr id="31" name="Shape 29"/>
-          <p:cNvSpPr/>
-          <p:nvPr/>
-        </p:nvSpPr>
-        <p:spPr>
-          <a:xfrm>
-            <a:off x="3602736" y="3364992"/>
-            <a:ext cx="1554480" cy="475488"/>
+              <a:t>e</a:t>
+            </a:r>
+            <a:endParaRPr lang="en-US" sz="900" dirty="0"/>
+          </a:p>
+        </p:txBody>
+      </p:sp>
+      <p:sp>
+        <p:nvSpPr>
+          <p:cNvPr id="43" name="Shape 41"/>
+          <p:cNvSpPr/>
+          <p:nvPr/>
+        </p:nvSpPr>
+        <p:spPr>
+          <a:xfrm>
+            <a:off x="3639312" y="4169664"/>
+            <a:ext cx="685800" cy="475488"/>
           </a:xfrm>
           <a:prstGeom prst="rect">
             <a:avLst>
-              <a:gd name="adj" fmla="val 9615"/>
+              <a:gd name="adj" fmla="val 7692"/>
             </a:avLst>
           </a:prstGeom>
           <a:solidFill>
@@ -10845,104 +11010,131 @@
           </a:solidFill>
           <a:ln w="12700">
             <a:solidFill>
-              <a:srgbClr val="0D9488"/>
-            </a:solidFill>
-            <a:prstDash val="solid"/>
-          </a:ln>
-        </p:spPr>
-      </p:sp>
-      <p:sp>
-        <p:nvSpPr>
-          <p:cNvPr id="32" name="Text 30"/>
-          <p:cNvSpPr/>
-          <p:nvPr/>
-        </p:nvSpPr>
-        <p:spPr>
-          <a:xfrm>
-            <a:off x="3602736" y="3364992"/>
-            <a:ext cx="1554480" cy="475488"/>
-          </a:xfrm>
-          <a:prstGeom prst="rect">
-            <a:avLst/>
-          </a:prstGeom>
-          <a:noFill/>
-          <a:ln/>
-        </p:spPr>
-        <p:txBody>
-          <a:bodyPr wrap="square" lIns="0" tIns="0" rIns="0" bIns="0" rtlCol="0" anchor="ctr"/>
-          <a:lstStyle/>
-          <a:p>
-            <a:pPr algn="ctr" indent="0" marL="0">
-              <a:buNone/>
-            </a:pPr>
-            <a:r>
-              <a:rPr lang="en-US" sz="1400" b="1" dirty="0">
-                <a:solidFill>
-                  <a:srgbClr val="0D9488"/>
+              <a:srgbClr val="DB2777"/>
+            </a:solidFill>
+            <a:prstDash val="solid"/>
+          </a:ln>
+        </p:spPr>
+      </p:sp>
+      <p:sp>
+        <p:nvSpPr>
+          <p:cNvPr id="44" name="Text 42"/>
+          <p:cNvSpPr/>
+          <p:nvPr/>
+        </p:nvSpPr>
+        <p:spPr>
+          <a:xfrm>
+            <a:off x="3639312" y="4169664"/>
+            <a:ext cx="685800" cy="475488"/>
+          </a:xfrm>
+          <a:prstGeom prst="rect">
+            <a:avLst/>
+          </a:prstGeom>
+          <a:noFill/>
+          <a:ln/>
+        </p:spPr>
+        <p:txBody>
+          <a:bodyPr wrap="square" lIns="0" tIns="0" rIns="0" bIns="0" rtlCol="0" anchor="ctr"/>
+          <a:lstStyle/>
+          <a:p>
+            <a:pPr algn="ctr" indent="0" marL="0">
+              <a:buNone/>
+            </a:pPr>
+            <a:r>
+              <a:rPr lang="en-US" sz="900" b="1" dirty="0">
+                <a:solidFill>
+                  <a:srgbClr val="9D174D"/>
                 </a:solidFill>
                 <a:latin typeface="Trebuchet MS" pitchFamily="34" charset="0"/>
                 <a:ea typeface="Trebuchet MS" pitchFamily="34" charset="-122"/>
                 <a:cs typeface="Trebuchet MS" pitchFamily="34" charset="-120"/>
               </a:rPr>
-              <a:t>i</a:t>
-            </a:r>
-            <a:endParaRPr lang="en-US" sz="1400" dirty="0"/>
-          </a:p>
-        </p:txBody>
-      </p:sp>
-      <p:sp>
-        <p:nvSpPr>
-          <p:cNvPr id="33" name="Text 31"/>
-          <p:cNvSpPr/>
-          <p:nvPr/>
-        </p:nvSpPr>
-        <p:spPr>
-          <a:xfrm>
-            <a:off x="5157216" y="3364992"/>
-            <a:ext cx="73152" cy="475488"/>
-          </a:xfrm>
-          <a:prstGeom prst="rect">
-            <a:avLst/>
-          </a:prstGeom>
-          <a:noFill/>
-          <a:ln/>
-        </p:spPr>
-        <p:txBody>
-          <a:bodyPr wrap="square" lIns="0" tIns="0" rIns="0" bIns="0" rtlCol="0" anchor="ctr"/>
-          <a:lstStyle/>
-          <a:p>
-            <a:pPr algn="ctr" indent="0" marL="0">
-              <a:buNone/>
-            </a:pPr>
-            <a:r>
-              <a:rPr lang="en-US" sz="1600" b="1" dirty="0">
-                <a:solidFill>
-                  <a:srgbClr val="0D9488"/>
+              <a:t>m</a:t>
+            </a:r>
+            <a:endParaRPr lang="en-US" sz="900" dirty="0"/>
+          </a:p>
+        </p:txBody>
+      </p:sp>
+      <p:sp>
+        <p:nvSpPr>
+          <p:cNvPr id="45" name="Shape 43"/>
+          <p:cNvSpPr/>
+          <p:nvPr/>
+        </p:nvSpPr>
+        <p:spPr>
+          <a:xfrm>
+            <a:off x="4447032" y="4169664"/>
+            <a:ext cx="685800" cy="475488"/>
+          </a:xfrm>
+          <a:prstGeom prst="rect">
+            <a:avLst>
+              <a:gd name="adj" fmla="val 7692"/>
+            </a:avLst>
+          </a:prstGeom>
+          <a:solidFill>
+            <a:srgbClr val="FFFFFF"/>
+          </a:solidFill>
+          <a:ln w="12700">
+            <a:solidFill>
+              <a:srgbClr val="DB2777"/>
+            </a:solidFill>
+            <a:prstDash val="solid"/>
+          </a:ln>
+        </p:spPr>
+      </p:sp>
+      <p:sp>
+        <p:nvSpPr>
+          <p:cNvPr id="46" name="Text 44"/>
+          <p:cNvSpPr/>
+          <p:nvPr/>
+        </p:nvSpPr>
+        <p:spPr>
+          <a:xfrm>
+            <a:off x="4447032" y="4169664"/>
+            <a:ext cx="685800" cy="475488"/>
+          </a:xfrm>
+          <a:prstGeom prst="rect">
+            <a:avLst/>
+          </a:prstGeom>
+          <a:noFill/>
+          <a:ln/>
+        </p:spPr>
+        <p:txBody>
+          <a:bodyPr wrap="square" lIns="0" tIns="0" rIns="0" bIns="0" rtlCol="0" anchor="ctr"/>
+          <a:lstStyle/>
+          <a:p>
+            <a:pPr algn="ctr" indent="0" marL="0">
+              <a:buNone/>
+            </a:pPr>
+            <a:r>
+              <a:rPr lang="en-US" sz="900" b="1" dirty="0">
+                <a:solidFill>
+                  <a:srgbClr val="9D174D"/>
                 </a:solidFill>
                 <a:latin typeface="Trebuchet MS" pitchFamily="34" charset="0"/>
                 <a:ea typeface="Trebuchet MS" pitchFamily="34" charset="-122"/>
                 <a:cs typeface="Trebuchet MS" pitchFamily="34" charset="-120"/>
               </a:rPr>
-              <a:t>·</a:t>
-            </a:r>
-            <a:endParaRPr lang="en-US" sz="1600" dirty="0"/>
-          </a:p>
-        </p:txBody>
-      </p:sp>
-      <p:sp>
-        <p:nvSpPr>
-          <p:cNvPr id="34" name="Shape 32"/>
-          <p:cNvSpPr/>
-          <p:nvPr/>
-        </p:nvSpPr>
-        <p:spPr>
-          <a:xfrm>
-            <a:off x="5230368" y="3364992"/>
-            <a:ext cx="1554480" cy="475488"/>
+              <a:t>i</a:t>
+            </a:r>
+            <a:endParaRPr lang="en-US" sz="900" dirty="0"/>
+          </a:p>
+        </p:txBody>
+      </p:sp>
+      <p:sp>
+        <p:nvSpPr>
+          <p:cNvPr id="47" name="Shape 45"/>
+          <p:cNvSpPr/>
+          <p:nvPr/>
+        </p:nvSpPr>
+        <p:spPr>
+          <a:xfrm>
+            <a:off x="5254752" y="4169664"/>
+            <a:ext cx="685800" cy="475488"/>
           </a:xfrm>
           <a:prstGeom prst="rect">
             <a:avLst>
-              <a:gd name="adj" fmla="val 9615"/>
+              <a:gd name="adj" fmla="val 7692"/>
             </a:avLst>
           </a:prstGeom>
           <a:solidFill>
@@ -10950,104 +11142,131 @@
           </a:solidFill>
           <a:ln w="12700">
             <a:solidFill>
-              <a:srgbClr val="0D9488"/>
-            </a:solidFill>
-            <a:prstDash val="solid"/>
-          </a:ln>
-        </p:spPr>
-      </p:sp>
-      <p:sp>
-        <p:nvSpPr>
-          <p:cNvPr id="35" name="Text 33"/>
-          <p:cNvSpPr/>
-          <p:nvPr/>
-        </p:nvSpPr>
-        <p:spPr>
-          <a:xfrm>
-            <a:off x="5230368" y="3364992"/>
-            <a:ext cx="1554480" cy="475488"/>
-          </a:xfrm>
-          <a:prstGeom prst="rect">
-            <a:avLst/>
-          </a:prstGeom>
-          <a:noFill/>
-          <a:ln/>
-        </p:spPr>
-        <p:txBody>
-          <a:bodyPr wrap="square" lIns="0" tIns="0" rIns="0" bIns="0" rtlCol="0" anchor="ctr"/>
-          <a:lstStyle/>
-          <a:p>
-            <a:pPr algn="ctr" indent="0" marL="0">
-              <a:buNone/>
-            </a:pPr>
-            <a:r>
-              <a:rPr lang="en-US" sz="1400" b="1" dirty="0">
-                <a:solidFill>
-                  <a:srgbClr val="0D9488"/>
+              <a:srgbClr val="DB2777"/>
+            </a:solidFill>
+            <a:prstDash val="solid"/>
+          </a:ln>
+        </p:spPr>
+      </p:sp>
+      <p:sp>
+        <p:nvSpPr>
+          <p:cNvPr id="48" name="Text 46"/>
+          <p:cNvSpPr/>
+          <p:nvPr/>
+        </p:nvSpPr>
+        <p:spPr>
+          <a:xfrm>
+            <a:off x="5254752" y="4169664"/>
+            <a:ext cx="685800" cy="475488"/>
+          </a:xfrm>
+          <a:prstGeom prst="rect">
+            <a:avLst/>
+          </a:prstGeom>
+          <a:noFill/>
+          <a:ln/>
+        </p:spPr>
+        <p:txBody>
+          <a:bodyPr wrap="square" lIns="0" tIns="0" rIns="0" bIns="0" rtlCol="0" anchor="ctr"/>
+          <a:lstStyle/>
+          <a:p>
+            <a:pPr algn="ctr" indent="0" marL="0">
+              <a:buNone/>
+            </a:pPr>
+            <a:r>
+              <a:rPr lang="en-US" sz="900" b="1" dirty="0">
+                <a:solidFill>
+                  <a:srgbClr val="9D174D"/>
                 </a:solidFill>
                 <a:latin typeface="Trebuchet MS" pitchFamily="34" charset="0"/>
                 <a:ea typeface="Trebuchet MS" pitchFamily="34" charset="-122"/>
                 <a:cs typeface="Trebuchet MS" pitchFamily="34" charset="-120"/>
               </a:rPr>
-              <a:t>de</a:t>
-            </a:r>
-            <a:endParaRPr lang="en-US" sz="1400" dirty="0"/>
-          </a:p>
-        </p:txBody>
-      </p:sp>
-      <p:sp>
-        <p:nvSpPr>
-          <p:cNvPr id="36" name="Text 34"/>
-          <p:cNvSpPr/>
-          <p:nvPr/>
-        </p:nvSpPr>
-        <p:spPr>
-          <a:xfrm>
-            <a:off x="6784848" y="3364992"/>
-            <a:ext cx="73152" cy="475488"/>
-          </a:xfrm>
-          <a:prstGeom prst="rect">
-            <a:avLst/>
-          </a:prstGeom>
-          <a:noFill/>
-          <a:ln/>
-        </p:spPr>
-        <p:txBody>
-          <a:bodyPr wrap="square" lIns="0" tIns="0" rIns="0" bIns="0" rtlCol="0" anchor="ctr"/>
-          <a:lstStyle/>
-          <a:p>
-            <a:pPr algn="ctr" indent="0" marL="0">
-              <a:buNone/>
-            </a:pPr>
-            <a:r>
-              <a:rPr lang="en-US" sz="1600" b="1" dirty="0">
-                <a:solidFill>
-                  <a:srgbClr val="0D9488"/>
+              <a:t>c</a:t>
+            </a:r>
+            <a:endParaRPr lang="en-US" sz="900" dirty="0"/>
+          </a:p>
+        </p:txBody>
+      </p:sp>
+      <p:sp>
+        <p:nvSpPr>
+          <p:cNvPr id="49" name="Shape 47"/>
+          <p:cNvSpPr/>
+          <p:nvPr/>
+        </p:nvSpPr>
+        <p:spPr>
+          <a:xfrm>
+            <a:off x="6062472" y="4169664"/>
+            <a:ext cx="685800" cy="475488"/>
+          </a:xfrm>
+          <a:prstGeom prst="rect">
+            <a:avLst>
+              <a:gd name="adj" fmla="val 7692"/>
+            </a:avLst>
+          </a:prstGeom>
+          <a:solidFill>
+            <a:srgbClr val="FFFFFF"/>
+          </a:solidFill>
+          <a:ln w="12700">
+            <a:solidFill>
+              <a:srgbClr val="DB2777"/>
+            </a:solidFill>
+            <a:prstDash val="solid"/>
+          </a:ln>
+        </p:spPr>
+      </p:sp>
+      <p:sp>
+        <p:nvSpPr>
+          <p:cNvPr id="50" name="Text 48"/>
+          <p:cNvSpPr/>
+          <p:nvPr/>
+        </p:nvSpPr>
+        <p:spPr>
+          <a:xfrm>
+            <a:off x="6062472" y="4169664"/>
+            <a:ext cx="685800" cy="475488"/>
+          </a:xfrm>
+          <a:prstGeom prst="rect">
+            <a:avLst/>
+          </a:prstGeom>
+          <a:noFill/>
+          <a:ln/>
+        </p:spPr>
+        <p:txBody>
+          <a:bodyPr wrap="square" lIns="0" tIns="0" rIns="0" bIns="0" rtlCol="0" anchor="ctr"/>
+          <a:lstStyle/>
+          <a:p>
+            <a:pPr algn="ctr" indent="0" marL="0">
+              <a:buNone/>
+            </a:pPr>
+            <a:r>
+              <a:rPr lang="en-US" sz="900" b="1" dirty="0">
+                <a:solidFill>
+                  <a:srgbClr val="9D174D"/>
                 </a:solidFill>
                 <a:latin typeface="Trebuchet MS" pitchFamily="34" charset="0"/>
                 <a:ea typeface="Trebuchet MS" pitchFamily="34" charset="-122"/>
                 <a:cs typeface="Trebuchet MS" pitchFamily="34" charset="-120"/>
               </a:rPr>
-              <a:t>·</a:t>
-            </a:r>
-            <a:endParaRPr lang="en-US" sz="1600" dirty="0"/>
-          </a:p>
-        </p:txBody>
-      </p:sp>
-      <p:sp>
-        <p:nvSpPr>
-          <p:cNvPr id="37" name="Shape 35"/>
-          <p:cNvSpPr/>
-          <p:nvPr/>
-        </p:nvSpPr>
-        <p:spPr>
-          <a:xfrm>
-            <a:off x="6858000" y="3364992"/>
-            <a:ext cx="1554480" cy="475488"/>
+              <a:t>ir</a:t>
+            </a:r>
+            <a:endParaRPr lang="en-US" sz="900" dirty="0"/>
+          </a:p>
+        </p:txBody>
+      </p:sp>
+      <p:sp>
+        <p:nvSpPr>
+          <p:cNvPr id="51" name="Shape 49"/>
+          <p:cNvSpPr/>
+          <p:nvPr/>
+        </p:nvSpPr>
+        <p:spPr>
+          <a:xfrm>
+            <a:off x="6870192" y="4169664"/>
+            <a:ext cx="685800" cy="475488"/>
           </a:xfrm>
           <a:prstGeom prst="rect">
             <a:avLst>
-              <a:gd name="adj" fmla="val 9615"/>
+              <a:gd name="adj" fmla="val 7692"/>
             </a:avLst>
           </a:prstGeom>
           <a:solidFill>
@@ -11055,879 +11274,114 @@
           </a:solidFill>
           <a:ln w="12700">
             <a:solidFill>
-              <a:srgbClr val="0D9488"/>
-            </a:solidFill>
-            <a:prstDash val="solid"/>
-          </a:ln>
-        </p:spPr>
-      </p:sp>
-      <p:sp>
-        <p:nvSpPr>
-          <p:cNvPr id="38" name="Text 36"/>
-          <p:cNvSpPr/>
-          <p:nvPr/>
-        </p:nvSpPr>
-        <p:spPr>
-          <a:xfrm>
-            <a:off x="6858000" y="3364992"/>
-            <a:ext cx="1554480" cy="475488"/>
-          </a:xfrm>
-          <a:prstGeom prst="rect">
-            <a:avLst/>
-          </a:prstGeom>
-          <a:noFill/>
-          <a:ln/>
-        </p:spPr>
-        <p:txBody>
-          <a:bodyPr wrap="square" lIns="0" tIns="0" rIns="0" bIns="0" rtlCol="0" anchor="ctr"/>
-          <a:lstStyle/>
-          <a:p>
-            <a:pPr algn="ctr" indent="0" marL="0">
-              <a:buNone/>
-            </a:pPr>
-            <a:r>
-              <a:rPr lang="en-US" sz="1400" b="1" dirty="0">
-                <a:solidFill>
-                  <a:srgbClr val="0D9488"/>
+              <a:srgbClr val="DB2777"/>
+            </a:solidFill>
+            <a:prstDash val="solid"/>
+          </a:ln>
+        </p:spPr>
+      </p:sp>
+      <p:sp>
+        <p:nvSpPr>
+          <p:cNvPr id="52" name="Text 50"/>
+          <p:cNvSpPr/>
+          <p:nvPr/>
+        </p:nvSpPr>
+        <p:spPr>
+          <a:xfrm>
+            <a:off x="6870192" y="4169664"/>
+            <a:ext cx="685800" cy="475488"/>
+          </a:xfrm>
+          <a:prstGeom prst="rect">
+            <a:avLst/>
+          </a:prstGeom>
+          <a:noFill/>
+          <a:ln/>
+        </p:spPr>
+        <p:txBody>
+          <a:bodyPr wrap="square" lIns="0" tIns="0" rIns="0" bIns="0" rtlCol="0" anchor="ctr"/>
+          <a:lstStyle/>
+          <a:p>
+            <a:pPr algn="ctr" indent="0" marL="0">
+              <a:buNone/>
+            </a:pPr>
+            <a:r>
+              <a:rPr lang="en-US" sz="900" b="1" dirty="0">
+                <a:solidFill>
+                  <a:srgbClr val="9D174D"/>
                 </a:solidFill>
                 <a:latin typeface="Trebuchet MS" pitchFamily="34" charset="0"/>
                 <a:ea typeface="Trebuchet MS" pitchFamily="34" charset="-122"/>
                 <a:cs typeface="Trebuchet MS" pitchFamily="34" charset="-120"/>
               </a:rPr>
-              <a:t>tached</a:t>
-            </a:r>
-            <a:endParaRPr lang="en-US" sz="1400" dirty="0"/>
-          </a:p>
-        </p:txBody>
-      </p:sp>
-      <p:sp>
-        <p:nvSpPr>
-          <p:cNvPr id="39" name="Shape 37"/>
-          <p:cNvSpPr/>
-          <p:nvPr/>
-        </p:nvSpPr>
-        <p:spPr>
-          <a:xfrm>
-            <a:off x="365760" y="4096512"/>
-            <a:ext cx="1371600" cy="804672"/>
+              <a:t>c</a:t>
+            </a:r>
+            <a:endParaRPr lang="en-US" sz="900" dirty="0"/>
+          </a:p>
+        </p:txBody>
+      </p:sp>
+      <p:sp>
+        <p:nvSpPr>
+          <p:cNvPr id="53" name="Shape 51"/>
+          <p:cNvSpPr/>
+          <p:nvPr/>
+        </p:nvSpPr>
+        <p:spPr>
+          <a:xfrm>
+            <a:off x="7677912" y="4169664"/>
+            <a:ext cx="685800" cy="475488"/>
           </a:xfrm>
           <a:prstGeom prst="rect">
             <a:avLst>
-              <a:gd name="adj" fmla="val 6818"/>
+              <a:gd name="adj" fmla="val 7692"/>
             </a:avLst>
           </a:prstGeom>
           <a:solidFill>
-            <a:srgbClr val="E2E8F0"/>
-          </a:solidFill>
-          <a:ln w="12700">
-            <a:solidFill>
-              <a:srgbClr val="E2E8F0"/>
-            </a:solidFill>
-            <a:prstDash val="solid"/>
-          </a:ln>
-        </p:spPr>
-      </p:sp>
-      <p:sp>
-        <p:nvSpPr>
-          <p:cNvPr id="40" name="Text 38"/>
-          <p:cNvSpPr/>
-          <p:nvPr/>
-        </p:nvSpPr>
-        <p:spPr>
-          <a:xfrm>
-            <a:off x="365760" y="4096512"/>
-            <a:ext cx="1371600" cy="804672"/>
-          </a:xfrm>
-          <a:prstGeom prst="rect">
-            <a:avLst/>
-          </a:prstGeom>
-          <a:noFill/>
-          <a:ln/>
-        </p:spPr>
-        <p:txBody>
-          <a:bodyPr wrap="square" lIns="0" tIns="0" rIns="0" bIns="0" rtlCol="0" anchor="ctr"/>
-          <a:lstStyle/>
-          <a:p>
-            <a:pPr algn="ctr" indent="0" marL="0">
-              <a:buNone/>
-            </a:pPr>
-            <a:r>
-              <a:rPr lang="en-US" sz="1100" b="1" dirty="0">
-                <a:solidFill>
-                  <a:srgbClr val="475569"/>
+            <a:srgbClr val="FFFFFF"/>
+          </a:solidFill>
+          <a:ln w="12700">
+            <a:solidFill>
+              <a:srgbClr val="DB2777"/>
+            </a:solidFill>
+            <a:prstDash val="solid"/>
+          </a:ln>
+        </p:spPr>
+      </p:sp>
+      <p:sp>
+        <p:nvSpPr>
+          <p:cNvPr id="54" name="Text 52"/>
+          <p:cNvSpPr/>
+          <p:nvPr/>
+        </p:nvSpPr>
+        <p:spPr>
+          <a:xfrm>
+            <a:off x="7677912" y="4169664"/>
+            <a:ext cx="685800" cy="475488"/>
+          </a:xfrm>
+          <a:prstGeom prst="rect">
+            <a:avLst/>
+          </a:prstGeom>
+          <a:noFill/>
+          <a:ln/>
+        </p:spPr>
+        <p:txBody>
+          <a:bodyPr wrap="square" lIns="0" tIns="0" rIns="0" bIns="0" rtlCol="0" anchor="ctr"/>
+          <a:lstStyle/>
+          <a:p>
+            <a:pPr algn="ctr" indent="0" marL="0">
+              <a:buNone/>
+            </a:pPr>
+            <a:r>
+              <a:rPr lang="en-US" sz="900" b="1" dirty="0">
+                <a:solidFill>
+                  <a:srgbClr val="9D174D"/>
                 </a:solidFill>
                 <a:latin typeface="Trebuchet MS" pitchFamily="34" charset="0"/>
                 <a:ea typeface="Trebuchet MS" pitchFamily="34" charset="-122"/>
                 <a:cs typeface="Trebuchet MS" pitchFamily="34" charset="-120"/>
               </a:rPr>
-              <a:t>Phonemes</a:t>
-            </a:r>
-            <a:endParaRPr lang="en-US" sz="1100" dirty="0"/>
-          </a:p>
-        </p:txBody>
-      </p:sp>
-      <p:sp>
-        <p:nvSpPr>
-          <p:cNvPr id="41" name="Shape 39"/>
-          <p:cNvSpPr/>
-          <p:nvPr/>
-        </p:nvSpPr>
-        <p:spPr>
-          <a:xfrm>
-            <a:off x="1874520" y="4096512"/>
-            <a:ext cx="6903720" cy="804672"/>
-          </a:xfrm>
-          <a:prstGeom prst="rect">
-            <a:avLst>
-              <a:gd name="adj" fmla="val 6818"/>
-            </a:avLst>
-          </a:prstGeom>
-          <a:solidFill>
-            <a:srgbClr val="FCE7F3"/>
-          </a:solidFill>
-          <a:ln w="12700">
-            <a:solidFill>
-              <a:srgbClr val="DB2777"/>
-            </a:solidFill>
-            <a:prstDash val="solid"/>
-          </a:ln>
-        </p:spPr>
-      </p:sp>
-      <p:sp>
-        <p:nvSpPr>
-          <p:cNvPr id="42" name="Shape 40"/>
-          <p:cNvSpPr/>
-          <p:nvPr/>
-        </p:nvSpPr>
-        <p:spPr>
-          <a:xfrm>
-            <a:off x="1951828" y="4169664"/>
-            <a:ext cx="603504" cy="384048"/>
-          </a:xfrm>
-          <a:prstGeom prst="rect">
-            <a:avLst>
-              <a:gd name="adj" fmla="val 9524"/>
-            </a:avLst>
-          </a:prstGeom>
-          <a:solidFill>
-            <a:srgbClr val="FFFFFF"/>
-          </a:solidFill>
-          <a:ln w="12700">
-            <a:solidFill>
-              <a:srgbClr val="DB2777"/>
-            </a:solidFill>
-            <a:prstDash val="solid"/>
-          </a:ln>
-        </p:spPr>
-      </p:sp>
-      <p:sp>
-        <p:nvSpPr>
-          <p:cNvPr id="43" name="Text 41"/>
-          <p:cNvSpPr/>
-          <p:nvPr/>
-        </p:nvSpPr>
-        <p:spPr>
-          <a:xfrm>
-            <a:off x="1951828" y="4169664"/>
-            <a:ext cx="603504" cy="384048"/>
-          </a:xfrm>
-          <a:prstGeom prst="rect">
-            <a:avLst/>
-          </a:prstGeom>
-          <a:noFill/>
-          <a:ln/>
-        </p:spPr>
-        <p:txBody>
-          <a:bodyPr wrap="square" lIns="0" tIns="0" rIns="0" bIns="0" rtlCol="0" anchor="ctr"/>
-          <a:lstStyle/>
-          <a:p>
-            <a:pPr algn="ctr" indent="0" marL="0">
-              <a:buNone/>
-            </a:pPr>
-            <a:r>
-              <a:rPr lang="en-US" sz="900" b="1" dirty="0">
-                <a:solidFill>
-                  <a:srgbClr val="9D174D"/>
-                </a:solidFill>
-                <a:latin typeface="Trebuchet MS" pitchFamily="34" charset="0"/>
-                <a:ea typeface="Trebuchet MS" pitchFamily="34" charset="-122"/>
-                <a:cs typeface="Trebuchet MS" pitchFamily="34" charset="-120"/>
-              </a:rPr>
-              <a:t>s</a:t>
+              <a:t>le</a:t>
             </a:r>
             <a:endParaRPr lang="en-US" sz="900" dirty="0"/>
-          </a:p>
-        </p:txBody>
-      </p:sp>
-      <p:sp>
-        <p:nvSpPr>
-          <p:cNvPr id="44" name="Shape 42"/>
-          <p:cNvSpPr/>
-          <p:nvPr/>
-        </p:nvSpPr>
-        <p:spPr>
-          <a:xfrm>
-            <a:off x="2605209" y="4169664"/>
-            <a:ext cx="603504" cy="384048"/>
-          </a:xfrm>
-          <a:prstGeom prst="rect">
-            <a:avLst>
-              <a:gd name="adj" fmla="val 9524"/>
-            </a:avLst>
-          </a:prstGeom>
-          <a:solidFill>
-            <a:srgbClr val="FFFFFF"/>
-          </a:solidFill>
-          <a:ln w="12700">
-            <a:solidFill>
-              <a:srgbClr val="DB2777"/>
-            </a:solidFill>
-            <a:prstDash val="solid"/>
-          </a:ln>
-        </p:spPr>
-      </p:sp>
-      <p:sp>
-        <p:nvSpPr>
-          <p:cNvPr id="45" name="Text 43"/>
-          <p:cNvSpPr/>
-          <p:nvPr/>
-        </p:nvSpPr>
-        <p:spPr>
-          <a:xfrm>
-            <a:off x="2605209" y="4169664"/>
-            <a:ext cx="603504" cy="384048"/>
-          </a:xfrm>
-          <a:prstGeom prst="rect">
-            <a:avLst/>
-          </a:prstGeom>
-          <a:noFill/>
-          <a:ln/>
-        </p:spPr>
-        <p:txBody>
-          <a:bodyPr wrap="square" lIns="0" tIns="0" rIns="0" bIns="0" rtlCol="0" anchor="ctr"/>
-          <a:lstStyle/>
-          <a:p>
-            <a:pPr algn="ctr" indent="0" marL="0">
-              <a:buNone/>
-            </a:pPr>
-            <a:r>
-              <a:rPr lang="en-US" sz="900" b="1" dirty="0">
-                <a:solidFill>
-                  <a:srgbClr val="9D174D"/>
-                </a:solidFill>
-                <a:latin typeface="Trebuchet MS" pitchFamily="34" charset="0"/>
-                <a:ea typeface="Trebuchet MS" pitchFamily="34" charset="-122"/>
-                <a:cs typeface="Trebuchet MS" pitchFamily="34" charset="-120"/>
-              </a:rPr>
-              <a:t>e</a:t>
-            </a:r>
-            <a:endParaRPr lang="en-US" sz="900" dirty="0"/>
-          </a:p>
-        </p:txBody>
-      </p:sp>
-      <p:sp>
-        <p:nvSpPr>
-          <p:cNvPr id="46" name="Shape 44"/>
-          <p:cNvSpPr/>
-          <p:nvPr/>
-        </p:nvSpPr>
-        <p:spPr>
-          <a:xfrm>
-            <a:off x="3258589" y="4169664"/>
-            <a:ext cx="603504" cy="384048"/>
-          </a:xfrm>
-          <a:prstGeom prst="rect">
-            <a:avLst>
-              <a:gd name="adj" fmla="val 9524"/>
-            </a:avLst>
-          </a:prstGeom>
-          <a:solidFill>
-            <a:srgbClr val="FFFFFF"/>
-          </a:solidFill>
-          <a:ln w="12700">
-            <a:solidFill>
-              <a:srgbClr val="DB2777"/>
-            </a:solidFill>
-            <a:prstDash val="solid"/>
-          </a:ln>
-        </p:spPr>
-      </p:sp>
-      <p:sp>
-        <p:nvSpPr>
-          <p:cNvPr id="47" name="Text 45"/>
-          <p:cNvSpPr/>
-          <p:nvPr/>
-        </p:nvSpPr>
-        <p:spPr>
-          <a:xfrm>
-            <a:off x="3258589" y="4169664"/>
-            <a:ext cx="603504" cy="384048"/>
-          </a:xfrm>
-          <a:prstGeom prst="rect">
-            <a:avLst/>
-          </a:prstGeom>
-          <a:noFill/>
-          <a:ln/>
-        </p:spPr>
-        <p:txBody>
-          <a:bodyPr wrap="square" lIns="0" tIns="0" rIns="0" bIns="0" rtlCol="0" anchor="ctr"/>
-          <a:lstStyle/>
-          <a:p>
-            <a:pPr algn="ctr" indent="0" marL="0">
-              <a:buNone/>
-            </a:pPr>
-            <a:r>
-              <a:rPr lang="en-US" sz="900" b="1" dirty="0">
-                <a:solidFill>
-                  <a:srgbClr val="9D174D"/>
-                </a:solidFill>
-                <a:latin typeface="Trebuchet MS" pitchFamily="34" charset="0"/>
-                <a:ea typeface="Trebuchet MS" pitchFamily="34" charset="-122"/>
-                <a:cs typeface="Trebuchet MS" pitchFamily="34" charset="-120"/>
-              </a:rPr>
-              <a:t>m</a:t>
-            </a:r>
-            <a:endParaRPr lang="en-US" sz="900" dirty="0"/>
-          </a:p>
-        </p:txBody>
-      </p:sp>
-      <p:sp>
-        <p:nvSpPr>
-          <p:cNvPr id="48" name="Shape 46"/>
-          <p:cNvSpPr/>
-          <p:nvPr/>
-        </p:nvSpPr>
-        <p:spPr>
-          <a:xfrm>
-            <a:off x="3911969" y="4169664"/>
-            <a:ext cx="603504" cy="384048"/>
-          </a:xfrm>
-          <a:prstGeom prst="rect">
-            <a:avLst>
-              <a:gd name="adj" fmla="val 9524"/>
-            </a:avLst>
-          </a:prstGeom>
-          <a:solidFill>
-            <a:srgbClr val="FFFFFF"/>
-          </a:solidFill>
-          <a:ln w="12700">
-            <a:solidFill>
-              <a:srgbClr val="DB2777"/>
-            </a:solidFill>
-            <a:prstDash val="solid"/>
-          </a:ln>
-        </p:spPr>
-      </p:sp>
-      <p:sp>
-        <p:nvSpPr>
-          <p:cNvPr id="49" name="Text 47"/>
-          <p:cNvSpPr/>
-          <p:nvPr/>
-        </p:nvSpPr>
-        <p:spPr>
-          <a:xfrm>
-            <a:off x="3911969" y="4169664"/>
-            <a:ext cx="603504" cy="384048"/>
-          </a:xfrm>
-          <a:prstGeom prst="rect">
-            <a:avLst/>
-          </a:prstGeom>
-          <a:noFill/>
-          <a:ln/>
-        </p:spPr>
-        <p:txBody>
-          <a:bodyPr wrap="square" lIns="0" tIns="0" rIns="0" bIns="0" rtlCol="0" anchor="ctr"/>
-          <a:lstStyle/>
-          <a:p>
-            <a:pPr algn="ctr" indent="0" marL="0">
-              <a:buNone/>
-            </a:pPr>
-            <a:r>
-              <a:rPr lang="en-US" sz="900" b="1" dirty="0">
-                <a:solidFill>
-                  <a:srgbClr val="9D174D"/>
-                </a:solidFill>
-                <a:latin typeface="Trebuchet MS" pitchFamily="34" charset="0"/>
-                <a:ea typeface="Trebuchet MS" pitchFamily="34" charset="-122"/>
-                <a:cs typeface="Trebuchet MS" pitchFamily="34" charset="-120"/>
-              </a:rPr>
-              <a:t>i</a:t>
-            </a:r>
-            <a:endParaRPr lang="en-US" sz="900" dirty="0"/>
-          </a:p>
-        </p:txBody>
-      </p:sp>
-      <p:sp>
-        <p:nvSpPr>
-          <p:cNvPr id="50" name="Shape 48"/>
-          <p:cNvSpPr/>
-          <p:nvPr/>
-        </p:nvSpPr>
-        <p:spPr>
-          <a:xfrm>
-            <a:off x="4565350" y="4169664"/>
-            <a:ext cx="603504" cy="384048"/>
-          </a:xfrm>
-          <a:prstGeom prst="rect">
-            <a:avLst>
-              <a:gd name="adj" fmla="val 9524"/>
-            </a:avLst>
-          </a:prstGeom>
-          <a:solidFill>
-            <a:srgbClr val="FFFFFF"/>
-          </a:solidFill>
-          <a:ln w="12700">
-            <a:solidFill>
-              <a:srgbClr val="DB2777"/>
-            </a:solidFill>
-            <a:prstDash val="solid"/>
-          </a:ln>
-        </p:spPr>
-      </p:sp>
-      <p:sp>
-        <p:nvSpPr>
-          <p:cNvPr id="51" name="Text 49"/>
-          <p:cNvSpPr/>
-          <p:nvPr/>
-        </p:nvSpPr>
-        <p:spPr>
-          <a:xfrm>
-            <a:off x="4565350" y="4169664"/>
-            <a:ext cx="603504" cy="384048"/>
-          </a:xfrm>
-          <a:prstGeom prst="rect">
-            <a:avLst/>
-          </a:prstGeom>
-          <a:noFill/>
-          <a:ln/>
-        </p:spPr>
-        <p:txBody>
-          <a:bodyPr wrap="square" lIns="0" tIns="0" rIns="0" bIns="0" rtlCol="0" anchor="ctr"/>
-          <a:lstStyle/>
-          <a:p>
-            <a:pPr algn="ctr" indent="0" marL="0">
-              <a:buNone/>
-            </a:pPr>
-            <a:r>
-              <a:rPr lang="en-US" sz="900" b="1" dirty="0">
-                <a:solidFill>
-                  <a:srgbClr val="9D174D"/>
-                </a:solidFill>
-                <a:latin typeface="Trebuchet MS" pitchFamily="34" charset="0"/>
-                <a:ea typeface="Trebuchet MS" pitchFamily="34" charset="-122"/>
-                <a:cs typeface="Trebuchet MS" pitchFamily="34" charset="-120"/>
-              </a:rPr>
-              <a:t>d</a:t>
-            </a:r>
-            <a:endParaRPr lang="en-US" sz="900" dirty="0"/>
-          </a:p>
-        </p:txBody>
-      </p:sp>
-      <p:sp>
-        <p:nvSpPr>
-          <p:cNvPr id="52" name="Shape 50"/>
-          <p:cNvSpPr/>
-          <p:nvPr/>
-        </p:nvSpPr>
-        <p:spPr>
-          <a:xfrm>
-            <a:off x="5218730" y="4169664"/>
-            <a:ext cx="603504" cy="384048"/>
-          </a:xfrm>
-          <a:prstGeom prst="rect">
-            <a:avLst>
-              <a:gd name="adj" fmla="val 9524"/>
-            </a:avLst>
-          </a:prstGeom>
-          <a:solidFill>
-            <a:srgbClr val="FFFFFF"/>
-          </a:solidFill>
-          <a:ln w="12700">
-            <a:solidFill>
-              <a:srgbClr val="DB2777"/>
-            </a:solidFill>
-            <a:prstDash val="solid"/>
-          </a:ln>
-        </p:spPr>
-      </p:sp>
-      <p:sp>
-        <p:nvSpPr>
-          <p:cNvPr id="53" name="Text 51"/>
-          <p:cNvSpPr/>
-          <p:nvPr/>
-        </p:nvSpPr>
-        <p:spPr>
-          <a:xfrm>
-            <a:off x="5218730" y="4169664"/>
-            <a:ext cx="603504" cy="384048"/>
-          </a:xfrm>
-          <a:prstGeom prst="rect">
-            <a:avLst/>
-          </a:prstGeom>
-          <a:noFill/>
-          <a:ln/>
-        </p:spPr>
-        <p:txBody>
-          <a:bodyPr wrap="square" lIns="0" tIns="0" rIns="0" bIns="0" rtlCol="0" anchor="ctr"/>
-          <a:lstStyle/>
-          <a:p>
-            <a:pPr algn="ctr" indent="0" marL="0">
-              <a:buNone/>
-            </a:pPr>
-            <a:r>
-              <a:rPr lang="en-US" sz="900" b="1" dirty="0">
-                <a:solidFill>
-                  <a:srgbClr val="9D174D"/>
-                </a:solidFill>
-                <a:latin typeface="Trebuchet MS" pitchFamily="34" charset="0"/>
-                <a:ea typeface="Trebuchet MS" pitchFamily="34" charset="-122"/>
-                <a:cs typeface="Trebuchet MS" pitchFamily="34" charset="-120"/>
-              </a:rPr>
-              <a:t>e</a:t>
-            </a:r>
-            <a:endParaRPr lang="en-US" sz="900" dirty="0"/>
-          </a:p>
-        </p:txBody>
-      </p:sp>
-      <p:sp>
-        <p:nvSpPr>
-          <p:cNvPr id="54" name="Shape 52"/>
-          <p:cNvSpPr/>
-          <p:nvPr/>
-        </p:nvSpPr>
-        <p:spPr>
-          <a:xfrm>
-            <a:off x="5872111" y="4169664"/>
-            <a:ext cx="603504" cy="384048"/>
-          </a:xfrm>
-          <a:prstGeom prst="rect">
-            <a:avLst>
-              <a:gd name="adj" fmla="val 9524"/>
-            </a:avLst>
-          </a:prstGeom>
-          <a:solidFill>
-            <a:srgbClr val="FFFFFF"/>
-          </a:solidFill>
-          <a:ln w="12700">
-            <a:solidFill>
-              <a:srgbClr val="DB2777"/>
-            </a:solidFill>
-            <a:prstDash val="solid"/>
-          </a:ln>
-        </p:spPr>
-      </p:sp>
-      <p:sp>
-        <p:nvSpPr>
-          <p:cNvPr id="55" name="Text 53"/>
-          <p:cNvSpPr/>
-          <p:nvPr/>
-        </p:nvSpPr>
-        <p:spPr>
-          <a:xfrm>
-            <a:off x="5872111" y="4169664"/>
-            <a:ext cx="603504" cy="384048"/>
-          </a:xfrm>
-          <a:prstGeom prst="rect">
-            <a:avLst/>
-          </a:prstGeom>
-          <a:noFill/>
-          <a:ln/>
-        </p:spPr>
-        <p:txBody>
-          <a:bodyPr wrap="square" lIns="0" tIns="0" rIns="0" bIns="0" rtlCol="0" anchor="ctr"/>
-          <a:lstStyle/>
-          <a:p>
-            <a:pPr algn="ctr" indent="0" marL="0">
-              <a:buNone/>
-            </a:pPr>
-            <a:r>
-              <a:rPr lang="en-US" sz="900" b="1" dirty="0">
-                <a:solidFill>
-                  <a:srgbClr val="9D174D"/>
-                </a:solidFill>
-                <a:latin typeface="Trebuchet MS" pitchFamily="34" charset="0"/>
-                <a:ea typeface="Trebuchet MS" pitchFamily="34" charset="-122"/>
-                <a:cs typeface="Trebuchet MS" pitchFamily="34" charset="-120"/>
-              </a:rPr>
-              <a:t>t</a:t>
-            </a:r>
-            <a:endParaRPr lang="en-US" sz="900" dirty="0"/>
-          </a:p>
-        </p:txBody>
-      </p:sp>
-      <p:sp>
-        <p:nvSpPr>
-          <p:cNvPr id="56" name="Shape 54"/>
-          <p:cNvSpPr/>
-          <p:nvPr/>
-        </p:nvSpPr>
-        <p:spPr>
-          <a:xfrm>
-            <a:off x="6525491" y="4169664"/>
-            <a:ext cx="603504" cy="384048"/>
-          </a:xfrm>
-          <a:prstGeom prst="rect">
-            <a:avLst>
-              <a:gd name="adj" fmla="val 9524"/>
-            </a:avLst>
-          </a:prstGeom>
-          <a:solidFill>
-            <a:srgbClr val="FFFFFF"/>
-          </a:solidFill>
-          <a:ln w="12700">
-            <a:solidFill>
-              <a:srgbClr val="DB2777"/>
-            </a:solidFill>
-            <a:prstDash val="solid"/>
-          </a:ln>
-        </p:spPr>
-      </p:sp>
-      <p:sp>
-        <p:nvSpPr>
-          <p:cNvPr id="57" name="Text 55"/>
-          <p:cNvSpPr/>
-          <p:nvPr/>
-        </p:nvSpPr>
-        <p:spPr>
-          <a:xfrm>
-            <a:off x="6525491" y="4169664"/>
-            <a:ext cx="603504" cy="384048"/>
-          </a:xfrm>
-          <a:prstGeom prst="rect">
-            <a:avLst/>
-          </a:prstGeom>
-          <a:noFill/>
-          <a:ln/>
-        </p:spPr>
-        <p:txBody>
-          <a:bodyPr wrap="square" lIns="0" tIns="0" rIns="0" bIns="0" rtlCol="0" anchor="ctr"/>
-          <a:lstStyle/>
-          <a:p>
-            <a:pPr algn="ctr" indent="0" marL="0">
-              <a:buNone/>
-            </a:pPr>
-            <a:r>
-              <a:rPr lang="en-US" sz="900" b="1" dirty="0">
-                <a:solidFill>
-                  <a:srgbClr val="9D174D"/>
-                </a:solidFill>
-                <a:latin typeface="Trebuchet MS" pitchFamily="34" charset="0"/>
-                <a:ea typeface="Trebuchet MS" pitchFamily="34" charset="-122"/>
-                <a:cs typeface="Trebuchet MS" pitchFamily="34" charset="-120"/>
-              </a:rPr>
-              <a:t>a</a:t>
-            </a:r>
-            <a:endParaRPr lang="en-US" sz="900" dirty="0"/>
-          </a:p>
-        </p:txBody>
-      </p:sp>
-      <p:sp>
-        <p:nvSpPr>
-          <p:cNvPr id="58" name="Shape 56"/>
-          <p:cNvSpPr/>
-          <p:nvPr/>
-        </p:nvSpPr>
-        <p:spPr>
-          <a:xfrm>
-            <a:off x="7178871" y="4169664"/>
-            <a:ext cx="603504" cy="384048"/>
-          </a:xfrm>
-          <a:prstGeom prst="rect">
-            <a:avLst>
-              <a:gd name="adj" fmla="val 9524"/>
-            </a:avLst>
-          </a:prstGeom>
-          <a:solidFill>
-            <a:srgbClr val="FFFFFF"/>
-          </a:solidFill>
-          <a:ln w="12700">
-            <a:solidFill>
-              <a:srgbClr val="DB2777"/>
-            </a:solidFill>
-            <a:prstDash val="solid"/>
-          </a:ln>
-        </p:spPr>
-      </p:sp>
-      <p:sp>
-        <p:nvSpPr>
-          <p:cNvPr id="59" name="Text 57"/>
-          <p:cNvSpPr/>
-          <p:nvPr/>
-        </p:nvSpPr>
-        <p:spPr>
-          <a:xfrm>
-            <a:off x="7178871" y="4169664"/>
-            <a:ext cx="603504" cy="384048"/>
-          </a:xfrm>
-          <a:prstGeom prst="rect">
-            <a:avLst/>
-          </a:prstGeom>
-          <a:noFill/>
-          <a:ln/>
-        </p:spPr>
-        <p:txBody>
-          <a:bodyPr wrap="square" lIns="0" tIns="0" rIns="0" bIns="0" rtlCol="0" anchor="ctr"/>
-          <a:lstStyle/>
-          <a:p>
-            <a:pPr algn="ctr" indent="0" marL="0">
-              <a:buNone/>
-            </a:pPr>
-            <a:r>
-              <a:rPr lang="en-US" sz="900" b="1" dirty="0">
-                <a:solidFill>
-                  <a:srgbClr val="9D174D"/>
-                </a:solidFill>
-                <a:latin typeface="Trebuchet MS" pitchFamily="34" charset="0"/>
-                <a:ea typeface="Trebuchet MS" pitchFamily="34" charset="-122"/>
-                <a:cs typeface="Trebuchet MS" pitchFamily="34" charset="-120"/>
-              </a:rPr>
-              <a:t>tch</a:t>
-            </a:r>
-            <a:endParaRPr lang="en-US" sz="900" dirty="0"/>
-          </a:p>
-        </p:txBody>
-      </p:sp>
-      <p:sp>
-        <p:nvSpPr>
-          <p:cNvPr id="60" name="Text 58"/>
-          <p:cNvSpPr/>
-          <p:nvPr/>
-        </p:nvSpPr>
-        <p:spPr>
-          <a:xfrm>
-            <a:off x="7178871" y="4572000"/>
-            <a:ext cx="603504" cy="219456"/>
-          </a:xfrm>
-          <a:prstGeom prst="rect">
-            <a:avLst/>
-          </a:prstGeom>
-          <a:noFill/>
-          <a:ln/>
-        </p:spPr>
-        <p:txBody>
-          <a:bodyPr wrap="square" lIns="0" tIns="0" rIns="0" bIns="0" rtlCol="0" anchor="t"/>
-          <a:lstStyle/>
-          <a:p>
-            <a:pPr algn="ctr" indent="0" marL="0">
-              <a:buNone/>
-            </a:pPr>
-            <a:r>
-              <a:rPr lang="en-US" sz="750" i="1" dirty="0">
-                <a:solidFill>
-                  <a:srgbClr val="94A3B8"/>
-                </a:solidFill>
-                <a:latin typeface="Calibri" pitchFamily="34" charset="0"/>
-                <a:ea typeface="Calibri" pitchFamily="34" charset="-122"/>
-                <a:cs typeface="Calibri" pitchFamily="34" charset="-120"/>
-              </a:rPr>
-              <a:t>/ch/</a:t>
-            </a:r>
-            <a:endParaRPr lang="en-US" sz="750" dirty="0"/>
-          </a:p>
-        </p:txBody>
-      </p:sp>
-      <p:sp>
-        <p:nvSpPr>
-          <p:cNvPr id="61" name="Shape 59"/>
-          <p:cNvSpPr/>
-          <p:nvPr/>
-        </p:nvSpPr>
-        <p:spPr>
-          <a:xfrm>
-            <a:off x="7832252" y="4169664"/>
-            <a:ext cx="603504" cy="384048"/>
-          </a:xfrm>
-          <a:prstGeom prst="rect">
-            <a:avLst>
-              <a:gd name="adj" fmla="val 9524"/>
-            </a:avLst>
-          </a:prstGeom>
-          <a:solidFill>
-            <a:srgbClr val="FFFFFF"/>
-          </a:solidFill>
-          <a:ln w="12700">
-            <a:solidFill>
-              <a:srgbClr val="DB2777"/>
-            </a:solidFill>
-            <a:prstDash val="solid"/>
-          </a:ln>
-        </p:spPr>
-      </p:sp>
-      <p:sp>
-        <p:nvSpPr>
-          <p:cNvPr id="62" name="Text 60"/>
-          <p:cNvSpPr/>
-          <p:nvPr/>
-        </p:nvSpPr>
-        <p:spPr>
-          <a:xfrm>
-            <a:off x="7832252" y="4169664"/>
-            <a:ext cx="603504" cy="384048"/>
-          </a:xfrm>
-          <a:prstGeom prst="rect">
-            <a:avLst/>
-          </a:prstGeom>
-          <a:noFill/>
-          <a:ln/>
-        </p:spPr>
-        <p:txBody>
-          <a:bodyPr wrap="square" lIns="0" tIns="0" rIns="0" bIns="0" rtlCol="0" anchor="ctr"/>
-          <a:lstStyle/>
-          <a:p>
-            <a:pPr algn="ctr" indent="0" marL="0">
-              <a:buNone/>
-            </a:pPr>
-            <a:r>
-              <a:rPr lang="en-US" sz="900" b="1" dirty="0">
-                <a:solidFill>
-                  <a:srgbClr val="9D174D"/>
-                </a:solidFill>
-                <a:latin typeface="Trebuchet MS" pitchFamily="34" charset="0"/>
-                <a:ea typeface="Trebuchet MS" pitchFamily="34" charset="-122"/>
-                <a:cs typeface="Trebuchet MS" pitchFamily="34" charset="-120"/>
-              </a:rPr>
-              <a:t>ed</a:t>
-            </a:r>
-            <a:endParaRPr lang="en-US" sz="900" dirty="0"/>
-          </a:p>
-        </p:txBody>
-      </p:sp>
-      <p:sp>
-        <p:nvSpPr>
-          <p:cNvPr id="63" name="Text 61"/>
-          <p:cNvSpPr/>
-          <p:nvPr/>
-        </p:nvSpPr>
-        <p:spPr>
-          <a:xfrm>
-            <a:off x="7832252" y="4572000"/>
-            <a:ext cx="603504" cy="219456"/>
-          </a:xfrm>
-          <a:prstGeom prst="rect">
-            <a:avLst/>
-          </a:prstGeom>
-          <a:noFill/>
-          <a:ln/>
-        </p:spPr>
-        <p:txBody>
-          <a:bodyPr wrap="square" lIns="0" tIns="0" rIns="0" bIns="0" rtlCol="0" anchor="t"/>
-          <a:lstStyle/>
-          <a:p>
-            <a:pPr algn="ctr" indent="0" marL="0">
-              <a:buNone/>
-            </a:pPr>
-            <a:r>
-              <a:rPr lang="en-US" sz="750" i="1" dirty="0">
-                <a:solidFill>
-                  <a:srgbClr val="94A3B8"/>
-                </a:solidFill>
-                <a:latin typeface="Calibri" pitchFamily="34" charset="0"/>
-                <a:ea typeface="Calibri" pitchFamily="34" charset="-122"/>
-                <a:cs typeface="Calibri" pitchFamily="34" charset="-120"/>
-              </a:rPr>
-              <a:t>/t/</a:t>
-            </a:r>
-            <a:endParaRPr lang="en-US" sz="750" dirty="0"/>
           </a:p>
         </p:txBody>
       </p:sp>
@@ -12217,7 +11671,7 @@
                 <a:ea typeface="Calibri" pitchFamily="34" charset="-122"/>
                 <a:cs typeface="Calibri" pitchFamily="34" charset="-120"/>
               </a:rPr>
-              <a:t>Word Labs  •  wordlabs.app  •  Prefix: 'semi-' = half, partly, or incomplete</a:t>
+              <a:t>Word Labs  •  wordlabs.app  •  Prefix: 'semi-' = half, partly, or almost</a:t>
             </a:r>
             <a:endParaRPr lang="en-US" sz="800" dirty="0"/>
           </a:p>
@@ -12356,7 +11810,7 @@
                 <a:ea typeface="Trebuchet MS" pitchFamily="34" charset="-122"/>
                 <a:cs typeface="Trebuchet MS" pitchFamily="34" charset="-120"/>
               </a:rPr>
-              <a:t>semicircle</a:t>
+              <a:t>semifinal</a:t>
             </a:r>
             <a:endParaRPr lang="en-US" sz="2800" dirty="0"/>
           </a:p>
@@ -13044,7 +12498,7 @@
                 <a:ea typeface="Calibri" pitchFamily="34" charset="-122"/>
                 <a:cs typeface="Calibri" pitchFamily="34" charset="-120"/>
               </a:rPr>
-              <a:t>Word Labs  •  wordlabs.app  •  Prefix: 'semi-' = half, partly, or incomplete</a:t>
+              <a:t>Word Labs  •  wordlabs.app  •  Prefix: 'semi-' = half, partly, or almost</a:t>
             </a:r>
             <a:endParaRPr lang="en-US" sz="800" dirty="0"/>
           </a:p>
@@ -13183,7 +12637,7 @@
                 <a:ea typeface="Trebuchet MS" pitchFamily="34" charset="-122"/>
                 <a:cs typeface="Trebuchet MS" pitchFamily="34" charset="-120"/>
               </a:rPr>
-              <a:t>semicircle</a:t>
+              <a:t>semifinal</a:t>
             </a:r>
             <a:endParaRPr lang="en-US" sz="2800" dirty="0"/>
           </a:p>
@@ -13434,7 +12888,7 @@
                 <a:ea typeface="Trebuchet MS" pitchFamily="34" charset="-122"/>
                 <a:cs typeface="Trebuchet MS" pitchFamily="34" charset="-120"/>
               </a:rPr>
-              <a:t>circle</a:t>
+              <a:t>final</a:t>
             </a:r>
             <a:endParaRPr lang="en-US" sz="1300" dirty="0"/>
           </a:p>
@@ -13473,7 +12927,7 @@
                 <a:ea typeface="Calibri" pitchFamily="34" charset="-122"/>
                 <a:cs typeface="Calibri" pitchFamily="34" charset="-120"/>
               </a:rPr>
-              <a:t>a round shape</a:t>
+              <a:t>last, end</a:t>
             </a:r>
             <a:endParaRPr lang="en-US" sz="850" dirty="0"/>
           </a:p>
@@ -14029,7 +13483,7 @@
                 <a:ea typeface="Calibri" pitchFamily="34" charset="-122"/>
                 <a:cs typeface="Calibri" pitchFamily="34" charset="-120"/>
               </a:rPr>
-              <a:t>Word Labs  •  wordlabs.app  •  Prefix: 'semi-' = half, partly, or incomplete</a:t>
+              <a:t>Word Labs  •  wordlabs.app  •  Prefix: 'semi-' = half, partly, or almost</a:t>
             </a:r>
             <a:endParaRPr lang="en-US" sz="800" dirty="0"/>
           </a:p>
@@ -14168,7 +13622,7 @@
                 <a:ea typeface="Trebuchet MS" pitchFamily="34" charset="-122"/>
                 <a:cs typeface="Trebuchet MS" pitchFamily="34" charset="-120"/>
               </a:rPr>
-              <a:t>semicircle</a:t>
+              <a:t>semifinal</a:t>
             </a:r>
             <a:endParaRPr lang="en-US" sz="2800" dirty="0"/>
           </a:p>
@@ -14419,7 +13873,7 @@
                 <a:ea typeface="Trebuchet MS" pitchFamily="34" charset="-122"/>
                 <a:cs typeface="Trebuchet MS" pitchFamily="34" charset="-120"/>
               </a:rPr>
-              <a:t>circle</a:t>
+              <a:t>final</a:t>
             </a:r>
             <a:endParaRPr lang="en-US" sz="1300" dirty="0"/>
           </a:p>
@@ -14458,7 +13912,7 @@
                 <a:ea typeface="Calibri" pitchFamily="34" charset="-122"/>
                 <a:cs typeface="Calibri" pitchFamily="34" charset="-120"/>
               </a:rPr>
-              <a:t>a round shape</a:t>
+              <a:t>last, end</a:t>
             </a:r>
             <a:endParaRPr lang="en-US" sz="850" dirty="0"/>
           </a:p>
@@ -14827,7 +14281,7 @@
                 <a:ea typeface="Trebuchet MS" pitchFamily="34" charset="-122"/>
                 <a:cs typeface="Trebuchet MS" pitchFamily="34" charset="-120"/>
               </a:rPr>
-              <a:t>cir</a:t>
+              <a:t>fi</a:t>
             </a:r>
             <a:endParaRPr lang="en-US" sz="1400" dirty="0"/>
           </a:p>
@@ -14932,7 +14386,7 @@
                 <a:ea typeface="Trebuchet MS" pitchFamily="34" charset="-122"/>
                 <a:cs typeface="Trebuchet MS" pitchFamily="34" charset="-120"/>
               </a:rPr>
-              <a:t>cle</a:t>
+              <a:t>nal</a:t>
             </a:r>
             <a:endParaRPr lang="en-US" sz="1400" dirty="0"/>
           </a:p>
@@ -15265,7 +14719,7 @@
                 <a:ea typeface="Calibri" pitchFamily="34" charset="-122"/>
                 <a:cs typeface="Calibri" pitchFamily="34" charset="-120"/>
               </a:rPr>
-              <a:t>Prefix 'semi-' — half, partly, or incomplete</a:t>
+              <a:t>Prefix 'semi-' — half, partly, or almost</a:t>
             </a:r>
             <a:endParaRPr lang="en-US" sz="1600" dirty="0"/>
           </a:p>
@@ -15621,7 +15075,7 @@
                 <a:ea typeface="Calibri" pitchFamily="34" charset="-122"/>
                 <a:cs typeface="Calibri" pitchFamily="34" charset="-120"/>
               </a:rPr>
-              <a:t>Word Labs  •  wordlabs.app  •  Prefix: 'semi-' = half, partly, or incomplete</a:t>
+              <a:t>Word Labs  •  wordlabs.app  •  Prefix: 'semi-' = half, partly, or almost</a:t>
             </a:r>
             <a:endParaRPr lang="en-US" sz="800" dirty="0"/>
           </a:p>
@@ -15760,7 +15214,7 @@
                 <a:ea typeface="Trebuchet MS" pitchFamily="34" charset="-122"/>
                 <a:cs typeface="Trebuchet MS" pitchFamily="34" charset="-120"/>
               </a:rPr>
-              <a:t>semicircle</a:t>
+              <a:t>semifinal</a:t>
             </a:r>
             <a:endParaRPr lang="en-US" sz="2800" dirty="0"/>
           </a:p>
@@ -16011,7 +15465,7 @@
                 <a:ea typeface="Trebuchet MS" pitchFamily="34" charset="-122"/>
                 <a:cs typeface="Trebuchet MS" pitchFamily="34" charset="-120"/>
               </a:rPr>
-              <a:t>circle</a:t>
+              <a:t>final</a:t>
             </a:r>
             <a:endParaRPr lang="en-US" sz="1300" dirty="0"/>
           </a:p>
@@ -16050,7 +15504,7 @@
                 <a:ea typeface="Calibri" pitchFamily="34" charset="-122"/>
                 <a:cs typeface="Calibri" pitchFamily="34" charset="-120"/>
               </a:rPr>
-              <a:t>a round shape</a:t>
+              <a:t>last, end</a:t>
             </a:r>
             <a:endParaRPr lang="en-US" sz="850" dirty="0"/>
           </a:p>
@@ -16419,7 +15873,7 @@
                 <a:ea typeface="Trebuchet MS" pitchFamily="34" charset="-122"/>
                 <a:cs typeface="Trebuchet MS" pitchFamily="34" charset="-120"/>
               </a:rPr>
-              <a:t>cir</a:t>
+              <a:t>fi</a:t>
             </a:r>
             <a:endParaRPr lang="en-US" sz="1400" dirty="0"/>
           </a:p>
@@ -16524,7 +15978,7 @@
                 <a:ea typeface="Trebuchet MS" pitchFamily="34" charset="-122"/>
                 <a:cs typeface="Trebuchet MS" pitchFamily="34" charset="-120"/>
               </a:rPr>
-              <a:t>cle</a:t>
+              <a:t>nal</a:t>
             </a:r>
             <a:endParaRPr lang="en-US" sz="1400" dirty="0"/>
           </a:p>
@@ -16605,11 +16059,11 @@
         <p:spPr>
           <a:xfrm>
             <a:off x="1874520" y="4096512"/>
-            <a:ext cx="6903720" cy="804672"/>
+            <a:ext cx="6903720" cy="658368"/>
           </a:xfrm>
           <a:prstGeom prst="rect">
             <a:avLst>
-              <a:gd name="adj" fmla="val 6818"/>
+              <a:gd name="adj" fmla="val 8333"/>
             </a:avLst>
           </a:prstGeom>
           <a:solidFill>
@@ -16632,11 +16086,11 @@
         <p:spPr>
           <a:xfrm>
             <a:off x="2023872" y="4169664"/>
-            <a:ext cx="685800" cy="384048"/>
+            <a:ext cx="685800" cy="475488"/>
           </a:xfrm>
           <a:prstGeom prst="rect">
             <a:avLst>
-              <a:gd name="adj" fmla="val 9524"/>
+              <a:gd name="adj" fmla="val 7692"/>
             </a:avLst>
           </a:prstGeom>
           <a:solidFill>
@@ -16659,7 +16113,7 @@
         <p:spPr>
           <a:xfrm>
             <a:off x="2023872" y="4169664"/>
-            <a:ext cx="685800" cy="384048"/>
+            <a:ext cx="685800" cy="475488"/>
           </a:xfrm>
           <a:prstGeom prst="rect">
             <a:avLst/>
@@ -16698,11 +16152,11 @@
         <p:spPr>
           <a:xfrm>
             <a:off x="2831592" y="4169664"/>
-            <a:ext cx="685800" cy="384048"/>
+            <a:ext cx="685800" cy="475488"/>
           </a:xfrm>
           <a:prstGeom prst="rect">
             <a:avLst>
-              <a:gd name="adj" fmla="val 9524"/>
+              <a:gd name="adj" fmla="val 7692"/>
             </a:avLst>
           </a:prstGeom>
           <a:solidFill>
@@ -16725,7 +16179,7 @@
         <p:spPr>
           <a:xfrm>
             <a:off x="2831592" y="4169664"/>
-            <a:ext cx="685800" cy="384048"/>
+            <a:ext cx="685800" cy="475488"/>
           </a:xfrm>
           <a:prstGeom prst="rect">
             <a:avLst/>
@@ -16764,11 +16218,11 @@
         <p:spPr>
           <a:xfrm>
             <a:off x="3639312" y="4169664"/>
-            <a:ext cx="685800" cy="384048"/>
+            <a:ext cx="685800" cy="475488"/>
           </a:xfrm>
           <a:prstGeom prst="rect">
             <a:avLst>
-              <a:gd name="adj" fmla="val 9524"/>
+              <a:gd name="adj" fmla="val 7692"/>
             </a:avLst>
           </a:prstGeom>
           <a:solidFill>
@@ -16791,7 +16245,7 @@
         <p:spPr>
           <a:xfrm>
             <a:off x="3639312" y="4169664"/>
-            <a:ext cx="685800" cy="384048"/>
+            <a:ext cx="685800" cy="475488"/>
           </a:xfrm>
           <a:prstGeom prst="rect">
             <a:avLst/>
@@ -16830,11 +16284,11 @@
         <p:spPr>
           <a:xfrm>
             <a:off x="4447032" y="4169664"/>
-            <a:ext cx="685800" cy="384048"/>
+            <a:ext cx="685800" cy="475488"/>
           </a:xfrm>
           <a:prstGeom prst="rect">
             <a:avLst>
-              <a:gd name="adj" fmla="val 9524"/>
+              <a:gd name="adj" fmla="val 7692"/>
             </a:avLst>
           </a:prstGeom>
           <a:solidFill>
@@ -16857,7 +16311,7 @@
         <p:spPr>
           <a:xfrm>
             <a:off x="4447032" y="4169664"/>
-            <a:ext cx="685800" cy="384048"/>
+            <a:ext cx="685800" cy="475488"/>
           </a:xfrm>
           <a:prstGeom prst="rect">
             <a:avLst/>
@@ -16896,11 +16350,11 @@
         <p:spPr>
           <a:xfrm>
             <a:off x="5254752" y="4169664"/>
-            <a:ext cx="685800" cy="384048"/>
+            <a:ext cx="685800" cy="475488"/>
           </a:xfrm>
           <a:prstGeom prst="rect">
             <a:avLst>
-              <a:gd name="adj" fmla="val 9524"/>
+              <a:gd name="adj" fmla="val 7692"/>
             </a:avLst>
           </a:prstGeom>
           <a:solidFill>
@@ -16923,7 +16377,7 @@
         <p:spPr>
           <a:xfrm>
             <a:off x="5254752" y="4169664"/>
-            <a:ext cx="685800" cy="384048"/>
+            <a:ext cx="685800" cy="475488"/>
           </a:xfrm>
           <a:prstGeom prst="rect">
             <a:avLst/>
@@ -16947,7 +16401,7 @@
                 <a:ea typeface="Trebuchet MS" pitchFamily="34" charset="-122"/>
                 <a:cs typeface="Trebuchet MS" pitchFamily="34" charset="-120"/>
               </a:rPr>
-              <a:t>c</a:t>
+              <a:t>f</a:t>
             </a:r>
             <a:endParaRPr lang="en-US" sz="900" dirty="0"/>
           </a:p>
@@ -16955,57 +16409,18 @@
       </p:sp>
       <p:sp>
         <p:nvSpPr>
-          <p:cNvPr id="49" name="Text 47"/>
-          <p:cNvSpPr/>
-          <p:nvPr/>
-        </p:nvSpPr>
-        <p:spPr>
-          <a:xfrm>
-            <a:off x="5254752" y="4572000"/>
-            <a:ext cx="685800" cy="219456"/>
-          </a:xfrm>
-          <a:prstGeom prst="rect">
-            <a:avLst/>
-          </a:prstGeom>
-          <a:noFill/>
-          <a:ln/>
-        </p:spPr>
-        <p:txBody>
-          <a:bodyPr wrap="square" lIns="0" tIns="0" rIns="0" bIns="0" rtlCol="0" anchor="t"/>
-          <a:lstStyle/>
-          <a:p>
-            <a:pPr algn="ctr" indent="0" marL="0">
-              <a:buNone/>
-            </a:pPr>
-            <a:r>
-              <a:rPr lang="en-US" sz="750" i="1" dirty="0">
-                <a:solidFill>
-                  <a:srgbClr val="94A3B8"/>
-                </a:solidFill>
-                <a:latin typeface="Calibri" pitchFamily="34" charset="0"/>
-                <a:ea typeface="Calibri" pitchFamily="34" charset="-122"/>
-                <a:cs typeface="Calibri" pitchFamily="34" charset="-120"/>
-              </a:rPr>
-              <a:t>/s/</a:t>
-            </a:r>
-            <a:endParaRPr lang="en-US" sz="750" dirty="0"/>
-          </a:p>
-        </p:txBody>
-      </p:sp>
-      <p:sp>
-        <p:nvSpPr>
-          <p:cNvPr id="50" name="Shape 48"/>
+          <p:cNvPr id="49" name="Shape 47"/>
           <p:cNvSpPr/>
           <p:nvPr/>
         </p:nvSpPr>
         <p:spPr>
           <a:xfrm>
             <a:off x="6062472" y="4169664"/>
-            <a:ext cx="685800" cy="384048"/>
+            <a:ext cx="685800" cy="475488"/>
           </a:xfrm>
           <a:prstGeom prst="rect">
             <a:avLst>
-              <a:gd name="adj" fmla="val 9524"/>
+              <a:gd name="adj" fmla="val 7692"/>
             </a:avLst>
           </a:prstGeom>
           <a:solidFill>
@@ -17021,14 +16436,14 @@
       </p:sp>
       <p:sp>
         <p:nvSpPr>
-          <p:cNvPr id="51" name="Text 49"/>
+          <p:cNvPr id="50" name="Text 48"/>
           <p:cNvSpPr/>
           <p:nvPr/>
         </p:nvSpPr>
         <p:spPr>
           <a:xfrm>
             <a:off x="6062472" y="4169664"/>
-            <a:ext cx="685800" cy="384048"/>
+            <a:ext cx="685800" cy="475488"/>
           </a:xfrm>
           <a:prstGeom prst="rect">
             <a:avLst/>
@@ -17052,7 +16467,7 @@
                 <a:ea typeface="Trebuchet MS" pitchFamily="34" charset="-122"/>
                 <a:cs typeface="Trebuchet MS" pitchFamily="34" charset="-120"/>
               </a:rPr>
-              <a:t>ir</a:t>
+              <a:t>i</a:t>
             </a:r>
             <a:endParaRPr lang="en-US" sz="900" dirty="0"/>
           </a:p>
@@ -17060,18 +16475,18 @@
       </p:sp>
       <p:sp>
         <p:nvSpPr>
-          <p:cNvPr id="52" name="Shape 50"/>
+          <p:cNvPr id="51" name="Shape 49"/>
           <p:cNvSpPr/>
           <p:nvPr/>
         </p:nvSpPr>
         <p:spPr>
           <a:xfrm>
             <a:off x="6870192" y="4169664"/>
-            <a:ext cx="685800" cy="384048"/>
+            <a:ext cx="685800" cy="475488"/>
           </a:xfrm>
           <a:prstGeom prst="rect">
             <a:avLst>
-              <a:gd name="adj" fmla="val 9524"/>
+              <a:gd name="adj" fmla="val 7692"/>
             </a:avLst>
           </a:prstGeom>
           <a:solidFill>
@@ -17087,14 +16502,14 @@
       </p:sp>
       <p:sp>
         <p:nvSpPr>
-          <p:cNvPr id="53" name="Text 51"/>
+          <p:cNvPr id="52" name="Text 50"/>
           <p:cNvSpPr/>
           <p:nvPr/>
         </p:nvSpPr>
         <p:spPr>
           <a:xfrm>
             <a:off x="6870192" y="4169664"/>
-            <a:ext cx="685800" cy="384048"/>
+            <a:ext cx="685800" cy="475488"/>
           </a:xfrm>
           <a:prstGeom prst="rect">
             <a:avLst/>
@@ -17118,7 +16533,7 @@
                 <a:ea typeface="Trebuchet MS" pitchFamily="34" charset="-122"/>
                 <a:cs typeface="Trebuchet MS" pitchFamily="34" charset="-120"/>
               </a:rPr>
-              <a:t>c</a:t>
+              <a:t>n</a:t>
             </a:r>
             <a:endParaRPr lang="en-US" sz="900" dirty="0"/>
           </a:p>
@@ -17126,18 +16541,18 @@
       </p:sp>
       <p:sp>
         <p:nvSpPr>
-          <p:cNvPr id="54" name="Shape 52"/>
+          <p:cNvPr id="53" name="Shape 51"/>
           <p:cNvSpPr/>
           <p:nvPr/>
         </p:nvSpPr>
         <p:spPr>
           <a:xfrm>
             <a:off x="7677912" y="4169664"/>
-            <a:ext cx="685800" cy="384048"/>
+            <a:ext cx="685800" cy="475488"/>
           </a:xfrm>
           <a:prstGeom prst="rect">
             <a:avLst>
-              <a:gd name="adj" fmla="val 9524"/>
+              <a:gd name="adj" fmla="val 7692"/>
             </a:avLst>
           </a:prstGeom>
           <a:solidFill>
@@ -17153,14 +16568,14 @@
       </p:sp>
       <p:sp>
         <p:nvSpPr>
-          <p:cNvPr id="55" name="Text 53"/>
+          <p:cNvPr id="54" name="Text 52"/>
           <p:cNvSpPr/>
           <p:nvPr/>
         </p:nvSpPr>
         <p:spPr>
           <a:xfrm>
             <a:off x="7677912" y="4169664"/>
-            <a:ext cx="685800" cy="384048"/>
+            <a:ext cx="685800" cy="475488"/>
           </a:xfrm>
           <a:prstGeom prst="rect">
             <a:avLst/>
@@ -17184,48 +16599,9 @@
                 <a:ea typeface="Trebuchet MS" pitchFamily="34" charset="-122"/>
                 <a:cs typeface="Trebuchet MS" pitchFamily="34" charset="-120"/>
               </a:rPr>
-              <a:t>le</a:t>
+              <a:t>al</a:t>
             </a:r>
             <a:endParaRPr lang="en-US" sz="900" dirty="0"/>
-          </a:p>
-        </p:txBody>
-      </p:sp>
-      <p:sp>
-        <p:nvSpPr>
-          <p:cNvPr id="56" name="Text 54"/>
-          <p:cNvSpPr/>
-          <p:nvPr/>
-        </p:nvSpPr>
-        <p:spPr>
-          <a:xfrm>
-            <a:off x="7677912" y="4572000"/>
-            <a:ext cx="685800" cy="219456"/>
-          </a:xfrm>
-          <a:prstGeom prst="rect">
-            <a:avLst/>
-          </a:prstGeom>
-          <a:noFill/>
-          <a:ln/>
-        </p:spPr>
-        <p:txBody>
-          <a:bodyPr wrap="square" lIns="0" tIns="0" rIns="0" bIns="0" rtlCol="0" anchor="t"/>
-          <a:lstStyle/>
-          <a:p>
-            <a:pPr algn="ctr" indent="0" marL="0">
-              <a:buNone/>
-            </a:pPr>
-            <a:r>
-              <a:rPr lang="en-US" sz="750" i="1" dirty="0">
-                <a:solidFill>
-                  <a:srgbClr val="94A3B8"/>
-                </a:solidFill>
-                <a:latin typeface="Calibri" pitchFamily="34" charset="0"/>
-                <a:ea typeface="Calibri" pitchFamily="34" charset="-122"/>
-                <a:cs typeface="Calibri" pitchFamily="34" charset="-120"/>
-              </a:rPr>
-              <a:t>/ul/</a:t>
-            </a:r>
-            <a:endParaRPr lang="en-US" sz="750" dirty="0"/>
           </a:p>
         </p:txBody>
       </p:sp>
@@ -17797,7 +17173,7 @@
                 <a:ea typeface="Calibri" pitchFamily="34" charset="-122"/>
                 <a:cs typeface="Calibri" pitchFamily="34" charset="-120"/>
               </a:rPr>
-              <a:t>Word Labs  •  wordlabs.app  •  Prefix: 'semi-' = half, partly, or incomplete</a:t>
+              <a:t>Word Labs  •  wordlabs.app  •  Prefix: 'semi-' = half, partly, or almost</a:t>
             </a:r>
             <a:endParaRPr lang="en-US" sz="800" dirty="0"/>
           </a:p>
@@ -18437,7 +17813,7 @@
                 <a:ea typeface="Calibri" pitchFamily="34" charset="-122"/>
                 <a:cs typeface="Calibri" pitchFamily="34" charset="-120"/>
               </a:rPr>
-              <a:t>Word Labs  •  wordlabs.app  •  Prefix: 'semi-' = half, partly, or incomplete</a:t>
+              <a:t>Word Labs  •  wordlabs.app  •  Prefix: 'semi-' = half, partly, or almost</a:t>
             </a:r>
             <a:endParaRPr lang="en-US" sz="800" dirty="0"/>
           </a:p>
@@ -18549,7 +17925,7 @@
                 <a:ea typeface="Calibri" pitchFamily="34" charset="-122"/>
                 <a:cs typeface="Calibri" pitchFamily="34" charset="-120"/>
               </a:rPr>
-              <a:t>During the </a:t>
+              <a:t>The </a:t>
             </a:r>
             <a:pPr algn="l" indent="0" marL="0">
               <a:buNone/>
@@ -18566,7 +17942,7 @@
                 <a:ea typeface="Calibri" pitchFamily="34" charset="-122"/>
                 <a:cs typeface="Calibri" pitchFamily="34" charset="-120"/>
               </a:rPr>
-              <a:t>semifinal</a:t>
+              <a:t>semitrailer</a:t>
             </a:r>
             <a:pPr algn="l" indent="0" marL="0">
               <a:buNone/>
@@ -18580,7 +17956,7 @@
                 <a:ea typeface="Calibri" pitchFamily="34" charset="-122"/>
                 <a:cs typeface="Calibri" pitchFamily="34" charset="-120"/>
               </a:rPr>
-              <a:t>, the coach drew a </a:t>
+              <a:t> stopped near the </a:t>
             </a:r>
             <a:pPr algn="l" indent="0" marL="0">
               <a:buNone/>
@@ -18597,7 +17973,7 @@
                 <a:ea typeface="Calibri" pitchFamily="34" charset="-122"/>
                 <a:cs typeface="Calibri" pitchFamily="34" charset="-120"/>
               </a:rPr>
-              <a:t>semicircle</a:t>
+              <a:t>semidetached</a:t>
             </a:r>
             <a:pPr algn="l" indent="0" marL="0">
               <a:buNone/>
@@ -18611,7 +17987,7 @@
                 <a:ea typeface="Calibri" pitchFamily="34" charset="-122"/>
                 <a:cs typeface="Calibri" pitchFamily="34" charset="-120"/>
               </a:rPr>
-              <a:t> on the whiteboard and used a </a:t>
+              <a:t> house, and the driver used a </a:t>
             </a:r>
             <a:pPr algn="l" indent="0" marL="0">
               <a:buNone/>
@@ -18642,7 +18018,7 @@
                 <a:ea typeface="Calibri" pitchFamily="34" charset="-122"/>
                 <a:cs typeface="Calibri" pitchFamily="34" charset="-120"/>
               </a:rPr>
-              <a:t> in her notes to explain the new play.</a:t>
+              <a:t> in his delivery note.</a:t>
             </a:r>
             <a:endParaRPr lang="en-US" sz="1800" dirty="0"/>
           </a:p>
@@ -18797,7 +18173,7 @@
                 <a:ea typeface="Trebuchet MS" pitchFamily="34" charset="-122"/>
                 <a:cs typeface="Trebuchet MS" pitchFamily="34" charset="-120"/>
               </a:rPr>
-              <a:t>semifinal</a:t>
+              <a:t>semitrailer</a:t>
             </a:r>
             <a:endParaRPr lang="en-US" sz="1400" dirty="0"/>
           </a:p>
@@ -18925,7 +18301,7 @@
                 <a:ea typeface="Trebuchet MS" pitchFamily="34" charset="-122"/>
                 <a:cs typeface="Trebuchet MS" pitchFamily="34" charset="-120"/>
               </a:rPr>
-              <a:t>semicircle</a:t>
+              <a:t>semidetached</a:t>
             </a:r>
             <a:endParaRPr lang="en-US" sz="1400" dirty="0"/>
           </a:p>
@@ -19384,7 +18760,7 @@
                 <a:ea typeface="Calibri" pitchFamily="34" charset="-122"/>
                 <a:cs typeface="Calibri" pitchFamily="34" charset="-120"/>
               </a:rPr>
-              <a:t>Word Labs  •  wordlabs.app  •  Prefix: 'semi-' = half, partly, or incomplete</a:t>
+              <a:t>Word Labs  •  wordlabs.app  •  Prefix: 'semi-' = half, partly, or almost</a:t>
             </a:r>
             <a:endParaRPr lang="en-US" sz="800" dirty="0"/>
           </a:p>
@@ -19523,7 +18899,7 @@
                 <a:ea typeface="Trebuchet MS" pitchFamily="34" charset="-122"/>
                 <a:cs typeface="Trebuchet MS" pitchFamily="34" charset="-120"/>
               </a:rPr>
-              <a:t>semifinal</a:t>
+              <a:t>semitrailer</a:t>
             </a:r>
             <a:endParaRPr lang="en-US" sz="2800" dirty="0"/>
           </a:p>
@@ -20211,7 +19587,7 @@
                 <a:ea typeface="Calibri" pitchFamily="34" charset="-122"/>
                 <a:cs typeface="Calibri" pitchFamily="34" charset="-120"/>
               </a:rPr>
-              <a:t>Word Labs  •  wordlabs.app  •  Prefix: 'semi-' = half, partly, or incomplete</a:t>
+              <a:t>Word Labs  •  wordlabs.app  •  Prefix: 'semi-' = half, partly, or almost</a:t>
             </a:r>
             <a:endParaRPr lang="en-US" sz="800" dirty="0"/>
           </a:p>
@@ -20350,7 +19726,7 @@
                 <a:ea typeface="Trebuchet MS" pitchFamily="34" charset="-122"/>
                 <a:cs typeface="Trebuchet MS" pitchFamily="34" charset="-120"/>
               </a:rPr>
-              <a:t>semifinal</a:t>
+              <a:t>semitrailer</a:t>
             </a:r>
             <a:endParaRPr lang="en-US" sz="2800" dirty="0"/>
           </a:p>
@@ -20430,7 +19806,7 @@
         </p:nvSpPr>
         <p:spPr>
           <a:xfrm>
-            <a:off x="2938272" y="2258568"/>
+            <a:off x="2221992" y="2258568"/>
             <a:ext cx="1828800" cy="292608"/>
           </a:xfrm>
           <a:prstGeom prst="rect">
@@ -20464,7 +19840,7 @@
         </p:nvSpPr>
         <p:spPr>
           <a:xfrm>
-            <a:off x="2938272" y="2258568"/>
+            <a:off x="2221992" y="2258568"/>
             <a:ext cx="1828800" cy="292608"/>
           </a:xfrm>
           <a:prstGeom prst="rect">
@@ -20503,7 +19879,7 @@
         </p:nvSpPr>
         <p:spPr>
           <a:xfrm>
-            <a:off x="2938272" y="2569464"/>
+            <a:off x="2221992" y="2569464"/>
             <a:ext cx="1828800" cy="201168"/>
           </a:xfrm>
           <a:prstGeom prst="rect">
@@ -20542,7 +19918,7 @@
         </p:nvSpPr>
         <p:spPr>
           <a:xfrm>
-            <a:off x="5803392" y="2258568"/>
+            <a:off x="4370832" y="2258568"/>
             <a:ext cx="1828800" cy="292608"/>
           </a:xfrm>
           <a:prstGeom prst="rect">
@@ -20576,7 +19952,7 @@
         </p:nvSpPr>
         <p:spPr>
           <a:xfrm>
-            <a:off x="5803392" y="2258568"/>
+            <a:off x="4370832" y="2258568"/>
             <a:ext cx="1828800" cy="292608"/>
           </a:xfrm>
           <a:prstGeom prst="rect">
@@ -20601,7 +19977,7 @@
                 <a:ea typeface="Trebuchet MS" pitchFamily="34" charset="-122"/>
                 <a:cs typeface="Trebuchet MS" pitchFamily="34" charset="-120"/>
               </a:rPr>
-              <a:t>final</a:t>
+              <a:t>trail</a:t>
             </a:r>
             <a:endParaRPr lang="en-US" sz="1300" dirty="0"/>
           </a:p>
@@ -20615,7 +19991,7 @@
         </p:nvSpPr>
         <p:spPr>
           <a:xfrm>
-            <a:off x="5803392" y="2569464"/>
+            <a:off x="4370832" y="2569464"/>
             <a:ext cx="1828800" cy="201168"/>
           </a:xfrm>
           <a:prstGeom prst="rect">
@@ -20640,7 +20016,7 @@
                 <a:ea typeface="Calibri" pitchFamily="34" charset="-122"/>
                 <a:cs typeface="Calibri" pitchFamily="34" charset="-120"/>
               </a:rPr>
-              <a:t>last or at the end</a:t>
+              <a:t>to be pulled along</a:t>
             </a:r>
             <a:endParaRPr lang="en-US" sz="850" dirty="0"/>
           </a:p>
@@ -20649,6 +20025,118 @@
       <p:sp>
         <p:nvSpPr>
           <p:cNvPr id="22" name="Shape 20"/>
+          <p:cNvSpPr/>
+          <p:nvPr/>
+        </p:nvSpPr>
+        <p:spPr>
+          <a:xfrm>
+            <a:off x="6519672" y="2258568"/>
+            <a:ext cx="1828800" cy="292608"/>
+          </a:xfrm>
+          <a:prstGeom prst="rect">
+            <a:avLst>
+              <a:gd name="adj" fmla="val 25000"/>
+            </a:avLst>
+          </a:prstGeom>
+          <a:solidFill>
+            <a:srgbClr val="FCE7F3"/>
+          </a:solidFill>
+          <a:ln w="19050">
+            <a:solidFill>
+              <a:srgbClr val="DB2777"/>
+            </a:solidFill>
+            <a:prstDash val="solid"/>
+          </a:ln>
+          <a:effectLst>
+            <a:outerShdw sx="100000" sy="100000" kx="0" ky="0" algn="bl" rotWithShape="0" blurRad="101600" dist="38100" dir="8100000">
+              <a:srgbClr val="000000">
+                <a:alpha val="12000"/>
+              </a:srgbClr>
+            </a:outerShdw>
+          </a:effectLst>
+        </p:spPr>
+      </p:sp>
+      <p:sp>
+        <p:nvSpPr>
+          <p:cNvPr id="23" name="Text 21"/>
+          <p:cNvSpPr/>
+          <p:nvPr/>
+        </p:nvSpPr>
+        <p:spPr>
+          <a:xfrm>
+            <a:off x="6519672" y="2258568"/>
+            <a:ext cx="1828800" cy="292608"/>
+          </a:xfrm>
+          <a:prstGeom prst="rect">
+            <a:avLst/>
+          </a:prstGeom>
+          <a:noFill/>
+          <a:ln/>
+        </p:spPr>
+        <p:txBody>
+          <a:bodyPr wrap="square" lIns="0" tIns="0" rIns="0" bIns="0" rtlCol="0" anchor="ctr"/>
+          <a:lstStyle/>
+          <a:p>
+            <a:pPr algn="ctr" indent="0" marL="0">
+              <a:buNone/>
+            </a:pPr>
+            <a:r>
+              <a:rPr lang="en-US" sz="1300" b="1" dirty="0">
+                <a:solidFill>
+                  <a:srgbClr val="9D174D"/>
+                </a:solidFill>
+                <a:latin typeface="Trebuchet MS" pitchFamily="34" charset="0"/>
+                <a:ea typeface="Trebuchet MS" pitchFamily="34" charset="-122"/>
+                <a:cs typeface="Trebuchet MS" pitchFamily="34" charset="-120"/>
+              </a:rPr>
+              <a:t>er</a:t>
+            </a:r>
+            <a:endParaRPr lang="en-US" sz="1300" dirty="0"/>
+          </a:p>
+        </p:txBody>
+      </p:sp>
+      <p:sp>
+        <p:nvSpPr>
+          <p:cNvPr id="24" name="Text 22"/>
+          <p:cNvSpPr/>
+          <p:nvPr/>
+        </p:nvSpPr>
+        <p:spPr>
+          <a:xfrm>
+            <a:off x="6519672" y="2569464"/>
+            <a:ext cx="1828800" cy="201168"/>
+          </a:xfrm>
+          <a:prstGeom prst="rect">
+            <a:avLst/>
+          </a:prstGeom>
+          <a:noFill/>
+          <a:ln/>
+        </p:spPr>
+        <p:txBody>
+          <a:bodyPr wrap="square" lIns="0" tIns="0" rIns="0" bIns="0" rtlCol="0" anchor="t"/>
+          <a:lstStyle/>
+          <a:p>
+            <a:pPr algn="ctr" indent="0" marL="0">
+              <a:buNone/>
+            </a:pPr>
+            <a:r>
+              <a:rPr lang="en-US" sz="850" dirty="0">
+                <a:solidFill>
+                  <a:srgbClr val="475569"/>
+                </a:solidFill>
+                <a:latin typeface="Calibri" pitchFamily="34" charset="0"/>
+                <a:ea typeface="Calibri" pitchFamily="34" charset="-122"/>
+                <a:cs typeface="Calibri" pitchFamily="34" charset="-120"/>
+              </a:rPr>
+              <a:t>one who or thing that</a:t>
+            </a:r>
+            <a:endParaRPr lang="en-US" sz="850" dirty="0"/>
+          </a:p>
+        </p:txBody>
+      </p:sp>
+      <p:sp>
+        <p:nvSpPr>
+          <p:cNvPr id="25" name="Shape 23"/>
           <p:cNvSpPr/>
           <p:nvPr/>
         </p:nvSpPr>
@@ -20675,7 +20163,7 @@
       </p:sp>
       <p:sp>
         <p:nvSpPr>
-          <p:cNvPr id="23" name="Text 21"/>
+          <p:cNvPr id="26" name="Text 24"/>
           <p:cNvSpPr/>
           <p:nvPr/>
         </p:nvSpPr>
@@ -20714,7 +20202,7 @@
       </p:sp>
       <p:sp>
         <p:nvSpPr>
-          <p:cNvPr id="24" name="Shape 22"/>
+          <p:cNvPr id="27" name="Shape 25"/>
           <p:cNvSpPr/>
           <p:nvPr/>
         </p:nvSpPr>
@@ -20741,7 +20229,7 @@
       </p:sp>
       <p:sp>
         <p:nvSpPr>
-          <p:cNvPr id="25" name="Text 23"/>
+          <p:cNvPr id="28" name="Text 26"/>
           <p:cNvSpPr/>
           <p:nvPr/>
         </p:nvSpPr>
@@ -20780,7 +20268,7 @@
       </p:sp>
       <p:sp>
         <p:nvSpPr>
-          <p:cNvPr id="26" name="Shape 24"/>
+          <p:cNvPr id="29" name="Shape 27"/>
           <p:cNvSpPr/>
           <p:nvPr/>
         </p:nvSpPr>
@@ -20807,7 +20295,7 @@
       </p:sp>
       <p:sp>
         <p:nvSpPr>
-          <p:cNvPr id="27" name="Text 25"/>
+          <p:cNvPr id="30" name="Text 28"/>
           <p:cNvSpPr/>
           <p:nvPr/>
         </p:nvSpPr>
@@ -20846,7 +20334,7 @@
       </p:sp>
       <p:sp>
         <p:nvSpPr>
-          <p:cNvPr id="28" name="Shape 26"/>
+          <p:cNvPr id="31" name="Shape 29"/>
           <p:cNvSpPr/>
           <p:nvPr/>
         </p:nvSpPr>
@@ -20873,7 +20361,7 @@
       </p:sp>
       <p:sp>
         <p:nvSpPr>
-          <p:cNvPr id="29" name="Text 27"/>
+          <p:cNvPr id="32" name="Text 30"/>
           <p:cNvSpPr/>
           <p:nvPr/>
         </p:nvSpPr>
@@ -21196,7 +20684,7 @@
                 <a:ea typeface="Calibri" pitchFamily="34" charset="-122"/>
                 <a:cs typeface="Calibri" pitchFamily="34" charset="-120"/>
               </a:rPr>
-              <a:t>Word Labs  •  wordlabs.app  •  Prefix: 'semi-' = half, partly, or incomplete</a:t>
+              <a:t>Word Labs  •  wordlabs.app  •  Prefix: 'semi-' = half, partly, or almost</a:t>
             </a:r>
             <a:endParaRPr lang="en-US" sz="800" dirty="0"/>
           </a:p>
@@ -21335,7 +20823,7 @@
                 <a:ea typeface="Trebuchet MS" pitchFamily="34" charset="-122"/>
                 <a:cs typeface="Trebuchet MS" pitchFamily="34" charset="-120"/>
               </a:rPr>
-              <a:t>semifinal</a:t>
+              <a:t>semitrailer</a:t>
             </a:r>
             <a:endParaRPr lang="en-US" sz="2800" dirty="0"/>
           </a:p>
@@ -21415,7 +20903,7 @@
         </p:nvSpPr>
         <p:spPr>
           <a:xfrm>
-            <a:off x="2938272" y="2258568"/>
+            <a:off x="2221992" y="2258568"/>
             <a:ext cx="1828800" cy="292608"/>
           </a:xfrm>
           <a:prstGeom prst="rect">
@@ -21449,7 +20937,7 @@
         </p:nvSpPr>
         <p:spPr>
           <a:xfrm>
-            <a:off x="2938272" y="2258568"/>
+            <a:off x="2221992" y="2258568"/>
             <a:ext cx="1828800" cy="292608"/>
           </a:xfrm>
           <a:prstGeom prst="rect">
@@ -21488,7 +20976,7 @@
         </p:nvSpPr>
         <p:spPr>
           <a:xfrm>
-            <a:off x="2938272" y="2569464"/>
+            <a:off x="2221992" y="2569464"/>
             <a:ext cx="1828800" cy="201168"/>
           </a:xfrm>
           <a:prstGeom prst="rect">
@@ -21527,7 +21015,7 @@
         </p:nvSpPr>
         <p:spPr>
           <a:xfrm>
-            <a:off x="5803392" y="2258568"/>
+            <a:off x="4370832" y="2258568"/>
             <a:ext cx="1828800" cy="292608"/>
           </a:xfrm>
           <a:prstGeom prst="rect">
@@ -21561,7 +21049,7 @@
         </p:nvSpPr>
         <p:spPr>
           <a:xfrm>
-            <a:off x="5803392" y="2258568"/>
+            <a:off x="4370832" y="2258568"/>
             <a:ext cx="1828800" cy="292608"/>
           </a:xfrm>
           <a:prstGeom prst="rect">
@@ -21586,7 +21074,7 @@
                 <a:ea typeface="Trebuchet MS" pitchFamily="34" charset="-122"/>
                 <a:cs typeface="Trebuchet MS" pitchFamily="34" charset="-120"/>
               </a:rPr>
-              <a:t>final</a:t>
+              <a:t>trail</a:t>
             </a:r>
             <a:endParaRPr lang="en-US" sz="1300" dirty="0"/>
           </a:p>
@@ -21600,7 +21088,7 @@
         </p:nvSpPr>
         <p:spPr>
           <a:xfrm>
-            <a:off x="5803392" y="2569464"/>
+            <a:off x="4370832" y="2569464"/>
             <a:ext cx="1828800" cy="201168"/>
           </a:xfrm>
           <a:prstGeom prst="rect">
@@ -21625,7 +21113,7 @@
                 <a:ea typeface="Calibri" pitchFamily="34" charset="-122"/>
                 <a:cs typeface="Calibri" pitchFamily="34" charset="-120"/>
               </a:rPr>
-              <a:t>last or at the end</a:t>
+              <a:t>to be pulled along</a:t>
             </a:r>
             <a:endParaRPr lang="en-US" sz="850" dirty="0"/>
           </a:p>
@@ -21634,6 +21122,118 @@
       <p:sp>
         <p:nvSpPr>
           <p:cNvPr id="22" name="Shape 20"/>
+          <p:cNvSpPr/>
+          <p:nvPr/>
+        </p:nvSpPr>
+        <p:spPr>
+          <a:xfrm>
+            <a:off x="6519672" y="2258568"/>
+            <a:ext cx="1828800" cy="292608"/>
+          </a:xfrm>
+          <a:prstGeom prst="rect">
+            <a:avLst>
+              <a:gd name="adj" fmla="val 25000"/>
+            </a:avLst>
+          </a:prstGeom>
+          <a:solidFill>
+            <a:srgbClr val="FCE7F3"/>
+          </a:solidFill>
+          <a:ln w="19050">
+            <a:solidFill>
+              <a:srgbClr val="DB2777"/>
+            </a:solidFill>
+            <a:prstDash val="solid"/>
+          </a:ln>
+          <a:effectLst>
+            <a:outerShdw sx="100000" sy="100000" kx="0" ky="0" algn="bl" rotWithShape="0" blurRad="101600" dist="38100" dir="8100000">
+              <a:srgbClr val="000000">
+                <a:alpha val="12000"/>
+              </a:srgbClr>
+            </a:outerShdw>
+          </a:effectLst>
+        </p:spPr>
+      </p:sp>
+      <p:sp>
+        <p:nvSpPr>
+          <p:cNvPr id="23" name="Text 21"/>
+          <p:cNvSpPr/>
+          <p:nvPr/>
+        </p:nvSpPr>
+        <p:spPr>
+          <a:xfrm>
+            <a:off x="6519672" y="2258568"/>
+            <a:ext cx="1828800" cy="292608"/>
+          </a:xfrm>
+          <a:prstGeom prst="rect">
+            <a:avLst/>
+          </a:prstGeom>
+          <a:noFill/>
+          <a:ln/>
+        </p:spPr>
+        <p:txBody>
+          <a:bodyPr wrap="square" lIns="0" tIns="0" rIns="0" bIns="0" rtlCol="0" anchor="ctr"/>
+          <a:lstStyle/>
+          <a:p>
+            <a:pPr algn="ctr" indent="0" marL="0">
+              <a:buNone/>
+            </a:pPr>
+            <a:r>
+              <a:rPr lang="en-US" sz="1300" b="1" dirty="0">
+                <a:solidFill>
+                  <a:srgbClr val="9D174D"/>
+                </a:solidFill>
+                <a:latin typeface="Trebuchet MS" pitchFamily="34" charset="0"/>
+                <a:ea typeface="Trebuchet MS" pitchFamily="34" charset="-122"/>
+                <a:cs typeface="Trebuchet MS" pitchFamily="34" charset="-120"/>
+              </a:rPr>
+              <a:t>er</a:t>
+            </a:r>
+            <a:endParaRPr lang="en-US" sz="1300" dirty="0"/>
+          </a:p>
+        </p:txBody>
+      </p:sp>
+      <p:sp>
+        <p:nvSpPr>
+          <p:cNvPr id="24" name="Text 22"/>
+          <p:cNvSpPr/>
+          <p:nvPr/>
+        </p:nvSpPr>
+        <p:spPr>
+          <a:xfrm>
+            <a:off x="6519672" y="2569464"/>
+            <a:ext cx="1828800" cy="201168"/>
+          </a:xfrm>
+          <a:prstGeom prst="rect">
+            <a:avLst/>
+          </a:prstGeom>
+          <a:noFill/>
+          <a:ln/>
+        </p:spPr>
+        <p:txBody>
+          <a:bodyPr wrap="square" lIns="0" tIns="0" rIns="0" bIns="0" rtlCol="0" anchor="t"/>
+          <a:lstStyle/>
+          <a:p>
+            <a:pPr algn="ctr" indent="0" marL="0">
+              <a:buNone/>
+            </a:pPr>
+            <a:r>
+              <a:rPr lang="en-US" sz="850" dirty="0">
+                <a:solidFill>
+                  <a:srgbClr val="475569"/>
+                </a:solidFill>
+                <a:latin typeface="Calibri" pitchFamily="34" charset="0"/>
+                <a:ea typeface="Calibri" pitchFamily="34" charset="-122"/>
+                <a:cs typeface="Calibri" pitchFamily="34" charset="-120"/>
+              </a:rPr>
+              <a:t>one who or thing that</a:t>
+            </a:r>
+            <a:endParaRPr lang="en-US" sz="850" dirty="0"/>
+          </a:p>
+        </p:txBody>
+      </p:sp>
+      <p:sp>
+        <p:nvSpPr>
+          <p:cNvPr id="25" name="Shape 23"/>
           <p:cNvSpPr/>
           <p:nvPr/>
         </p:nvSpPr>
@@ -21660,7 +21260,7 @@
       </p:sp>
       <p:sp>
         <p:nvSpPr>
-          <p:cNvPr id="23" name="Text 21"/>
+          <p:cNvPr id="26" name="Text 24"/>
           <p:cNvSpPr/>
           <p:nvPr/>
         </p:nvSpPr>
@@ -21699,7 +21299,7 @@
       </p:sp>
       <p:sp>
         <p:nvSpPr>
-          <p:cNvPr id="24" name="Shape 22"/>
+          <p:cNvPr id="27" name="Shape 25"/>
           <p:cNvSpPr/>
           <p:nvPr/>
         </p:nvSpPr>
@@ -21726,7 +21326,7 @@
       </p:sp>
       <p:sp>
         <p:nvSpPr>
-          <p:cNvPr id="25" name="Shape 23"/>
+          <p:cNvPr id="28" name="Shape 26"/>
           <p:cNvSpPr/>
           <p:nvPr/>
         </p:nvSpPr>
@@ -21753,7 +21353,7 @@
       </p:sp>
       <p:sp>
         <p:nvSpPr>
-          <p:cNvPr id="26" name="Text 24"/>
+          <p:cNvPr id="29" name="Text 27"/>
           <p:cNvSpPr/>
           <p:nvPr/>
         </p:nvSpPr>
@@ -21792,7 +21392,7 @@
       </p:sp>
       <p:sp>
         <p:nvSpPr>
-          <p:cNvPr id="27" name="Text 25"/>
+          <p:cNvPr id="30" name="Text 28"/>
           <p:cNvSpPr/>
           <p:nvPr/>
         </p:nvSpPr>
@@ -21831,7 +21431,7 @@
       </p:sp>
       <p:sp>
         <p:nvSpPr>
-          <p:cNvPr id="28" name="Shape 26"/>
+          <p:cNvPr id="31" name="Shape 29"/>
           <p:cNvSpPr/>
           <p:nvPr/>
         </p:nvSpPr>
@@ -21858,7 +21458,7 @@
       </p:sp>
       <p:sp>
         <p:nvSpPr>
-          <p:cNvPr id="29" name="Text 27"/>
+          <p:cNvPr id="32" name="Text 30"/>
           <p:cNvSpPr/>
           <p:nvPr/>
         </p:nvSpPr>
@@ -21897,7 +21497,7 @@
       </p:sp>
       <p:sp>
         <p:nvSpPr>
-          <p:cNvPr id="30" name="Text 28"/>
+          <p:cNvPr id="33" name="Text 31"/>
           <p:cNvSpPr/>
           <p:nvPr/>
         </p:nvSpPr>
@@ -21936,7 +21536,7 @@
       </p:sp>
       <p:sp>
         <p:nvSpPr>
-          <p:cNvPr id="31" name="Shape 29"/>
+          <p:cNvPr id="34" name="Shape 32"/>
           <p:cNvSpPr/>
           <p:nvPr/>
         </p:nvSpPr>
@@ -21963,7 +21563,7 @@
       </p:sp>
       <p:sp>
         <p:nvSpPr>
-          <p:cNvPr id="32" name="Text 30"/>
+          <p:cNvPr id="35" name="Text 33"/>
           <p:cNvSpPr/>
           <p:nvPr/>
         </p:nvSpPr>
@@ -21994,7 +21594,7 @@
                 <a:ea typeface="Trebuchet MS" pitchFamily="34" charset="-122"/>
                 <a:cs typeface="Trebuchet MS" pitchFamily="34" charset="-120"/>
               </a:rPr>
-              <a:t>fi</a:t>
+              <a:t>trail</a:t>
             </a:r>
             <a:endParaRPr lang="en-US" sz="1400" dirty="0"/>
           </a:p>
@@ -22002,7 +21602,7 @@
       </p:sp>
       <p:sp>
         <p:nvSpPr>
-          <p:cNvPr id="33" name="Text 31"/>
+          <p:cNvPr id="36" name="Text 34"/>
           <p:cNvSpPr/>
           <p:nvPr/>
         </p:nvSpPr>
@@ -22041,7 +21641,7 @@
       </p:sp>
       <p:sp>
         <p:nvSpPr>
-          <p:cNvPr id="34" name="Shape 32"/>
+          <p:cNvPr id="37" name="Shape 35"/>
           <p:cNvSpPr/>
           <p:nvPr/>
         </p:nvSpPr>
@@ -22068,7 +21668,7 @@
       </p:sp>
       <p:sp>
         <p:nvSpPr>
-          <p:cNvPr id="35" name="Text 33"/>
+          <p:cNvPr id="38" name="Text 36"/>
           <p:cNvSpPr/>
           <p:nvPr/>
         </p:nvSpPr>
@@ -22099,7 +21699,7 @@
                 <a:ea typeface="Trebuchet MS" pitchFamily="34" charset="-122"/>
                 <a:cs typeface="Trebuchet MS" pitchFamily="34" charset="-120"/>
               </a:rPr>
-              <a:t>nal</a:t>
+              <a:t>er</a:t>
             </a:r>
             <a:endParaRPr lang="en-US" sz="1400" dirty="0"/>
           </a:p>
@@ -22107,7 +21707,7 @@
       </p:sp>
       <p:sp>
         <p:nvSpPr>
-          <p:cNvPr id="36" name="Shape 34"/>
+          <p:cNvPr id="39" name="Shape 37"/>
           <p:cNvSpPr/>
           <p:nvPr/>
         </p:nvSpPr>
@@ -22134,7 +21734,7 @@
       </p:sp>
       <p:sp>
         <p:nvSpPr>
-          <p:cNvPr id="37" name="Text 35"/>
+          <p:cNvPr id="40" name="Text 38"/>
           <p:cNvSpPr/>
           <p:nvPr/>
         </p:nvSpPr>
@@ -22173,7 +21773,7 @@
       </p:sp>
       <p:sp>
         <p:nvSpPr>
-          <p:cNvPr id="38" name="Shape 36"/>
+          <p:cNvPr id="41" name="Shape 39"/>
           <p:cNvSpPr/>
           <p:nvPr/>
         </p:nvSpPr>
@@ -22200,7 +21800,7 @@
       </p:sp>
       <p:sp>
         <p:nvSpPr>
-          <p:cNvPr id="39" name="Text 37"/>
+          <p:cNvPr id="42" name="Text 40"/>
           <p:cNvSpPr/>
           <p:nvPr/>
         </p:nvSpPr>
@@ -22523,7 +22123,7 @@
                 <a:ea typeface="Calibri" pitchFamily="34" charset="-122"/>
                 <a:cs typeface="Calibri" pitchFamily="34" charset="-120"/>
               </a:rPr>
-              <a:t>Word Labs  •  wordlabs.app  •  Prefix: 'semi-' = half, partly, or incomplete</a:t>
+              <a:t>Word Labs  •  wordlabs.app  •  Prefix: 'semi-' = half, partly, or almost</a:t>
             </a:r>
             <a:endParaRPr lang="en-US" sz="800" dirty="0"/>
           </a:p>
@@ -22662,7 +22262,7 @@
                 <a:ea typeface="Trebuchet MS" pitchFamily="34" charset="-122"/>
                 <a:cs typeface="Trebuchet MS" pitchFamily="34" charset="-120"/>
               </a:rPr>
-              <a:t>semifinal</a:t>
+              <a:t>semitrailer</a:t>
             </a:r>
             <a:endParaRPr lang="en-US" sz="2800" dirty="0"/>
           </a:p>
@@ -22742,7 +22342,7 @@
         </p:nvSpPr>
         <p:spPr>
           <a:xfrm>
-            <a:off x="2938272" y="2258568"/>
+            <a:off x="2221992" y="2258568"/>
             <a:ext cx="1828800" cy="292608"/>
           </a:xfrm>
           <a:prstGeom prst="rect">
@@ -22776,7 +22376,7 @@
         </p:nvSpPr>
         <p:spPr>
           <a:xfrm>
-            <a:off x="2938272" y="2258568"/>
+            <a:off x="2221992" y="2258568"/>
             <a:ext cx="1828800" cy="292608"/>
           </a:xfrm>
           <a:prstGeom prst="rect">
@@ -22815,7 +22415,7 @@
         </p:nvSpPr>
         <p:spPr>
           <a:xfrm>
-            <a:off x="2938272" y="2569464"/>
+            <a:off x="2221992" y="2569464"/>
             <a:ext cx="1828800" cy="201168"/>
           </a:xfrm>
           <a:prstGeom prst="rect">
@@ -22854,7 +22454,7 @@
         </p:nvSpPr>
         <p:spPr>
           <a:xfrm>
-            <a:off x="5803392" y="2258568"/>
+            <a:off x="4370832" y="2258568"/>
             <a:ext cx="1828800" cy="292608"/>
           </a:xfrm>
           <a:prstGeom prst="rect">
@@ -22888,7 +22488,7 @@
         </p:nvSpPr>
         <p:spPr>
           <a:xfrm>
-            <a:off x="5803392" y="2258568"/>
+            <a:off x="4370832" y="2258568"/>
             <a:ext cx="1828800" cy="292608"/>
           </a:xfrm>
           <a:prstGeom prst="rect">
@@ -22913,7 +22513,7 @@
                 <a:ea typeface="Trebuchet MS" pitchFamily="34" charset="-122"/>
                 <a:cs typeface="Trebuchet MS" pitchFamily="34" charset="-120"/>
               </a:rPr>
-              <a:t>final</a:t>
+              <a:t>trail</a:t>
             </a:r>
             <a:endParaRPr lang="en-US" sz="1300" dirty="0"/>
           </a:p>
@@ -22927,7 +22527,7 @@
         </p:nvSpPr>
         <p:spPr>
           <a:xfrm>
-            <a:off x="5803392" y="2569464"/>
+            <a:off x="4370832" y="2569464"/>
             <a:ext cx="1828800" cy="201168"/>
           </a:xfrm>
           <a:prstGeom prst="rect">
@@ -22952,7 +22552,7 @@
                 <a:ea typeface="Calibri" pitchFamily="34" charset="-122"/>
                 <a:cs typeface="Calibri" pitchFamily="34" charset="-120"/>
               </a:rPr>
-              <a:t>last or at the end</a:t>
+              <a:t>to be pulled along</a:t>
             </a:r>
             <a:endParaRPr lang="en-US" sz="850" dirty="0"/>
           </a:p>
@@ -22961,6 +22561,118 @@
       <p:sp>
         <p:nvSpPr>
           <p:cNvPr id="22" name="Shape 20"/>
+          <p:cNvSpPr/>
+          <p:nvPr/>
+        </p:nvSpPr>
+        <p:spPr>
+          <a:xfrm>
+            <a:off x="6519672" y="2258568"/>
+            <a:ext cx="1828800" cy="292608"/>
+          </a:xfrm>
+          <a:prstGeom prst="rect">
+            <a:avLst>
+              <a:gd name="adj" fmla="val 25000"/>
+            </a:avLst>
+          </a:prstGeom>
+          <a:solidFill>
+            <a:srgbClr val="FCE7F3"/>
+          </a:solidFill>
+          <a:ln w="19050">
+            <a:solidFill>
+              <a:srgbClr val="DB2777"/>
+            </a:solidFill>
+            <a:prstDash val="solid"/>
+          </a:ln>
+          <a:effectLst>
+            <a:outerShdw sx="100000" sy="100000" kx="0" ky="0" algn="bl" rotWithShape="0" blurRad="101600" dist="38100" dir="8100000">
+              <a:srgbClr val="000000">
+                <a:alpha val="12000"/>
+              </a:srgbClr>
+            </a:outerShdw>
+          </a:effectLst>
+        </p:spPr>
+      </p:sp>
+      <p:sp>
+        <p:nvSpPr>
+          <p:cNvPr id="23" name="Text 21"/>
+          <p:cNvSpPr/>
+          <p:nvPr/>
+        </p:nvSpPr>
+        <p:spPr>
+          <a:xfrm>
+            <a:off x="6519672" y="2258568"/>
+            <a:ext cx="1828800" cy="292608"/>
+          </a:xfrm>
+          <a:prstGeom prst="rect">
+            <a:avLst/>
+          </a:prstGeom>
+          <a:noFill/>
+          <a:ln/>
+        </p:spPr>
+        <p:txBody>
+          <a:bodyPr wrap="square" lIns="0" tIns="0" rIns="0" bIns="0" rtlCol="0" anchor="ctr"/>
+          <a:lstStyle/>
+          <a:p>
+            <a:pPr algn="ctr" indent="0" marL="0">
+              <a:buNone/>
+            </a:pPr>
+            <a:r>
+              <a:rPr lang="en-US" sz="1300" b="1" dirty="0">
+                <a:solidFill>
+                  <a:srgbClr val="9D174D"/>
+                </a:solidFill>
+                <a:latin typeface="Trebuchet MS" pitchFamily="34" charset="0"/>
+                <a:ea typeface="Trebuchet MS" pitchFamily="34" charset="-122"/>
+                <a:cs typeface="Trebuchet MS" pitchFamily="34" charset="-120"/>
+              </a:rPr>
+              <a:t>er</a:t>
+            </a:r>
+            <a:endParaRPr lang="en-US" sz="1300" dirty="0"/>
+          </a:p>
+        </p:txBody>
+      </p:sp>
+      <p:sp>
+        <p:nvSpPr>
+          <p:cNvPr id="24" name="Text 22"/>
+          <p:cNvSpPr/>
+          <p:nvPr/>
+        </p:nvSpPr>
+        <p:spPr>
+          <a:xfrm>
+            <a:off x="6519672" y="2569464"/>
+            <a:ext cx="1828800" cy="201168"/>
+          </a:xfrm>
+          <a:prstGeom prst="rect">
+            <a:avLst/>
+          </a:prstGeom>
+          <a:noFill/>
+          <a:ln/>
+        </p:spPr>
+        <p:txBody>
+          <a:bodyPr wrap="square" lIns="0" tIns="0" rIns="0" bIns="0" rtlCol="0" anchor="t"/>
+          <a:lstStyle/>
+          <a:p>
+            <a:pPr algn="ctr" indent="0" marL="0">
+              <a:buNone/>
+            </a:pPr>
+            <a:r>
+              <a:rPr lang="en-US" sz="850" dirty="0">
+                <a:solidFill>
+                  <a:srgbClr val="475569"/>
+                </a:solidFill>
+                <a:latin typeface="Calibri" pitchFamily="34" charset="0"/>
+                <a:ea typeface="Calibri" pitchFamily="34" charset="-122"/>
+                <a:cs typeface="Calibri" pitchFamily="34" charset="-120"/>
+              </a:rPr>
+              <a:t>one who or thing that</a:t>
+            </a:r>
+            <a:endParaRPr lang="en-US" sz="850" dirty="0"/>
+          </a:p>
+        </p:txBody>
+      </p:sp>
+      <p:sp>
+        <p:nvSpPr>
+          <p:cNvPr id="25" name="Shape 23"/>
           <p:cNvSpPr/>
           <p:nvPr/>
         </p:nvSpPr>
@@ -22987,7 +22699,7 @@
       </p:sp>
       <p:sp>
         <p:nvSpPr>
-          <p:cNvPr id="23" name="Text 21"/>
+          <p:cNvPr id="26" name="Text 24"/>
           <p:cNvSpPr/>
           <p:nvPr/>
         </p:nvSpPr>
@@ -23026,7 +22738,7 @@
       </p:sp>
       <p:sp>
         <p:nvSpPr>
-          <p:cNvPr id="24" name="Shape 22"/>
+          <p:cNvPr id="27" name="Shape 25"/>
           <p:cNvSpPr/>
           <p:nvPr/>
         </p:nvSpPr>
@@ -23053,7 +22765,7 @@
       </p:sp>
       <p:sp>
         <p:nvSpPr>
-          <p:cNvPr id="25" name="Shape 23"/>
+          <p:cNvPr id="28" name="Shape 26"/>
           <p:cNvSpPr/>
           <p:nvPr/>
         </p:nvSpPr>
@@ -23080,7 +22792,7 @@
       </p:sp>
       <p:sp>
         <p:nvSpPr>
-          <p:cNvPr id="26" name="Text 24"/>
+          <p:cNvPr id="29" name="Text 27"/>
           <p:cNvSpPr/>
           <p:nvPr/>
         </p:nvSpPr>
@@ -23119,7 +22831,7 @@
       </p:sp>
       <p:sp>
         <p:nvSpPr>
-          <p:cNvPr id="27" name="Text 25"/>
+          <p:cNvPr id="30" name="Text 28"/>
           <p:cNvSpPr/>
           <p:nvPr/>
         </p:nvSpPr>
@@ -23158,7 +22870,7 @@
       </p:sp>
       <p:sp>
         <p:nvSpPr>
-          <p:cNvPr id="28" name="Shape 26"/>
+          <p:cNvPr id="31" name="Shape 29"/>
           <p:cNvSpPr/>
           <p:nvPr/>
         </p:nvSpPr>
@@ -23185,7 +22897,7 @@
       </p:sp>
       <p:sp>
         <p:nvSpPr>
-          <p:cNvPr id="29" name="Text 27"/>
+          <p:cNvPr id="32" name="Text 30"/>
           <p:cNvSpPr/>
           <p:nvPr/>
         </p:nvSpPr>
@@ -23224,7 +22936,7 @@
       </p:sp>
       <p:sp>
         <p:nvSpPr>
-          <p:cNvPr id="30" name="Text 28"/>
+          <p:cNvPr id="33" name="Text 31"/>
           <p:cNvSpPr/>
           <p:nvPr/>
         </p:nvSpPr>
@@ -23263,7 +22975,7 @@
       </p:sp>
       <p:sp>
         <p:nvSpPr>
-          <p:cNvPr id="31" name="Shape 29"/>
+          <p:cNvPr id="34" name="Shape 32"/>
           <p:cNvSpPr/>
           <p:nvPr/>
         </p:nvSpPr>
@@ -23290,7 +23002,7 @@
       </p:sp>
       <p:sp>
         <p:nvSpPr>
-          <p:cNvPr id="32" name="Text 30"/>
+          <p:cNvPr id="35" name="Text 33"/>
           <p:cNvSpPr/>
           <p:nvPr/>
         </p:nvSpPr>
@@ -23321,7 +23033,7 @@
                 <a:ea typeface="Trebuchet MS" pitchFamily="34" charset="-122"/>
                 <a:cs typeface="Trebuchet MS" pitchFamily="34" charset="-120"/>
               </a:rPr>
-              <a:t>fi</a:t>
+              <a:t>trail</a:t>
             </a:r>
             <a:endParaRPr lang="en-US" sz="1400" dirty="0"/>
           </a:p>
@@ -23329,7 +23041,7 @@
       </p:sp>
       <p:sp>
         <p:nvSpPr>
-          <p:cNvPr id="33" name="Text 31"/>
+          <p:cNvPr id="36" name="Text 34"/>
           <p:cNvSpPr/>
           <p:nvPr/>
         </p:nvSpPr>
@@ -23368,7 +23080,7 @@
       </p:sp>
       <p:sp>
         <p:nvSpPr>
-          <p:cNvPr id="34" name="Shape 32"/>
+          <p:cNvPr id="37" name="Shape 35"/>
           <p:cNvSpPr/>
           <p:nvPr/>
         </p:nvSpPr>
@@ -23395,7 +23107,7 @@
       </p:sp>
       <p:sp>
         <p:nvSpPr>
-          <p:cNvPr id="35" name="Text 33"/>
+          <p:cNvPr id="38" name="Text 36"/>
           <p:cNvSpPr/>
           <p:nvPr/>
         </p:nvSpPr>
@@ -23426,7 +23138,7 @@
                 <a:ea typeface="Trebuchet MS" pitchFamily="34" charset="-122"/>
                 <a:cs typeface="Trebuchet MS" pitchFamily="34" charset="-120"/>
               </a:rPr>
-              <a:t>nal</a:t>
+              <a:t>er</a:t>
             </a:r>
             <a:endParaRPr lang="en-US" sz="1400" dirty="0"/>
           </a:p>
@@ -23434,7 +23146,7 @@
       </p:sp>
       <p:sp>
         <p:nvSpPr>
-          <p:cNvPr id="36" name="Shape 34"/>
+          <p:cNvPr id="39" name="Shape 37"/>
           <p:cNvSpPr/>
           <p:nvPr/>
         </p:nvSpPr>
@@ -23461,7 +23173,7 @@
       </p:sp>
       <p:sp>
         <p:nvSpPr>
-          <p:cNvPr id="37" name="Text 35"/>
+          <p:cNvPr id="40" name="Text 38"/>
           <p:cNvSpPr/>
           <p:nvPr/>
         </p:nvSpPr>
@@ -23500,7 +23212,7 @@
       </p:sp>
       <p:sp>
         <p:nvSpPr>
-          <p:cNvPr id="38" name="Shape 36"/>
+          <p:cNvPr id="41" name="Shape 39"/>
           <p:cNvSpPr/>
           <p:nvPr/>
         </p:nvSpPr>
@@ -23527,14 +23239,14 @@
       </p:sp>
       <p:sp>
         <p:nvSpPr>
-          <p:cNvPr id="39" name="Shape 37"/>
-          <p:cNvSpPr/>
-          <p:nvPr/>
-        </p:nvSpPr>
-        <p:spPr>
-          <a:xfrm>
-            <a:off x="2023872" y="4169664"/>
-            <a:ext cx="685800" cy="475488"/>
+          <p:cNvPr id="42" name="Shape 40"/>
+          <p:cNvSpPr/>
+          <p:nvPr/>
+        </p:nvSpPr>
+        <p:spPr>
+          <a:xfrm>
+            <a:off x="1951330" y="4169664"/>
+            <a:ext cx="676656" cy="475488"/>
           </a:xfrm>
           <a:prstGeom prst="rect">
             <a:avLst>
@@ -23554,14 +23266,14 @@
       </p:sp>
       <p:sp>
         <p:nvSpPr>
-          <p:cNvPr id="40" name="Text 38"/>
-          <p:cNvSpPr/>
-          <p:nvPr/>
-        </p:nvSpPr>
-        <p:spPr>
-          <a:xfrm>
-            <a:off x="2023872" y="4169664"/>
-            <a:ext cx="685800" cy="475488"/>
+          <p:cNvPr id="43" name="Text 41"/>
+          <p:cNvSpPr/>
+          <p:nvPr/>
+        </p:nvSpPr>
+        <p:spPr>
+          <a:xfrm>
+            <a:off x="1951330" y="4169664"/>
+            <a:ext cx="676656" cy="475488"/>
           </a:xfrm>
           <a:prstGeom prst="rect">
             <a:avLst/>
@@ -23593,14 +23305,14 @@
       </p:sp>
       <p:sp>
         <p:nvSpPr>
-          <p:cNvPr id="41" name="Shape 39"/>
-          <p:cNvSpPr/>
-          <p:nvPr/>
-        </p:nvSpPr>
-        <p:spPr>
-          <a:xfrm>
-            <a:off x="2831592" y="4169664"/>
-            <a:ext cx="685800" cy="475488"/>
+          <p:cNvPr id="44" name="Shape 42"/>
+          <p:cNvSpPr/>
+          <p:nvPr/>
+        </p:nvSpPr>
+        <p:spPr>
+          <a:xfrm>
+            <a:off x="2677363" y="4169664"/>
+            <a:ext cx="676656" cy="475488"/>
           </a:xfrm>
           <a:prstGeom prst="rect">
             <a:avLst>
@@ -23620,14 +23332,14 @@
       </p:sp>
       <p:sp>
         <p:nvSpPr>
-          <p:cNvPr id="42" name="Text 40"/>
-          <p:cNvSpPr/>
-          <p:nvPr/>
-        </p:nvSpPr>
-        <p:spPr>
-          <a:xfrm>
-            <a:off x="2831592" y="4169664"/>
-            <a:ext cx="685800" cy="475488"/>
+          <p:cNvPr id="45" name="Text 43"/>
+          <p:cNvSpPr/>
+          <p:nvPr/>
+        </p:nvSpPr>
+        <p:spPr>
+          <a:xfrm>
+            <a:off x="2677363" y="4169664"/>
+            <a:ext cx="676656" cy="475488"/>
           </a:xfrm>
           <a:prstGeom prst="rect">
             <a:avLst/>
@@ -23659,14 +23371,14 @@
       </p:sp>
       <p:sp>
         <p:nvSpPr>
-          <p:cNvPr id="43" name="Shape 41"/>
-          <p:cNvSpPr/>
-          <p:nvPr/>
-        </p:nvSpPr>
-        <p:spPr>
-          <a:xfrm>
-            <a:off x="3639312" y="4169664"/>
-            <a:ext cx="685800" cy="475488"/>
+          <p:cNvPr id="46" name="Shape 44"/>
+          <p:cNvSpPr/>
+          <p:nvPr/>
+        </p:nvSpPr>
+        <p:spPr>
+          <a:xfrm>
+            <a:off x="3403397" y="4169664"/>
+            <a:ext cx="676656" cy="475488"/>
           </a:xfrm>
           <a:prstGeom prst="rect">
             <a:avLst>
@@ -23686,14 +23398,14 @@
       </p:sp>
       <p:sp>
         <p:nvSpPr>
-          <p:cNvPr id="44" name="Text 42"/>
-          <p:cNvSpPr/>
-          <p:nvPr/>
-        </p:nvSpPr>
-        <p:spPr>
-          <a:xfrm>
-            <a:off x="3639312" y="4169664"/>
-            <a:ext cx="685800" cy="475488"/>
+          <p:cNvPr id="47" name="Text 45"/>
+          <p:cNvSpPr/>
+          <p:nvPr/>
+        </p:nvSpPr>
+        <p:spPr>
+          <a:xfrm>
+            <a:off x="3403397" y="4169664"/>
+            <a:ext cx="676656" cy="475488"/>
           </a:xfrm>
           <a:prstGeom prst="rect">
             <a:avLst/>
@@ -23725,14 +23437,14 @@
       </p:sp>
       <p:sp>
         <p:nvSpPr>
-          <p:cNvPr id="45" name="Shape 43"/>
-          <p:cNvSpPr/>
-          <p:nvPr/>
-        </p:nvSpPr>
-        <p:spPr>
-          <a:xfrm>
-            <a:off x="4447032" y="4169664"/>
-            <a:ext cx="685800" cy="475488"/>
+          <p:cNvPr id="48" name="Shape 46"/>
+          <p:cNvSpPr/>
+          <p:nvPr/>
+        </p:nvSpPr>
+        <p:spPr>
+          <a:xfrm>
+            <a:off x="4129430" y="4169664"/>
+            <a:ext cx="676656" cy="475488"/>
           </a:xfrm>
           <a:prstGeom prst="rect">
             <a:avLst>
@@ -23752,14 +23464,14 @@
       </p:sp>
       <p:sp>
         <p:nvSpPr>
-          <p:cNvPr id="46" name="Text 44"/>
-          <p:cNvSpPr/>
-          <p:nvPr/>
-        </p:nvSpPr>
-        <p:spPr>
-          <a:xfrm>
-            <a:off x="4447032" y="4169664"/>
-            <a:ext cx="685800" cy="475488"/>
+          <p:cNvPr id="49" name="Text 47"/>
+          <p:cNvSpPr/>
+          <p:nvPr/>
+        </p:nvSpPr>
+        <p:spPr>
+          <a:xfrm>
+            <a:off x="4129430" y="4169664"/>
+            <a:ext cx="676656" cy="475488"/>
           </a:xfrm>
           <a:prstGeom prst="rect">
             <a:avLst/>
@@ -23791,14 +23503,14 @@
       </p:sp>
       <p:sp>
         <p:nvSpPr>
-          <p:cNvPr id="47" name="Shape 45"/>
-          <p:cNvSpPr/>
-          <p:nvPr/>
-        </p:nvSpPr>
-        <p:spPr>
-          <a:xfrm>
-            <a:off x="5254752" y="4169664"/>
-            <a:ext cx="685800" cy="475488"/>
+          <p:cNvPr id="50" name="Shape 48"/>
+          <p:cNvSpPr/>
+          <p:nvPr/>
+        </p:nvSpPr>
+        <p:spPr>
+          <a:xfrm>
+            <a:off x="4855464" y="4169664"/>
+            <a:ext cx="676656" cy="475488"/>
           </a:xfrm>
           <a:prstGeom prst="rect">
             <a:avLst>
@@ -23818,14 +23530,14 @@
       </p:sp>
       <p:sp>
         <p:nvSpPr>
-          <p:cNvPr id="48" name="Text 46"/>
-          <p:cNvSpPr/>
-          <p:nvPr/>
-        </p:nvSpPr>
-        <p:spPr>
-          <a:xfrm>
-            <a:off x="5254752" y="4169664"/>
-            <a:ext cx="685800" cy="475488"/>
+          <p:cNvPr id="51" name="Text 49"/>
+          <p:cNvSpPr/>
+          <p:nvPr/>
+        </p:nvSpPr>
+        <p:spPr>
+          <a:xfrm>
+            <a:off x="4855464" y="4169664"/>
+            <a:ext cx="676656" cy="475488"/>
           </a:xfrm>
           <a:prstGeom prst="rect">
             <a:avLst/>
@@ -23849,7 +23561,7 @@
                 <a:ea typeface="Trebuchet MS" pitchFamily="34" charset="-122"/>
                 <a:cs typeface="Trebuchet MS" pitchFamily="34" charset="-120"/>
               </a:rPr>
-              <a:t>f</a:t>
+              <a:t>t</a:t>
             </a:r>
             <a:endParaRPr lang="en-US" sz="900" dirty="0"/>
           </a:p>
@@ -23857,14 +23569,14 @@
       </p:sp>
       <p:sp>
         <p:nvSpPr>
-          <p:cNvPr id="49" name="Shape 47"/>
-          <p:cNvSpPr/>
-          <p:nvPr/>
-        </p:nvSpPr>
-        <p:spPr>
-          <a:xfrm>
-            <a:off x="6062472" y="4169664"/>
-            <a:ext cx="685800" cy="475488"/>
+          <p:cNvPr id="52" name="Shape 50"/>
+          <p:cNvSpPr/>
+          <p:nvPr/>
+        </p:nvSpPr>
+        <p:spPr>
+          <a:xfrm>
+            <a:off x="5581498" y="4169664"/>
+            <a:ext cx="676656" cy="475488"/>
           </a:xfrm>
           <a:prstGeom prst="rect">
             <a:avLst>
@@ -23884,14 +23596,14 @@
       </p:sp>
       <p:sp>
         <p:nvSpPr>
-          <p:cNvPr id="50" name="Text 48"/>
-          <p:cNvSpPr/>
-          <p:nvPr/>
-        </p:nvSpPr>
-        <p:spPr>
-          <a:xfrm>
-            <a:off x="6062472" y="4169664"/>
-            <a:ext cx="685800" cy="475488"/>
+          <p:cNvPr id="53" name="Text 51"/>
+          <p:cNvSpPr/>
+          <p:nvPr/>
+        </p:nvSpPr>
+        <p:spPr>
+          <a:xfrm>
+            <a:off x="5581498" y="4169664"/>
+            <a:ext cx="676656" cy="475488"/>
           </a:xfrm>
           <a:prstGeom prst="rect">
             <a:avLst/>
@@ -23915,7 +23627,7 @@
                 <a:ea typeface="Trebuchet MS" pitchFamily="34" charset="-122"/>
                 <a:cs typeface="Trebuchet MS" pitchFamily="34" charset="-120"/>
               </a:rPr>
-              <a:t>i</a:t>
+              <a:t>r</a:t>
             </a:r>
             <a:endParaRPr lang="en-US" sz="900" dirty="0"/>
           </a:p>
@@ -23923,14 +23635,14 @@
       </p:sp>
       <p:sp>
         <p:nvSpPr>
-          <p:cNvPr id="51" name="Shape 49"/>
-          <p:cNvSpPr/>
-          <p:nvPr/>
-        </p:nvSpPr>
-        <p:spPr>
-          <a:xfrm>
-            <a:off x="6870192" y="4169664"/>
-            <a:ext cx="685800" cy="475488"/>
+          <p:cNvPr id="54" name="Shape 52"/>
+          <p:cNvSpPr/>
+          <p:nvPr/>
+        </p:nvSpPr>
+        <p:spPr>
+          <a:xfrm>
+            <a:off x="6307531" y="4169664"/>
+            <a:ext cx="676656" cy="475488"/>
           </a:xfrm>
           <a:prstGeom prst="rect">
             <a:avLst>
@@ -23950,14 +23662,14 @@
       </p:sp>
       <p:sp>
         <p:nvSpPr>
-          <p:cNvPr id="52" name="Text 50"/>
-          <p:cNvSpPr/>
-          <p:nvPr/>
-        </p:nvSpPr>
-        <p:spPr>
-          <a:xfrm>
-            <a:off x="6870192" y="4169664"/>
-            <a:ext cx="685800" cy="475488"/>
+          <p:cNvPr id="55" name="Text 53"/>
+          <p:cNvSpPr/>
+          <p:nvPr/>
+        </p:nvSpPr>
+        <p:spPr>
+          <a:xfrm>
+            <a:off x="6307531" y="4169664"/>
+            <a:ext cx="676656" cy="475488"/>
           </a:xfrm>
           <a:prstGeom prst="rect">
             <a:avLst/>
@@ -23981,7 +23693,7 @@
                 <a:ea typeface="Trebuchet MS" pitchFamily="34" charset="-122"/>
                 <a:cs typeface="Trebuchet MS" pitchFamily="34" charset="-120"/>
               </a:rPr>
-              <a:t>n</a:t>
+              <a:t>ai</a:t>
             </a:r>
             <a:endParaRPr lang="en-US" sz="900" dirty="0"/>
           </a:p>
@@ -23989,14 +23701,14 @@
       </p:sp>
       <p:sp>
         <p:nvSpPr>
-          <p:cNvPr id="53" name="Shape 51"/>
-          <p:cNvSpPr/>
-          <p:nvPr/>
-        </p:nvSpPr>
-        <p:spPr>
-          <a:xfrm>
-            <a:off x="7677912" y="4169664"/>
-            <a:ext cx="685800" cy="475488"/>
+          <p:cNvPr id="56" name="Shape 54"/>
+          <p:cNvSpPr/>
+          <p:nvPr/>
+        </p:nvSpPr>
+        <p:spPr>
+          <a:xfrm>
+            <a:off x="7033565" y="4169664"/>
+            <a:ext cx="676656" cy="475488"/>
           </a:xfrm>
           <a:prstGeom prst="rect">
             <a:avLst>
@@ -24016,14 +23728,14 @@
       </p:sp>
       <p:sp>
         <p:nvSpPr>
-          <p:cNvPr id="54" name="Text 52"/>
-          <p:cNvSpPr/>
-          <p:nvPr/>
-        </p:nvSpPr>
-        <p:spPr>
-          <a:xfrm>
-            <a:off x="7677912" y="4169664"/>
-            <a:ext cx="685800" cy="475488"/>
+          <p:cNvPr id="57" name="Text 55"/>
+          <p:cNvSpPr/>
+          <p:nvPr/>
+        </p:nvSpPr>
+        <p:spPr>
+          <a:xfrm>
+            <a:off x="7033565" y="4169664"/>
+            <a:ext cx="676656" cy="475488"/>
           </a:xfrm>
           <a:prstGeom prst="rect">
             <a:avLst/>
@@ -24047,7 +23759,73 @@
                 <a:ea typeface="Trebuchet MS" pitchFamily="34" charset="-122"/>
                 <a:cs typeface="Trebuchet MS" pitchFamily="34" charset="-120"/>
               </a:rPr>
-              <a:t>al</a:t>
+              <a:t>l</a:t>
+            </a:r>
+            <a:endParaRPr lang="en-US" sz="900" dirty="0"/>
+          </a:p>
+        </p:txBody>
+      </p:sp>
+      <p:sp>
+        <p:nvSpPr>
+          <p:cNvPr id="58" name="Shape 56"/>
+          <p:cNvSpPr/>
+          <p:nvPr/>
+        </p:nvSpPr>
+        <p:spPr>
+          <a:xfrm>
+            <a:off x="7759598" y="4169664"/>
+            <a:ext cx="676656" cy="475488"/>
+          </a:xfrm>
+          <a:prstGeom prst="rect">
+            <a:avLst>
+              <a:gd name="adj" fmla="val 7692"/>
+            </a:avLst>
+          </a:prstGeom>
+          <a:solidFill>
+            <a:srgbClr val="FFFFFF"/>
+          </a:solidFill>
+          <a:ln w="12700">
+            <a:solidFill>
+              <a:srgbClr val="DB2777"/>
+            </a:solidFill>
+            <a:prstDash val="solid"/>
+          </a:ln>
+        </p:spPr>
+      </p:sp>
+      <p:sp>
+        <p:nvSpPr>
+          <p:cNvPr id="59" name="Text 57"/>
+          <p:cNvSpPr/>
+          <p:nvPr/>
+        </p:nvSpPr>
+        <p:spPr>
+          <a:xfrm>
+            <a:off x="7759598" y="4169664"/>
+            <a:ext cx="676656" cy="475488"/>
+          </a:xfrm>
+          <a:prstGeom prst="rect">
+            <a:avLst/>
+          </a:prstGeom>
+          <a:noFill/>
+          <a:ln/>
+        </p:spPr>
+        <p:txBody>
+          <a:bodyPr wrap="square" lIns="0" tIns="0" rIns="0" bIns="0" rtlCol="0" anchor="ctr"/>
+          <a:lstStyle/>
+          <a:p>
+            <a:pPr algn="ctr" indent="0" marL="0">
+              <a:buNone/>
+            </a:pPr>
+            <a:r>
+              <a:rPr lang="en-US" sz="900" b="1" dirty="0">
+                <a:solidFill>
+                  <a:srgbClr val="9D174D"/>
+                </a:solidFill>
+                <a:latin typeface="Trebuchet MS" pitchFamily="34" charset="0"/>
+                <a:ea typeface="Trebuchet MS" pitchFamily="34" charset="-122"/>
+                <a:cs typeface="Trebuchet MS" pitchFamily="34" charset="-120"/>
+              </a:rPr>
+              <a:t>er</a:t>
             </a:r>
             <a:endParaRPr lang="en-US" sz="900" dirty="0"/>
           </a:p>
@@ -24339,7 +24117,7 @@
                 <a:ea typeface="Calibri" pitchFamily="34" charset="-122"/>
                 <a:cs typeface="Calibri" pitchFamily="34" charset="-120"/>
               </a:rPr>
-              <a:t>Word Labs  •  wordlabs.app  •  Prefix: 'semi-' = half, partly, or incomplete</a:t>
+              <a:t>Word Labs  •  wordlabs.app  •  Prefix: 'semi-' = half, partly, or almost</a:t>
             </a:r>
             <a:endParaRPr lang="en-US" sz="800" dirty="0"/>
           </a:p>
@@ -24478,7 +24256,7 @@
                 <a:ea typeface="Trebuchet MS" pitchFamily="34" charset="-122"/>
                 <a:cs typeface="Trebuchet MS" pitchFamily="34" charset="-120"/>
               </a:rPr>
-              <a:t>semicircle</a:t>
+              <a:t>semidetached</a:t>
             </a:r>
             <a:endParaRPr lang="en-US" sz="2800" dirty="0"/>
           </a:p>
@@ -25166,7 +24944,7 @@
                 <a:ea typeface="Calibri" pitchFamily="34" charset="-122"/>
                 <a:cs typeface="Calibri" pitchFamily="34" charset="-120"/>
               </a:rPr>
-              <a:t>Word Labs  •  wordlabs.app  •  Prefix: 'semi-' = half, partly, or incomplete</a:t>
+              <a:t>Word Labs  •  wordlabs.app  •  Prefix: 'semi-' = half, partly, or almost</a:t>
             </a:r>
             <a:endParaRPr lang="en-US" sz="800" dirty="0"/>
           </a:p>
@@ -25305,7 +25083,7 @@
                 <a:ea typeface="Trebuchet MS" pitchFamily="34" charset="-122"/>
                 <a:cs typeface="Trebuchet MS" pitchFamily="34" charset="-120"/>
               </a:rPr>
-              <a:t>semicircle</a:t>
+              <a:t>semidetached</a:t>
             </a:r>
             <a:endParaRPr lang="en-US" sz="2800" dirty="0"/>
           </a:p>
@@ -25385,7 +25163,7 @@
         </p:nvSpPr>
         <p:spPr>
           <a:xfrm>
-            <a:off x="2938272" y="2258568"/>
+            <a:off x="2221992" y="2258568"/>
             <a:ext cx="1828800" cy="292608"/>
           </a:xfrm>
           <a:prstGeom prst="rect">
@@ -25419,7 +25197,7 @@
         </p:nvSpPr>
         <p:spPr>
           <a:xfrm>
-            <a:off x="2938272" y="2258568"/>
+            <a:off x="2221992" y="2258568"/>
             <a:ext cx="1828800" cy="292608"/>
           </a:xfrm>
           <a:prstGeom prst="rect">
@@ -25458,7 +25236,7 @@
         </p:nvSpPr>
         <p:spPr>
           <a:xfrm>
-            <a:off x="2938272" y="2569464"/>
+            <a:off x="2221992" y="2569464"/>
             <a:ext cx="1828800" cy="201168"/>
           </a:xfrm>
           <a:prstGeom prst="rect">
@@ -25497,7 +25275,7 @@
         </p:nvSpPr>
         <p:spPr>
           <a:xfrm>
-            <a:off x="5803392" y="2258568"/>
+            <a:off x="4370832" y="2258568"/>
             <a:ext cx="1828800" cy="292608"/>
           </a:xfrm>
           <a:prstGeom prst="rect">
@@ -25531,7 +25309,7 @@
         </p:nvSpPr>
         <p:spPr>
           <a:xfrm>
-            <a:off x="5803392" y="2258568"/>
+            <a:off x="4370832" y="2258568"/>
             <a:ext cx="1828800" cy="292608"/>
           </a:xfrm>
           <a:prstGeom prst="rect">
@@ -25556,7 +25334,7 @@
                 <a:ea typeface="Trebuchet MS" pitchFamily="34" charset="-122"/>
                 <a:cs typeface="Trebuchet MS" pitchFamily="34" charset="-120"/>
               </a:rPr>
-              <a:t>circle</a:t>
+              <a:t>detach</a:t>
             </a:r>
             <a:endParaRPr lang="en-US" sz="1300" dirty="0"/>
           </a:p>
@@ -25570,7 +25348,7 @@
         </p:nvSpPr>
         <p:spPr>
           <a:xfrm>
-            <a:off x="5803392" y="2569464"/>
+            <a:off x="4370832" y="2569464"/>
             <a:ext cx="1828800" cy="201168"/>
           </a:xfrm>
           <a:prstGeom prst="rect">
@@ -25595,7 +25373,7 @@
                 <a:ea typeface="Calibri" pitchFamily="34" charset="-122"/>
                 <a:cs typeface="Calibri" pitchFamily="34" charset="-120"/>
               </a:rPr>
-              <a:t>a round shape</a:t>
+              <a:t>to separate or disconnect</a:t>
             </a:r>
             <a:endParaRPr lang="en-US" sz="850" dirty="0"/>
           </a:p>
@@ -25604,6 +25382,118 @@
       <p:sp>
         <p:nvSpPr>
           <p:cNvPr id="22" name="Shape 20"/>
+          <p:cNvSpPr/>
+          <p:nvPr/>
+        </p:nvSpPr>
+        <p:spPr>
+          <a:xfrm>
+            <a:off x="6519672" y="2258568"/>
+            <a:ext cx="1828800" cy="292608"/>
+          </a:xfrm>
+          <a:prstGeom prst="rect">
+            <a:avLst>
+              <a:gd name="adj" fmla="val 25000"/>
+            </a:avLst>
+          </a:prstGeom>
+          <a:solidFill>
+            <a:srgbClr val="FCE7F3"/>
+          </a:solidFill>
+          <a:ln w="19050">
+            <a:solidFill>
+              <a:srgbClr val="DB2777"/>
+            </a:solidFill>
+            <a:prstDash val="solid"/>
+          </a:ln>
+          <a:effectLst>
+            <a:outerShdw sx="100000" sy="100000" kx="0" ky="0" algn="bl" rotWithShape="0" blurRad="101600" dist="38100" dir="8100000">
+              <a:srgbClr val="000000">
+                <a:alpha val="12000"/>
+              </a:srgbClr>
+            </a:outerShdw>
+          </a:effectLst>
+        </p:spPr>
+      </p:sp>
+      <p:sp>
+        <p:nvSpPr>
+          <p:cNvPr id="23" name="Text 21"/>
+          <p:cNvSpPr/>
+          <p:nvPr/>
+        </p:nvSpPr>
+        <p:spPr>
+          <a:xfrm>
+            <a:off x="6519672" y="2258568"/>
+            <a:ext cx="1828800" cy="292608"/>
+          </a:xfrm>
+          <a:prstGeom prst="rect">
+            <a:avLst/>
+          </a:prstGeom>
+          <a:noFill/>
+          <a:ln/>
+        </p:spPr>
+        <p:txBody>
+          <a:bodyPr wrap="square" lIns="0" tIns="0" rIns="0" bIns="0" rtlCol="0" anchor="ctr"/>
+          <a:lstStyle/>
+          <a:p>
+            <a:pPr algn="ctr" indent="0" marL="0">
+              <a:buNone/>
+            </a:pPr>
+            <a:r>
+              <a:rPr lang="en-US" sz="1300" b="1" dirty="0">
+                <a:solidFill>
+                  <a:srgbClr val="9D174D"/>
+                </a:solidFill>
+                <a:latin typeface="Trebuchet MS" pitchFamily="34" charset="0"/>
+                <a:ea typeface="Trebuchet MS" pitchFamily="34" charset="-122"/>
+                <a:cs typeface="Trebuchet MS" pitchFamily="34" charset="-120"/>
+              </a:rPr>
+              <a:t>ed</a:t>
+            </a:r>
+            <a:endParaRPr lang="en-US" sz="1300" dirty="0"/>
+          </a:p>
+        </p:txBody>
+      </p:sp>
+      <p:sp>
+        <p:nvSpPr>
+          <p:cNvPr id="24" name="Text 22"/>
+          <p:cNvSpPr/>
+          <p:nvPr/>
+        </p:nvSpPr>
+        <p:spPr>
+          <a:xfrm>
+            <a:off x="6519672" y="2569464"/>
+            <a:ext cx="1828800" cy="201168"/>
+          </a:xfrm>
+          <a:prstGeom prst="rect">
+            <a:avLst/>
+          </a:prstGeom>
+          <a:noFill/>
+          <a:ln/>
+        </p:spPr>
+        <p:txBody>
+          <a:bodyPr wrap="square" lIns="0" tIns="0" rIns="0" bIns="0" rtlCol="0" anchor="t"/>
+          <a:lstStyle/>
+          <a:p>
+            <a:pPr algn="ctr" indent="0" marL="0">
+              <a:buNone/>
+            </a:pPr>
+            <a:r>
+              <a:rPr lang="en-US" sz="850" dirty="0">
+                <a:solidFill>
+                  <a:srgbClr val="475569"/>
+                </a:solidFill>
+                <a:latin typeface="Calibri" pitchFamily="34" charset="0"/>
+                <a:ea typeface="Calibri" pitchFamily="34" charset="-122"/>
+                <a:cs typeface="Calibri" pitchFamily="34" charset="-120"/>
+              </a:rPr>
+              <a:t>done, describing state</a:t>
+            </a:r>
+            <a:endParaRPr lang="en-US" sz="850" dirty="0"/>
+          </a:p>
+        </p:txBody>
+      </p:sp>
+      <p:sp>
+        <p:nvSpPr>
+          <p:cNvPr id="25" name="Shape 23"/>
           <p:cNvSpPr/>
           <p:nvPr/>
         </p:nvSpPr>
@@ -25630,7 +25520,7 @@
       </p:sp>
       <p:sp>
         <p:nvSpPr>
-          <p:cNvPr id="23" name="Text 21"/>
+          <p:cNvPr id="26" name="Text 24"/>
           <p:cNvSpPr/>
           <p:nvPr/>
         </p:nvSpPr>
@@ -25669,7 +25559,7 @@
       </p:sp>
       <p:sp>
         <p:nvSpPr>
-          <p:cNvPr id="24" name="Shape 22"/>
+          <p:cNvPr id="27" name="Shape 25"/>
           <p:cNvSpPr/>
           <p:nvPr/>
         </p:nvSpPr>
@@ -25696,7 +25586,7 @@
       </p:sp>
       <p:sp>
         <p:nvSpPr>
-          <p:cNvPr id="25" name="Text 23"/>
+          <p:cNvPr id="28" name="Text 26"/>
           <p:cNvSpPr/>
           <p:nvPr/>
         </p:nvSpPr>
@@ -25735,7 +25625,7 @@
       </p:sp>
       <p:sp>
         <p:nvSpPr>
-          <p:cNvPr id="26" name="Shape 24"/>
+          <p:cNvPr id="29" name="Shape 27"/>
           <p:cNvSpPr/>
           <p:nvPr/>
         </p:nvSpPr>
@@ -25762,7 +25652,7 @@
       </p:sp>
       <p:sp>
         <p:nvSpPr>
-          <p:cNvPr id="27" name="Text 25"/>
+          <p:cNvPr id="30" name="Text 28"/>
           <p:cNvSpPr/>
           <p:nvPr/>
         </p:nvSpPr>
@@ -25801,7 +25691,7 @@
       </p:sp>
       <p:sp>
         <p:nvSpPr>
-          <p:cNvPr id="28" name="Shape 26"/>
+          <p:cNvPr id="31" name="Shape 29"/>
           <p:cNvSpPr/>
           <p:nvPr/>
         </p:nvSpPr>
@@ -25828,7 +25718,7 @@
       </p:sp>
       <p:sp>
         <p:nvSpPr>
-          <p:cNvPr id="29" name="Text 27"/>
+          <p:cNvPr id="32" name="Text 30"/>
           <p:cNvSpPr/>
           <p:nvPr/>
         </p:nvSpPr>
@@ -26151,7 +26041,7 @@
                 <a:ea typeface="Calibri" pitchFamily="34" charset="-122"/>
                 <a:cs typeface="Calibri" pitchFamily="34" charset="-120"/>
               </a:rPr>
-              <a:t>Word Labs  •  wordlabs.app  •  Prefix: 'semi-' = half, partly, or incomplete</a:t>
+              <a:t>Word Labs  •  wordlabs.app  •  Prefix: 'semi-' = half, partly, or almost</a:t>
             </a:r>
             <a:endParaRPr lang="en-US" sz="800" dirty="0"/>
           </a:p>
@@ -26224,7 +26114,7 @@
                 <a:ea typeface="Trebuchet MS" pitchFamily="34" charset="-122"/>
                 <a:cs typeface="Trebuchet MS" pitchFamily="34" charset="-120"/>
               </a:rPr>
-              <a:t>We are learning that the prefix 'semi-' means 'half, partly, or incomplete'.</a:t>
+              <a:t>We are learning that the prefix 'semi-' means 'half, partly, or almost'.</a:t>
             </a:r>
             <a:endParaRPr lang="en-US" sz="2000" dirty="0"/>
           </a:p>
@@ -26870,7 +26760,7 @@
                 <a:ea typeface="Calibri" pitchFamily="34" charset="-122"/>
                 <a:cs typeface="Calibri" pitchFamily="34" charset="-120"/>
               </a:rPr>
-              <a:t>Word Labs  •  wordlabs.app  •  Prefix: 'semi-' = half, partly, or incomplete</a:t>
+              <a:t>Word Labs  •  wordlabs.app  •  Prefix: 'semi-' = half, partly, or almost</a:t>
             </a:r>
             <a:endParaRPr lang="en-US" sz="800" dirty="0"/>
           </a:p>
@@ -27009,7 +26899,7 @@
                 <a:ea typeface="Trebuchet MS" pitchFamily="34" charset="-122"/>
                 <a:cs typeface="Trebuchet MS" pitchFamily="34" charset="-120"/>
               </a:rPr>
-              <a:t>semicircle</a:t>
+              <a:t>semidetached</a:t>
             </a:r>
             <a:endParaRPr lang="en-US" sz="2800" dirty="0"/>
           </a:p>
@@ -27089,7 +26979,7 @@
         </p:nvSpPr>
         <p:spPr>
           <a:xfrm>
-            <a:off x="2938272" y="2258568"/>
+            <a:off x="2221992" y="2258568"/>
             <a:ext cx="1828800" cy="292608"/>
           </a:xfrm>
           <a:prstGeom prst="rect">
@@ -27123,7 +27013,7 @@
         </p:nvSpPr>
         <p:spPr>
           <a:xfrm>
-            <a:off x="2938272" y="2258568"/>
+            <a:off x="2221992" y="2258568"/>
             <a:ext cx="1828800" cy="292608"/>
           </a:xfrm>
           <a:prstGeom prst="rect">
@@ -27162,7 +27052,7 @@
         </p:nvSpPr>
         <p:spPr>
           <a:xfrm>
-            <a:off x="2938272" y="2569464"/>
+            <a:off x="2221992" y="2569464"/>
             <a:ext cx="1828800" cy="201168"/>
           </a:xfrm>
           <a:prstGeom prst="rect">
@@ -27201,7 +27091,7 @@
         </p:nvSpPr>
         <p:spPr>
           <a:xfrm>
-            <a:off x="5803392" y="2258568"/>
+            <a:off x="4370832" y="2258568"/>
             <a:ext cx="1828800" cy="292608"/>
           </a:xfrm>
           <a:prstGeom prst="rect">
@@ -27235,7 +27125,7 @@
         </p:nvSpPr>
         <p:spPr>
           <a:xfrm>
-            <a:off x="5803392" y="2258568"/>
+            <a:off x="4370832" y="2258568"/>
             <a:ext cx="1828800" cy="292608"/>
           </a:xfrm>
           <a:prstGeom prst="rect">
@@ -27260,7 +27150,7 @@
                 <a:ea typeface="Trebuchet MS" pitchFamily="34" charset="-122"/>
                 <a:cs typeface="Trebuchet MS" pitchFamily="34" charset="-120"/>
               </a:rPr>
-              <a:t>circle</a:t>
+              <a:t>detach</a:t>
             </a:r>
             <a:endParaRPr lang="en-US" sz="1300" dirty="0"/>
           </a:p>
@@ -27274,7 +27164,7 @@
         </p:nvSpPr>
         <p:spPr>
           <a:xfrm>
-            <a:off x="5803392" y="2569464"/>
+            <a:off x="4370832" y="2569464"/>
             <a:ext cx="1828800" cy="201168"/>
           </a:xfrm>
           <a:prstGeom prst="rect">
@@ -27299,7 +27189,7 @@
                 <a:ea typeface="Calibri" pitchFamily="34" charset="-122"/>
                 <a:cs typeface="Calibri" pitchFamily="34" charset="-120"/>
               </a:rPr>
-              <a:t>a round shape</a:t>
+              <a:t>to separate or disconnect</a:t>
             </a:r>
             <a:endParaRPr lang="en-US" sz="850" dirty="0"/>
           </a:p>
@@ -27308,6 +27198,118 @@
       <p:sp>
         <p:nvSpPr>
           <p:cNvPr id="22" name="Shape 20"/>
+          <p:cNvSpPr/>
+          <p:nvPr/>
+        </p:nvSpPr>
+        <p:spPr>
+          <a:xfrm>
+            <a:off x="6519672" y="2258568"/>
+            <a:ext cx="1828800" cy="292608"/>
+          </a:xfrm>
+          <a:prstGeom prst="rect">
+            <a:avLst>
+              <a:gd name="adj" fmla="val 25000"/>
+            </a:avLst>
+          </a:prstGeom>
+          <a:solidFill>
+            <a:srgbClr val="FCE7F3"/>
+          </a:solidFill>
+          <a:ln w="19050">
+            <a:solidFill>
+              <a:srgbClr val="DB2777"/>
+            </a:solidFill>
+            <a:prstDash val="solid"/>
+          </a:ln>
+          <a:effectLst>
+            <a:outerShdw sx="100000" sy="100000" kx="0" ky="0" algn="bl" rotWithShape="0" blurRad="101600" dist="38100" dir="8100000">
+              <a:srgbClr val="000000">
+                <a:alpha val="12000"/>
+              </a:srgbClr>
+            </a:outerShdw>
+          </a:effectLst>
+        </p:spPr>
+      </p:sp>
+      <p:sp>
+        <p:nvSpPr>
+          <p:cNvPr id="23" name="Text 21"/>
+          <p:cNvSpPr/>
+          <p:nvPr/>
+        </p:nvSpPr>
+        <p:spPr>
+          <a:xfrm>
+            <a:off x="6519672" y="2258568"/>
+            <a:ext cx="1828800" cy="292608"/>
+          </a:xfrm>
+          <a:prstGeom prst="rect">
+            <a:avLst/>
+          </a:prstGeom>
+          <a:noFill/>
+          <a:ln/>
+        </p:spPr>
+        <p:txBody>
+          <a:bodyPr wrap="square" lIns="0" tIns="0" rIns="0" bIns="0" rtlCol="0" anchor="ctr"/>
+          <a:lstStyle/>
+          <a:p>
+            <a:pPr algn="ctr" indent="0" marL="0">
+              <a:buNone/>
+            </a:pPr>
+            <a:r>
+              <a:rPr lang="en-US" sz="1300" b="1" dirty="0">
+                <a:solidFill>
+                  <a:srgbClr val="9D174D"/>
+                </a:solidFill>
+                <a:latin typeface="Trebuchet MS" pitchFamily="34" charset="0"/>
+                <a:ea typeface="Trebuchet MS" pitchFamily="34" charset="-122"/>
+                <a:cs typeface="Trebuchet MS" pitchFamily="34" charset="-120"/>
+              </a:rPr>
+              <a:t>ed</a:t>
+            </a:r>
+            <a:endParaRPr lang="en-US" sz="1300" dirty="0"/>
+          </a:p>
+        </p:txBody>
+      </p:sp>
+      <p:sp>
+        <p:nvSpPr>
+          <p:cNvPr id="24" name="Text 22"/>
+          <p:cNvSpPr/>
+          <p:nvPr/>
+        </p:nvSpPr>
+        <p:spPr>
+          <a:xfrm>
+            <a:off x="6519672" y="2569464"/>
+            <a:ext cx="1828800" cy="201168"/>
+          </a:xfrm>
+          <a:prstGeom prst="rect">
+            <a:avLst/>
+          </a:prstGeom>
+          <a:noFill/>
+          <a:ln/>
+        </p:spPr>
+        <p:txBody>
+          <a:bodyPr wrap="square" lIns="0" tIns="0" rIns="0" bIns="0" rtlCol="0" anchor="t"/>
+          <a:lstStyle/>
+          <a:p>
+            <a:pPr algn="ctr" indent="0" marL="0">
+              <a:buNone/>
+            </a:pPr>
+            <a:r>
+              <a:rPr lang="en-US" sz="850" dirty="0">
+                <a:solidFill>
+                  <a:srgbClr val="475569"/>
+                </a:solidFill>
+                <a:latin typeface="Calibri" pitchFamily="34" charset="0"/>
+                <a:ea typeface="Calibri" pitchFamily="34" charset="-122"/>
+                <a:cs typeface="Calibri" pitchFamily="34" charset="-120"/>
+              </a:rPr>
+              <a:t>done, describing state</a:t>
+            </a:r>
+            <a:endParaRPr lang="en-US" sz="850" dirty="0"/>
+          </a:p>
+        </p:txBody>
+      </p:sp>
+      <p:sp>
+        <p:nvSpPr>
+          <p:cNvPr id="25" name="Shape 23"/>
           <p:cNvSpPr/>
           <p:nvPr/>
         </p:nvSpPr>
@@ -27334,7 +27336,7 @@
       </p:sp>
       <p:sp>
         <p:nvSpPr>
-          <p:cNvPr id="23" name="Text 21"/>
+          <p:cNvPr id="26" name="Text 24"/>
           <p:cNvSpPr/>
           <p:nvPr/>
         </p:nvSpPr>
@@ -27373,7 +27375,7 @@
       </p:sp>
       <p:sp>
         <p:nvSpPr>
-          <p:cNvPr id="24" name="Shape 22"/>
+          <p:cNvPr id="27" name="Shape 25"/>
           <p:cNvSpPr/>
           <p:nvPr/>
         </p:nvSpPr>
@@ -27400,7 +27402,7 @@
       </p:sp>
       <p:sp>
         <p:nvSpPr>
-          <p:cNvPr id="25" name="Shape 23"/>
+          <p:cNvPr id="28" name="Shape 26"/>
           <p:cNvSpPr/>
           <p:nvPr/>
         </p:nvSpPr>
@@ -27427,7 +27429,7 @@
       </p:sp>
       <p:sp>
         <p:nvSpPr>
-          <p:cNvPr id="26" name="Text 24"/>
+          <p:cNvPr id="29" name="Text 27"/>
           <p:cNvSpPr/>
           <p:nvPr/>
         </p:nvSpPr>
@@ -27466,7 +27468,7 @@
       </p:sp>
       <p:sp>
         <p:nvSpPr>
-          <p:cNvPr id="27" name="Text 25"/>
+          <p:cNvPr id="30" name="Text 28"/>
           <p:cNvSpPr/>
           <p:nvPr/>
         </p:nvSpPr>
@@ -27505,7 +27507,7 @@
       </p:sp>
       <p:sp>
         <p:nvSpPr>
-          <p:cNvPr id="28" name="Shape 26"/>
+          <p:cNvPr id="31" name="Shape 29"/>
           <p:cNvSpPr/>
           <p:nvPr/>
         </p:nvSpPr>
@@ -27532,7 +27534,7 @@
       </p:sp>
       <p:sp>
         <p:nvSpPr>
-          <p:cNvPr id="29" name="Text 27"/>
+          <p:cNvPr id="32" name="Text 30"/>
           <p:cNvSpPr/>
           <p:nvPr/>
         </p:nvSpPr>
@@ -27571,7 +27573,7 @@
       </p:sp>
       <p:sp>
         <p:nvSpPr>
-          <p:cNvPr id="30" name="Text 28"/>
+          <p:cNvPr id="33" name="Text 31"/>
           <p:cNvSpPr/>
           <p:nvPr/>
         </p:nvSpPr>
@@ -27610,7 +27612,7 @@
       </p:sp>
       <p:sp>
         <p:nvSpPr>
-          <p:cNvPr id="31" name="Shape 29"/>
+          <p:cNvPr id="34" name="Shape 32"/>
           <p:cNvSpPr/>
           <p:nvPr/>
         </p:nvSpPr>
@@ -27637,7 +27639,7 @@
       </p:sp>
       <p:sp>
         <p:nvSpPr>
-          <p:cNvPr id="32" name="Text 30"/>
+          <p:cNvPr id="35" name="Text 33"/>
           <p:cNvSpPr/>
           <p:nvPr/>
         </p:nvSpPr>
@@ -27668,7 +27670,7 @@
                 <a:ea typeface="Trebuchet MS" pitchFamily="34" charset="-122"/>
                 <a:cs typeface="Trebuchet MS" pitchFamily="34" charset="-120"/>
               </a:rPr>
-              <a:t>cir</a:t>
+              <a:t>de</a:t>
             </a:r>
             <a:endParaRPr lang="en-US" sz="1400" dirty="0"/>
           </a:p>
@@ -27676,7 +27678,7 @@
       </p:sp>
       <p:sp>
         <p:nvSpPr>
-          <p:cNvPr id="33" name="Text 31"/>
+          <p:cNvPr id="36" name="Text 34"/>
           <p:cNvSpPr/>
           <p:nvPr/>
         </p:nvSpPr>
@@ -27715,7 +27717,7 @@
       </p:sp>
       <p:sp>
         <p:nvSpPr>
-          <p:cNvPr id="34" name="Shape 32"/>
+          <p:cNvPr id="37" name="Shape 35"/>
           <p:cNvSpPr/>
           <p:nvPr/>
         </p:nvSpPr>
@@ -27742,7 +27744,7 @@
       </p:sp>
       <p:sp>
         <p:nvSpPr>
-          <p:cNvPr id="35" name="Text 33"/>
+          <p:cNvPr id="38" name="Text 36"/>
           <p:cNvSpPr/>
           <p:nvPr/>
         </p:nvSpPr>
@@ -27773,7 +27775,7 @@
                 <a:ea typeface="Trebuchet MS" pitchFamily="34" charset="-122"/>
                 <a:cs typeface="Trebuchet MS" pitchFamily="34" charset="-120"/>
               </a:rPr>
-              <a:t>cle</a:t>
+              <a:t>tached</a:t>
             </a:r>
             <a:endParaRPr lang="en-US" sz="1400" dirty="0"/>
           </a:p>
@@ -27781,7 +27783,7 @@
       </p:sp>
       <p:sp>
         <p:nvSpPr>
-          <p:cNvPr id="36" name="Shape 34"/>
+          <p:cNvPr id="39" name="Shape 37"/>
           <p:cNvSpPr/>
           <p:nvPr/>
         </p:nvSpPr>
@@ -27808,7 +27810,7 @@
       </p:sp>
       <p:sp>
         <p:nvSpPr>
-          <p:cNvPr id="37" name="Text 35"/>
+          <p:cNvPr id="40" name="Text 38"/>
           <p:cNvSpPr/>
           <p:nvPr/>
         </p:nvSpPr>
@@ -27847,7 +27849,7 @@
       </p:sp>
       <p:sp>
         <p:nvSpPr>
-          <p:cNvPr id="38" name="Shape 36"/>
+          <p:cNvPr id="41" name="Shape 39"/>
           <p:cNvSpPr/>
           <p:nvPr/>
         </p:nvSpPr>
@@ -27874,7 +27876,7 @@
       </p:sp>
       <p:sp>
         <p:nvSpPr>
-          <p:cNvPr id="39" name="Text 37"/>
+          <p:cNvPr id="42" name="Text 40"/>
           <p:cNvSpPr/>
           <p:nvPr/>
         </p:nvSpPr>
@@ -28197,7 +28199,7 @@
                 <a:ea typeface="Calibri" pitchFamily="34" charset="-122"/>
                 <a:cs typeface="Calibri" pitchFamily="34" charset="-120"/>
               </a:rPr>
-              <a:t>Word Labs  •  wordlabs.app  •  Prefix: 'semi-' = half, partly, or incomplete</a:t>
+              <a:t>Word Labs  •  wordlabs.app  •  Prefix: 'semi-' = half, partly, or almost</a:t>
             </a:r>
             <a:endParaRPr lang="en-US" sz="800" dirty="0"/>
           </a:p>
@@ -28336,7 +28338,7 @@
                 <a:ea typeface="Trebuchet MS" pitchFamily="34" charset="-122"/>
                 <a:cs typeface="Trebuchet MS" pitchFamily="34" charset="-120"/>
               </a:rPr>
-              <a:t>semicircle</a:t>
+              <a:t>semidetached</a:t>
             </a:r>
             <a:endParaRPr lang="en-US" sz="2800" dirty="0"/>
           </a:p>
@@ -28416,7 +28418,7 @@
         </p:nvSpPr>
         <p:spPr>
           <a:xfrm>
-            <a:off x="2938272" y="2258568"/>
+            <a:off x="2221992" y="2258568"/>
             <a:ext cx="1828800" cy="292608"/>
           </a:xfrm>
           <a:prstGeom prst="rect">
@@ -28450,7 +28452,7 @@
         </p:nvSpPr>
         <p:spPr>
           <a:xfrm>
-            <a:off x="2938272" y="2258568"/>
+            <a:off x="2221992" y="2258568"/>
             <a:ext cx="1828800" cy="292608"/>
           </a:xfrm>
           <a:prstGeom prst="rect">
@@ -28489,7 +28491,7 @@
         </p:nvSpPr>
         <p:spPr>
           <a:xfrm>
-            <a:off x="2938272" y="2569464"/>
+            <a:off x="2221992" y="2569464"/>
             <a:ext cx="1828800" cy="201168"/>
           </a:xfrm>
           <a:prstGeom prst="rect">
@@ -28528,7 +28530,7 @@
         </p:nvSpPr>
         <p:spPr>
           <a:xfrm>
-            <a:off x="5803392" y="2258568"/>
+            <a:off x="4370832" y="2258568"/>
             <a:ext cx="1828800" cy="292608"/>
           </a:xfrm>
           <a:prstGeom prst="rect">
@@ -28562,7 +28564,7 @@
         </p:nvSpPr>
         <p:spPr>
           <a:xfrm>
-            <a:off x="5803392" y="2258568"/>
+            <a:off x="4370832" y="2258568"/>
             <a:ext cx="1828800" cy="292608"/>
           </a:xfrm>
           <a:prstGeom prst="rect">
@@ -28587,7 +28589,7 @@
                 <a:ea typeface="Trebuchet MS" pitchFamily="34" charset="-122"/>
                 <a:cs typeface="Trebuchet MS" pitchFamily="34" charset="-120"/>
               </a:rPr>
-              <a:t>circle</a:t>
+              <a:t>detach</a:t>
             </a:r>
             <a:endParaRPr lang="en-US" sz="1300" dirty="0"/>
           </a:p>
@@ -28601,7 +28603,7 @@
         </p:nvSpPr>
         <p:spPr>
           <a:xfrm>
-            <a:off x="5803392" y="2569464"/>
+            <a:off x="4370832" y="2569464"/>
             <a:ext cx="1828800" cy="201168"/>
           </a:xfrm>
           <a:prstGeom prst="rect">
@@ -28626,7 +28628,7 @@
                 <a:ea typeface="Calibri" pitchFamily="34" charset="-122"/>
                 <a:cs typeface="Calibri" pitchFamily="34" charset="-120"/>
               </a:rPr>
-              <a:t>a round shape</a:t>
+              <a:t>to separate or disconnect</a:t>
             </a:r>
             <a:endParaRPr lang="en-US" sz="850" dirty="0"/>
           </a:p>
@@ -28635,6 +28637,118 @@
       <p:sp>
         <p:nvSpPr>
           <p:cNvPr id="22" name="Shape 20"/>
+          <p:cNvSpPr/>
+          <p:nvPr/>
+        </p:nvSpPr>
+        <p:spPr>
+          <a:xfrm>
+            <a:off x="6519672" y="2258568"/>
+            <a:ext cx="1828800" cy="292608"/>
+          </a:xfrm>
+          <a:prstGeom prst="rect">
+            <a:avLst>
+              <a:gd name="adj" fmla="val 25000"/>
+            </a:avLst>
+          </a:prstGeom>
+          <a:solidFill>
+            <a:srgbClr val="FCE7F3"/>
+          </a:solidFill>
+          <a:ln w="19050">
+            <a:solidFill>
+              <a:srgbClr val="DB2777"/>
+            </a:solidFill>
+            <a:prstDash val="solid"/>
+          </a:ln>
+          <a:effectLst>
+            <a:outerShdw sx="100000" sy="100000" kx="0" ky="0" algn="bl" rotWithShape="0" blurRad="101600" dist="38100" dir="8100000">
+              <a:srgbClr val="000000">
+                <a:alpha val="12000"/>
+              </a:srgbClr>
+            </a:outerShdw>
+          </a:effectLst>
+        </p:spPr>
+      </p:sp>
+      <p:sp>
+        <p:nvSpPr>
+          <p:cNvPr id="23" name="Text 21"/>
+          <p:cNvSpPr/>
+          <p:nvPr/>
+        </p:nvSpPr>
+        <p:spPr>
+          <a:xfrm>
+            <a:off x="6519672" y="2258568"/>
+            <a:ext cx="1828800" cy="292608"/>
+          </a:xfrm>
+          <a:prstGeom prst="rect">
+            <a:avLst/>
+          </a:prstGeom>
+          <a:noFill/>
+          <a:ln/>
+        </p:spPr>
+        <p:txBody>
+          <a:bodyPr wrap="square" lIns="0" tIns="0" rIns="0" bIns="0" rtlCol="0" anchor="ctr"/>
+          <a:lstStyle/>
+          <a:p>
+            <a:pPr algn="ctr" indent="0" marL="0">
+              <a:buNone/>
+            </a:pPr>
+            <a:r>
+              <a:rPr lang="en-US" sz="1300" b="1" dirty="0">
+                <a:solidFill>
+                  <a:srgbClr val="9D174D"/>
+                </a:solidFill>
+                <a:latin typeface="Trebuchet MS" pitchFamily="34" charset="0"/>
+                <a:ea typeface="Trebuchet MS" pitchFamily="34" charset="-122"/>
+                <a:cs typeface="Trebuchet MS" pitchFamily="34" charset="-120"/>
+              </a:rPr>
+              <a:t>ed</a:t>
+            </a:r>
+            <a:endParaRPr lang="en-US" sz="1300" dirty="0"/>
+          </a:p>
+        </p:txBody>
+      </p:sp>
+      <p:sp>
+        <p:nvSpPr>
+          <p:cNvPr id="24" name="Text 22"/>
+          <p:cNvSpPr/>
+          <p:nvPr/>
+        </p:nvSpPr>
+        <p:spPr>
+          <a:xfrm>
+            <a:off x="6519672" y="2569464"/>
+            <a:ext cx="1828800" cy="201168"/>
+          </a:xfrm>
+          <a:prstGeom prst="rect">
+            <a:avLst/>
+          </a:prstGeom>
+          <a:noFill/>
+          <a:ln/>
+        </p:spPr>
+        <p:txBody>
+          <a:bodyPr wrap="square" lIns="0" tIns="0" rIns="0" bIns="0" rtlCol="0" anchor="t"/>
+          <a:lstStyle/>
+          <a:p>
+            <a:pPr algn="ctr" indent="0" marL="0">
+              <a:buNone/>
+            </a:pPr>
+            <a:r>
+              <a:rPr lang="en-US" sz="850" dirty="0">
+                <a:solidFill>
+                  <a:srgbClr val="475569"/>
+                </a:solidFill>
+                <a:latin typeface="Calibri" pitchFamily="34" charset="0"/>
+                <a:ea typeface="Calibri" pitchFamily="34" charset="-122"/>
+                <a:cs typeface="Calibri" pitchFamily="34" charset="-120"/>
+              </a:rPr>
+              <a:t>done, describing state</a:t>
+            </a:r>
+            <a:endParaRPr lang="en-US" sz="850" dirty="0"/>
+          </a:p>
+        </p:txBody>
+      </p:sp>
+      <p:sp>
+        <p:nvSpPr>
+          <p:cNvPr id="25" name="Shape 23"/>
           <p:cNvSpPr/>
           <p:nvPr/>
         </p:nvSpPr>
@@ -28661,7 +28775,7 @@
       </p:sp>
       <p:sp>
         <p:nvSpPr>
-          <p:cNvPr id="23" name="Text 21"/>
+          <p:cNvPr id="26" name="Text 24"/>
           <p:cNvSpPr/>
           <p:nvPr/>
         </p:nvSpPr>
@@ -28700,7 +28814,7 @@
       </p:sp>
       <p:sp>
         <p:nvSpPr>
-          <p:cNvPr id="24" name="Shape 22"/>
+          <p:cNvPr id="27" name="Shape 25"/>
           <p:cNvSpPr/>
           <p:nvPr/>
         </p:nvSpPr>
@@ -28727,7 +28841,7 @@
       </p:sp>
       <p:sp>
         <p:nvSpPr>
-          <p:cNvPr id="25" name="Shape 23"/>
+          <p:cNvPr id="28" name="Shape 26"/>
           <p:cNvSpPr/>
           <p:nvPr/>
         </p:nvSpPr>
@@ -28754,7 +28868,7 @@
       </p:sp>
       <p:sp>
         <p:nvSpPr>
-          <p:cNvPr id="26" name="Text 24"/>
+          <p:cNvPr id="29" name="Text 27"/>
           <p:cNvSpPr/>
           <p:nvPr/>
         </p:nvSpPr>
@@ -28793,7 +28907,7 @@
       </p:sp>
       <p:sp>
         <p:nvSpPr>
-          <p:cNvPr id="27" name="Text 25"/>
+          <p:cNvPr id="30" name="Text 28"/>
           <p:cNvSpPr/>
           <p:nvPr/>
         </p:nvSpPr>
@@ -28832,7 +28946,7 @@
       </p:sp>
       <p:sp>
         <p:nvSpPr>
-          <p:cNvPr id="28" name="Shape 26"/>
+          <p:cNvPr id="31" name="Shape 29"/>
           <p:cNvSpPr/>
           <p:nvPr/>
         </p:nvSpPr>
@@ -28859,7 +28973,7 @@
       </p:sp>
       <p:sp>
         <p:nvSpPr>
-          <p:cNvPr id="29" name="Text 27"/>
+          <p:cNvPr id="32" name="Text 30"/>
           <p:cNvSpPr/>
           <p:nvPr/>
         </p:nvSpPr>
@@ -28898,7 +29012,7 @@
       </p:sp>
       <p:sp>
         <p:nvSpPr>
-          <p:cNvPr id="30" name="Text 28"/>
+          <p:cNvPr id="33" name="Text 31"/>
           <p:cNvSpPr/>
           <p:nvPr/>
         </p:nvSpPr>
@@ -28937,7 +29051,7 @@
       </p:sp>
       <p:sp>
         <p:nvSpPr>
-          <p:cNvPr id="31" name="Shape 29"/>
+          <p:cNvPr id="34" name="Shape 32"/>
           <p:cNvSpPr/>
           <p:nvPr/>
         </p:nvSpPr>
@@ -28964,7 +29078,7 @@
       </p:sp>
       <p:sp>
         <p:nvSpPr>
-          <p:cNvPr id="32" name="Text 30"/>
+          <p:cNvPr id="35" name="Text 33"/>
           <p:cNvSpPr/>
           <p:nvPr/>
         </p:nvSpPr>
@@ -28995,7 +29109,7 @@
                 <a:ea typeface="Trebuchet MS" pitchFamily="34" charset="-122"/>
                 <a:cs typeface="Trebuchet MS" pitchFamily="34" charset="-120"/>
               </a:rPr>
-              <a:t>cir</a:t>
+              <a:t>de</a:t>
             </a:r>
             <a:endParaRPr lang="en-US" sz="1400" dirty="0"/>
           </a:p>
@@ -29003,7 +29117,7 @@
       </p:sp>
       <p:sp>
         <p:nvSpPr>
-          <p:cNvPr id="33" name="Text 31"/>
+          <p:cNvPr id="36" name="Text 34"/>
           <p:cNvSpPr/>
           <p:nvPr/>
         </p:nvSpPr>
@@ -29042,7 +29156,7 @@
       </p:sp>
       <p:sp>
         <p:nvSpPr>
-          <p:cNvPr id="34" name="Shape 32"/>
+          <p:cNvPr id="37" name="Shape 35"/>
           <p:cNvSpPr/>
           <p:nvPr/>
         </p:nvSpPr>
@@ -29069,7 +29183,7 @@
       </p:sp>
       <p:sp>
         <p:nvSpPr>
-          <p:cNvPr id="35" name="Text 33"/>
+          <p:cNvPr id="38" name="Text 36"/>
           <p:cNvSpPr/>
           <p:nvPr/>
         </p:nvSpPr>
@@ -29100,7 +29214,7 @@
                 <a:ea typeface="Trebuchet MS" pitchFamily="34" charset="-122"/>
                 <a:cs typeface="Trebuchet MS" pitchFamily="34" charset="-120"/>
               </a:rPr>
-              <a:t>cle</a:t>
+              <a:t>tached</a:t>
             </a:r>
             <a:endParaRPr lang="en-US" sz="1400" dirty="0"/>
           </a:p>
@@ -29108,7 +29222,7 @@
       </p:sp>
       <p:sp>
         <p:nvSpPr>
-          <p:cNvPr id="36" name="Shape 34"/>
+          <p:cNvPr id="39" name="Shape 37"/>
           <p:cNvSpPr/>
           <p:nvPr/>
         </p:nvSpPr>
@@ -29135,7 +29249,7 @@
       </p:sp>
       <p:sp>
         <p:nvSpPr>
-          <p:cNvPr id="37" name="Text 35"/>
+          <p:cNvPr id="40" name="Text 38"/>
           <p:cNvSpPr/>
           <p:nvPr/>
         </p:nvSpPr>
@@ -29174,18 +29288,18 @@
       </p:sp>
       <p:sp>
         <p:nvSpPr>
-          <p:cNvPr id="38" name="Shape 36"/>
+          <p:cNvPr id="41" name="Shape 39"/>
           <p:cNvSpPr/>
           <p:nvPr/>
         </p:nvSpPr>
         <p:spPr>
           <a:xfrm>
             <a:off x="1874520" y="4096512"/>
-            <a:ext cx="6903720" cy="804672"/>
+            <a:ext cx="6903720" cy="658368"/>
           </a:xfrm>
           <a:prstGeom prst="rect">
             <a:avLst>
-              <a:gd name="adj" fmla="val 6818"/>
+              <a:gd name="adj" fmla="val 8333"/>
             </a:avLst>
           </a:prstGeom>
           <a:solidFill>
@@ -29201,18 +29315,18 @@
       </p:sp>
       <p:sp>
         <p:nvSpPr>
-          <p:cNvPr id="39" name="Shape 37"/>
-          <p:cNvSpPr/>
-          <p:nvPr/>
-        </p:nvSpPr>
-        <p:spPr>
-          <a:xfrm>
-            <a:off x="2023872" y="4169664"/>
-            <a:ext cx="685800" cy="384048"/>
+          <p:cNvPr id="42" name="Shape 40"/>
+          <p:cNvSpPr/>
+          <p:nvPr/>
+        </p:nvSpPr>
+        <p:spPr>
+          <a:xfrm>
+            <a:off x="1951828" y="4169664"/>
+            <a:ext cx="603504" cy="475488"/>
           </a:xfrm>
           <a:prstGeom prst="rect">
             <a:avLst>
-              <a:gd name="adj" fmla="val 9524"/>
+              <a:gd name="adj" fmla="val 7692"/>
             </a:avLst>
           </a:prstGeom>
           <a:solidFill>
@@ -29228,14 +29342,14 @@
       </p:sp>
       <p:sp>
         <p:nvSpPr>
-          <p:cNvPr id="40" name="Text 38"/>
-          <p:cNvSpPr/>
-          <p:nvPr/>
-        </p:nvSpPr>
-        <p:spPr>
-          <a:xfrm>
-            <a:off x="2023872" y="4169664"/>
-            <a:ext cx="685800" cy="384048"/>
+          <p:cNvPr id="43" name="Text 41"/>
+          <p:cNvSpPr/>
+          <p:nvPr/>
+        </p:nvSpPr>
+        <p:spPr>
+          <a:xfrm>
+            <a:off x="1951828" y="4169664"/>
+            <a:ext cx="603504" cy="475488"/>
           </a:xfrm>
           <a:prstGeom prst="rect">
             <a:avLst/>
@@ -29267,18 +29381,18 @@
       </p:sp>
       <p:sp>
         <p:nvSpPr>
-          <p:cNvPr id="41" name="Shape 39"/>
-          <p:cNvSpPr/>
-          <p:nvPr/>
-        </p:nvSpPr>
-        <p:spPr>
-          <a:xfrm>
-            <a:off x="2831592" y="4169664"/>
-            <a:ext cx="685800" cy="384048"/>
+          <p:cNvPr id="44" name="Shape 42"/>
+          <p:cNvSpPr/>
+          <p:nvPr/>
+        </p:nvSpPr>
+        <p:spPr>
+          <a:xfrm>
+            <a:off x="2605209" y="4169664"/>
+            <a:ext cx="603504" cy="475488"/>
           </a:xfrm>
           <a:prstGeom prst="rect">
             <a:avLst>
-              <a:gd name="adj" fmla="val 9524"/>
+              <a:gd name="adj" fmla="val 7692"/>
             </a:avLst>
           </a:prstGeom>
           <a:solidFill>
@@ -29294,14 +29408,14 @@
       </p:sp>
       <p:sp>
         <p:nvSpPr>
-          <p:cNvPr id="42" name="Text 40"/>
-          <p:cNvSpPr/>
-          <p:nvPr/>
-        </p:nvSpPr>
-        <p:spPr>
-          <a:xfrm>
-            <a:off x="2831592" y="4169664"/>
-            <a:ext cx="685800" cy="384048"/>
+          <p:cNvPr id="45" name="Text 43"/>
+          <p:cNvSpPr/>
+          <p:nvPr/>
+        </p:nvSpPr>
+        <p:spPr>
+          <a:xfrm>
+            <a:off x="2605209" y="4169664"/>
+            <a:ext cx="603504" cy="475488"/>
           </a:xfrm>
           <a:prstGeom prst="rect">
             <a:avLst/>
@@ -29333,18 +29447,18 @@
       </p:sp>
       <p:sp>
         <p:nvSpPr>
-          <p:cNvPr id="43" name="Shape 41"/>
-          <p:cNvSpPr/>
-          <p:nvPr/>
-        </p:nvSpPr>
-        <p:spPr>
-          <a:xfrm>
-            <a:off x="3639312" y="4169664"/>
-            <a:ext cx="685800" cy="384048"/>
+          <p:cNvPr id="46" name="Shape 44"/>
+          <p:cNvSpPr/>
+          <p:nvPr/>
+        </p:nvSpPr>
+        <p:spPr>
+          <a:xfrm>
+            <a:off x="3258589" y="4169664"/>
+            <a:ext cx="603504" cy="475488"/>
           </a:xfrm>
           <a:prstGeom prst="rect">
             <a:avLst>
-              <a:gd name="adj" fmla="val 9524"/>
+              <a:gd name="adj" fmla="val 7692"/>
             </a:avLst>
           </a:prstGeom>
           <a:solidFill>
@@ -29360,14 +29474,14 @@
       </p:sp>
       <p:sp>
         <p:nvSpPr>
-          <p:cNvPr id="44" name="Text 42"/>
-          <p:cNvSpPr/>
-          <p:nvPr/>
-        </p:nvSpPr>
-        <p:spPr>
-          <a:xfrm>
-            <a:off x="3639312" y="4169664"/>
-            <a:ext cx="685800" cy="384048"/>
+          <p:cNvPr id="47" name="Text 45"/>
+          <p:cNvSpPr/>
+          <p:nvPr/>
+        </p:nvSpPr>
+        <p:spPr>
+          <a:xfrm>
+            <a:off x="3258589" y="4169664"/>
+            <a:ext cx="603504" cy="475488"/>
           </a:xfrm>
           <a:prstGeom prst="rect">
             <a:avLst/>
@@ -29399,18 +29513,18 @@
       </p:sp>
       <p:sp>
         <p:nvSpPr>
-          <p:cNvPr id="45" name="Shape 43"/>
-          <p:cNvSpPr/>
-          <p:nvPr/>
-        </p:nvSpPr>
-        <p:spPr>
-          <a:xfrm>
-            <a:off x="4447032" y="4169664"/>
-            <a:ext cx="685800" cy="384048"/>
+          <p:cNvPr id="48" name="Shape 46"/>
+          <p:cNvSpPr/>
+          <p:nvPr/>
+        </p:nvSpPr>
+        <p:spPr>
+          <a:xfrm>
+            <a:off x="3911969" y="4169664"/>
+            <a:ext cx="603504" cy="475488"/>
           </a:xfrm>
           <a:prstGeom prst="rect">
             <a:avLst>
-              <a:gd name="adj" fmla="val 9524"/>
+              <a:gd name="adj" fmla="val 7692"/>
             </a:avLst>
           </a:prstGeom>
           <a:solidFill>
@@ -29426,14 +29540,14 @@
       </p:sp>
       <p:sp>
         <p:nvSpPr>
-          <p:cNvPr id="46" name="Text 44"/>
-          <p:cNvSpPr/>
-          <p:nvPr/>
-        </p:nvSpPr>
-        <p:spPr>
-          <a:xfrm>
-            <a:off x="4447032" y="4169664"/>
-            <a:ext cx="685800" cy="384048"/>
+          <p:cNvPr id="49" name="Text 47"/>
+          <p:cNvSpPr/>
+          <p:nvPr/>
+        </p:nvSpPr>
+        <p:spPr>
+          <a:xfrm>
+            <a:off x="3911969" y="4169664"/>
+            <a:ext cx="603504" cy="475488"/>
           </a:xfrm>
           <a:prstGeom prst="rect">
             <a:avLst/>
@@ -29465,18 +29579,18 @@
       </p:sp>
       <p:sp>
         <p:nvSpPr>
-          <p:cNvPr id="47" name="Shape 45"/>
-          <p:cNvSpPr/>
-          <p:nvPr/>
-        </p:nvSpPr>
-        <p:spPr>
-          <a:xfrm>
-            <a:off x="5254752" y="4169664"/>
-            <a:ext cx="685800" cy="384048"/>
+          <p:cNvPr id="50" name="Shape 48"/>
+          <p:cNvSpPr/>
+          <p:nvPr/>
+        </p:nvSpPr>
+        <p:spPr>
+          <a:xfrm>
+            <a:off x="4565350" y="4169664"/>
+            <a:ext cx="603504" cy="475488"/>
           </a:xfrm>
           <a:prstGeom prst="rect">
             <a:avLst>
-              <a:gd name="adj" fmla="val 9524"/>
+              <a:gd name="adj" fmla="val 7692"/>
             </a:avLst>
           </a:prstGeom>
           <a:solidFill>
@@ -29492,14 +29606,14 @@
       </p:sp>
       <p:sp>
         <p:nvSpPr>
-          <p:cNvPr id="48" name="Text 46"/>
-          <p:cNvSpPr/>
-          <p:nvPr/>
-        </p:nvSpPr>
-        <p:spPr>
-          <a:xfrm>
-            <a:off x="5254752" y="4169664"/>
-            <a:ext cx="685800" cy="384048"/>
+          <p:cNvPr id="51" name="Text 49"/>
+          <p:cNvSpPr/>
+          <p:nvPr/>
+        </p:nvSpPr>
+        <p:spPr>
+          <a:xfrm>
+            <a:off x="4565350" y="4169664"/>
+            <a:ext cx="603504" cy="475488"/>
           </a:xfrm>
           <a:prstGeom prst="rect">
             <a:avLst/>
@@ -29523,7 +29637,7 @@
                 <a:ea typeface="Trebuchet MS" pitchFamily="34" charset="-122"/>
                 <a:cs typeface="Trebuchet MS" pitchFamily="34" charset="-120"/>
               </a:rPr>
-              <a:t>c</a:t>
+              <a:t>d</a:t>
             </a:r>
             <a:endParaRPr lang="en-US" sz="900" dirty="0"/>
           </a:p>
@@ -29531,57 +29645,18 @@
       </p:sp>
       <p:sp>
         <p:nvSpPr>
-          <p:cNvPr id="49" name="Text 47"/>
-          <p:cNvSpPr/>
-          <p:nvPr/>
-        </p:nvSpPr>
-        <p:spPr>
-          <a:xfrm>
-            <a:off x="5254752" y="4572000"/>
-            <a:ext cx="685800" cy="219456"/>
-          </a:xfrm>
-          <a:prstGeom prst="rect">
-            <a:avLst/>
-          </a:prstGeom>
-          <a:noFill/>
-          <a:ln/>
-        </p:spPr>
-        <p:txBody>
-          <a:bodyPr wrap="square" lIns="0" tIns="0" rIns="0" bIns="0" rtlCol="0" anchor="t"/>
-          <a:lstStyle/>
-          <a:p>
-            <a:pPr algn="ctr" indent="0" marL="0">
-              <a:buNone/>
-            </a:pPr>
-            <a:r>
-              <a:rPr lang="en-US" sz="750" i="1" dirty="0">
-                <a:solidFill>
-                  <a:srgbClr val="94A3B8"/>
-                </a:solidFill>
-                <a:latin typeface="Calibri" pitchFamily="34" charset="0"/>
-                <a:ea typeface="Calibri" pitchFamily="34" charset="-122"/>
-                <a:cs typeface="Calibri" pitchFamily="34" charset="-120"/>
-              </a:rPr>
-              <a:t>/s/</a:t>
-            </a:r>
-            <a:endParaRPr lang="en-US" sz="750" dirty="0"/>
-          </a:p>
-        </p:txBody>
-      </p:sp>
-      <p:sp>
-        <p:nvSpPr>
-          <p:cNvPr id="50" name="Shape 48"/>
-          <p:cNvSpPr/>
-          <p:nvPr/>
-        </p:nvSpPr>
-        <p:spPr>
-          <a:xfrm>
-            <a:off x="6062472" y="4169664"/>
-            <a:ext cx="685800" cy="384048"/>
+          <p:cNvPr id="52" name="Shape 50"/>
+          <p:cNvSpPr/>
+          <p:nvPr/>
+        </p:nvSpPr>
+        <p:spPr>
+          <a:xfrm>
+            <a:off x="5218730" y="4169664"/>
+            <a:ext cx="603504" cy="475488"/>
           </a:xfrm>
           <a:prstGeom prst="rect">
             <a:avLst>
-              <a:gd name="adj" fmla="val 9524"/>
+              <a:gd name="adj" fmla="val 7692"/>
             </a:avLst>
           </a:prstGeom>
           <a:solidFill>
@@ -29597,14 +29672,14 @@
       </p:sp>
       <p:sp>
         <p:nvSpPr>
-          <p:cNvPr id="51" name="Text 49"/>
-          <p:cNvSpPr/>
-          <p:nvPr/>
-        </p:nvSpPr>
-        <p:spPr>
-          <a:xfrm>
-            <a:off x="6062472" y="4169664"/>
-            <a:ext cx="685800" cy="384048"/>
+          <p:cNvPr id="53" name="Text 51"/>
+          <p:cNvSpPr/>
+          <p:nvPr/>
+        </p:nvSpPr>
+        <p:spPr>
+          <a:xfrm>
+            <a:off x="5218730" y="4169664"/>
+            <a:ext cx="603504" cy="475488"/>
           </a:xfrm>
           <a:prstGeom prst="rect">
             <a:avLst/>
@@ -29628,7 +29703,7 @@
                 <a:ea typeface="Trebuchet MS" pitchFamily="34" charset="-122"/>
                 <a:cs typeface="Trebuchet MS" pitchFamily="34" charset="-120"/>
               </a:rPr>
-              <a:t>ir</a:t>
+              <a:t>e</a:t>
             </a:r>
             <a:endParaRPr lang="en-US" sz="900" dirty="0"/>
           </a:p>
@@ -29636,18 +29711,18 @@
       </p:sp>
       <p:sp>
         <p:nvSpPr>
-          <p:cNvPr id="52" name="Shape 50"/>
-          <p:cNvSpPr/>
-          <p:nvPr/>
-        </p:nvSpPr>
-        <p:spPr>
-          <a:xfrm>
-            <a:off x="6870192" y="4169664"/>
-            <a:ext cx="685800" cy="384048"/>
+          <p:cNvPr id="54" name="Shape 52"/>
+          <p:cNvSpPr/>
+          <p:nvPr/>
+        </p:nvSpPr>
+        <p:spPr>
+          <a:xfrm>
+            <a:off x="5872111" y="4169664"/>
+            <a:ext cx="603504" cy="475488"/>
           </a:xfrm>
           <a:prstGeom prst="rect">
             <a:avLst>
-              <a:gd name="adj" fmla="val 9524"/>
+              <a:gd name="adj" fmla="val 7692"/>
             </a:avLst>
           </a:prstGeom>
           <a:solidFill>
@@ -29663,14 +29738,14 @@
       </p:sp>
       <p:sp>
         <p:nvSpPr>
-          <p:cNvPr id="53" name="Text 51"/>
-          <p:cNvSpPr/>
-          <p:nvPr/>
-        </p:nvSpPr>
-        <p:spPr>
-          <a:xfrm>
-            <a:off x="6870192" y="4169664"/>
-            <a:ext cx="685800" cy="384048"/>
+          <p:cNvPr id="55" name="Text 53"/>
+          <p:cNvSpPr/>
+          <p:nvPr/>
+        </p:nvSpPr>
+        <p:spPr>
+          <a:xfrm>
+            <a:off x="5872111" y="4169664"/>
+            <a:ext cx="603504" cy="475488"/>
           </a:xfrm>
           <a:prstGeom prst="rect">
             <a:avLst/>
@@ -29694,7 +29769,7 @@
                 <a:ea typeface="Trebuchet MS" pitchFamily="34" charset="-122"/>
                 <a:cs typeface="Trebuchet MS" pitchFamily="34" charset="-120"/>
               </a:rPr>
-              <a:t>c</a:t>
+              <a:t>t</a:t>
             </a:r>
             <a:endParaRPr lang="en-US" sz="900" dirty="0"/>
           </a:p>
@@ -29702,18 +29777,18 @@
       </p:sp>
       <p:sp>
         <p:nvSpPr>
-          <p:cNvPr id="54" name="Shape 52"/>
-          <p:cNvSpPr/>
-          <p:nvPr/>
-        </p:nvSpPr>
-        <p:spPr>
-          <a:xfrm>
-            <a:off x="7677912" y="4169664"/>
-            <a:ext cx="685800" cy="384048"/>
+          <p:cNvPr id="56" name="Shape 54"/>
+          <p:cNvSpPr/>
+          <p:nvPr/>
+        </p:nvSpPr>
+        <p:spPr>
+          <a:xfrm>
+            <a:off x="6525491" y="4169664"/>
+            <a:ext cx="603504" cy="475488"/>
           </a:xfrm>
           <a:prstGeom prst="rect">
             <a:avLst>
-              <a:gd name="adj" fmla="val 9524"/>
+              <a:gd name="adj" fmla="val 7692"/>
             </a:avLst>
           </a:prstGeom>
           <a:solidFill>
@@ -29729,14 +29804,14 @@
       </p:sp>
       <p:sp>
         <p:nvSpPr>
-          <p:cNvPr id="55" name="Text 53"/>
-          <p:cNvSpPr/>
-          <p:nvPr/>
-        </p:nvSpPr>
-        <p:spPr>
-          <a:xfrm>
-            <a:off x="7677912" y="4169664"/>
-            <a:ext cx="685800" cy="384048"/>
+          <p:cNvPr id="57" name="Text 55"/>
+          <p:cNvSpPr/>
+          <p:nvPr/>
+        </p:nvSpPr>
+        <p:spPr>
+          <a:xfrm>
+            <a:off x="6525491" y="4169664"/>
+            <a:ext cx="603504" cy="475488"/>
           </a:xfrm>
           <a:prstGeom prst="rect">
             <a:avLst/>
@@ -29760,7 +29835,7 @@
                 <a:ea typeface="Trebuchet MS" pitchFamily="34" charset="-122"/>
                 <a:cs typeface="Trebuchet MS" pitchFamily="34" charset="-120"/>
               </a:rPr>
-              <a:t>le</a:t>
+              <a:t>a</a:t>
             </a:r>
             <a:endParaRPr lang="en-US" sz="900" dirty="0"/>
           </a:p>
@@ -29768,40 +29843,133 @@
       </p:sp>
       <p:sp>
         <p:nvSpPr>
-          <p:cNvPr id="56" name="Text 54"/>
-          <p:cNvSpPr/>
-          <p:nvPr/>
-        </p:nvSpPr>
-        <p:spPr>
-          <a:xfrm>
-            <a:off x="7677912" y="4572000"/>
-            <a:ext cx="685800" cy="219456"/>
-          </a:xfrm>
-          <a:prstGeom prst="rect">
-            <a:avLst/>
-          </a:prstGeom>
-          <a:noFill/>
-          <a:ln/>
-        </p:spPr>
-        <p:txBody>
-          <a:bodyPr wrap="square" lIns="0" tIns="0" rIns="0" bIns="0" rtlCol="0" anchor="t"/>
-          <a:lstStyle/>
-          <a:p>
-            <a:pPr algn="ctr" indent="0" marL="0">
-              <a:buNone/>
-            </a:pPr>
-            <a:r>
-              <a:rPr lang="en-US" sz="750" i="1" dirty="0">
-                <a:solidFill>
-                  <a:srgbClr val="94A3B8"/>
-                </a:solidFill>
-                <a:latin typeface="Calibri" pitchFamily="34" charset="0"/>
-                <a:ea typeface="Calibri" pitchFamily="34" charset="-122"/>
-                <a:cs typeface="Calibri" pitchFamily="34" charset="-120"/>
-              </a:rPr>
-              <a:t>/ul/</a:t>
-            </a:r>
-            <a:endParaRPr lang="en-US" sz="750" dirty="0"/>
+          <p:cNvPr id="58" name="Shape 56"/>
+          <p:cNvSpPr/>
+          <p:nvPr/>
+        </p:nvSpPr>
+        <p:spPr>
+          <a:xfrm>
+            <a:off x="7178871" y="4169664"/>
+            <a:ext cx="603504" cy="475488"/>
+          </a:xfrm>
+          <a:prstGeom prst="rect">
+            <a:avLst>
+              <a:gd name="adj" fmla="val 7692"/>
+            </a:avLst>
+          </a:prstGeom>
+          <a:solidFill>
+            <a:srgbClr val="FFFFFF"/>
+          </a:solidFill>
+          <a:ln w="12700">
+            <a:solidFill>
+              <a:srgbClr val="DB2777"/>
+            </a:solidFill>
+            <a:prstDash val="solid"/>
+          </a:ln>
+        </p:spPr>
+      </p:sp>
+      <p:sp>
+        <p:nvSpPr>
+          <p:cNvPr id="59" name="Text 57"/>
+          <p:cNvSpPr/>
+          <p:nvPr/>
+        </p:nvSpPr>
+        <p:spPr>
+          <a:xfrm>
+            <a:off x="7178871" y="4169664"/>
+            <a:ext cx="603504" cy="475488"/>
+          </a:xfrm>
+          <a:prstGeom prst="rect">
+            <a:avLst/>
+          </a:prstGeom>
+          <a:noFill/>
+          <a:ln/>
+        </p:spPr>
+        <p:txBody>
+          <a:bodyPr wrap="square" lIns="0" tIns="0" rIns="0" bIns="0" rtlCol="0" anchor="ctr"/>
+          <a:lstStyle/>
+          <a:p>
+            <a:pPr algn="ctr" indent="0" marL="0">
+              <a:buNone/>
+            </a:pPr>
+            <a:r>
+              <a:rPr lang="en-US" sz="900" b="1" dirty="0">
+                <a:solidFill>
+                  <a:srgbClr val="9D174D"/>
+                </a:solidFill>
+                <a:latin typeface="Trebuchet MS" pitchFamily="34" charset="0"/>
+                <a:ea typeface="Trebuchet MS" pitchFamily="34" charset="-122"/>
+                <a:cs typeface="Trebuchet MS" pitchFamily="34" charset="-120"/>
+              </a:rPr>
+              <a:t>tch</a:t>
+            </a:r>
+            <a:endParaRPr lang="en-US" sz="900" dirty="0"/>
+          </a:p>
+        </p:txBody>
+      </p:sp>
+      <p:sp>
+        <p:nvSpPr>
+          <p:cNvPr id="60" name="Shape 58"/>
+          <p:cNvSpPr/>
+          <p:nvPr/>
+        </p:nvSpPr>
+        <p:spPr>
+          <a:xfrm>
+            <a:off x="7832252" y="4169664"/>
+            <a:ext cx="603504" cy="475488"/>
+          </a:xfrm>
+          <a:prstGeom prst="rect">
+            <a:avLst>
+              <a:gd name="adj" fmla="val 7692"/>
+            </a:avLst>
+          </a:prstGeom>
+          <a:solidFill>
+            <a:srgbClr val="FFFFFF"/>
+          </a:solidFill>
+          <a:ln w="12700">
+            <a:solidFill>
+              <a:srgbClr val="DB2777"/>
+            </a:solidFill>
+            <a:prstDash val="solid"/>
+          </a:ln>
+        </p:spPr>
+      </p:sp>
+      <p:sp>
+        <p:nvSpPr>
+          <p:cNvPr id="61" name="Text 59"/>
+          <p:cNvSpPr/>
+          <p:nvPr/>
+        </p:nvSpPr>
+        <p:spPr>
+          <a:xfrm>
+            <a:off x="7832252" y="4169664"/>
+            <a:ext cx="603504" cy="475488"/>
+          </a:xfrm>
+          <a:prstGeom prst="rect">
+            <a:avLst/>
+          </a:prstGeom>
+          <a:noFill/>
+          <a:ln/>
+        </p:spPr>
+        <p:txBody>
+          <a:bodyPr wrap="square" lIns="0" tIns="0" rIns="0" bIns="0" rtlCol="0" anchor="ctr"/>
+          <a:lstStyle/>
+          <a:p>
+            <a:pPr algn="ctr" indent="0" marL="0">
+              <a:buNone/>
+            </a:pPr>
+            <a:r>
+              <a:rPr lang="en-US" sz="900" b="1" dirty="0">
+                <a:solidFill>
+                  <a:srgbClr val="9D174D"/>
+                </a:solidFill>
+                <a:latin typeface="Trebuchet MS" pitchFamily="34" charset="0"/>
+                <a:ea typeface="Trebuchet MS" pitchFamily="34" charset="-122"/>
+                <a:cs typeface="Trebuchet MS" pitchFamily="34" charset="-120"/>
+              </a:rPr>
+              <a:t>ed</a:t>
+            </a:r>
+            <a:endParaRPr lang="en-US" sz="900" dirty="0"/>
           </a:p>
         </p:txBody>
       </p:sp>
@@ -30091,7 +30259,7 @@
                 <a:ea typeface="Calibri" pitchFamily="34" charset="-122"/>
                 <a:cs typeface="Calibri" pitchFamily="34" charset="-120"/>
               </a:rPr>
-              <a:t>Word Labs  •  wordlabs.app  •  Prefix: 'semi-' = half, partly, or incomplete</a:t>
+              <a:t>Word Labs  •  wordlabs.app  •  Prefix: 'semi-' = half, partly, or almost</a:t>
             </a:r>
             <a:endParaRPr lang="en-US" sz="800" dirty="0"/>
           </a:p>
@@ -30918,7 +31086,7 @@
                 <a:ea typeface="Calibri" pitchFamily="34" charset="-122"/>
                 <a:cs typeface="Calibri" pitchFamily="34" charset="-120"/>
               </a:rPr>
-              <a:t>Word Labs  •  wordlabs.app  •  Prefix: 'semi-' = half, partly, or incomplete</a:t>
+              <a:t>Word Labs  •  wordlabs.app  •  Prefix: 'semi-' = half, partly, or almost</a:t>
             </a:r>
             <a:endParaRPr lang="en-US" sz="800" dirty="0"/>
           </a:p>
@@ -31258,11 +31426,11 @@
             </a:avLst>
           </a:prstGeom>
           <a:solidFill>
-            <a:srgbClr val="FCE7F3"/>
+            <a:srgbClr val="DDD6FE"/>
           </a:solidFill>
           <a:ln w="19050">
             <a:solidFill>
-              <a:srgbClr val="DB2777"/>
+              <a:srgbClr val="7C3AED"/>
             </a:solidFill>
             <a:prstDash val="solid"/>
           </a:ln>
@@ -31302,7 +31470,7 @@
             <a:r>
               <a:rPr lang="en-US" sz="1300" b="1" dirty="0">
                 <a:solidFill>
-                  <a:srgbClr val="9D174D"/>
+                  <a:srgbClr val="4C1D95"/>
                 </a:solidFill>
                 <a:latin typeface="Trebuchet MS" pitchFamily="34" charset="0"/>
                 <a:ea typeface="Trebuchet MS" pitchFamily="34" charset="-122"/>
@@ -31347,7 +31515,7 @@
                 <a:ea typeface="Calibri" pitchFamily="34" charset="-122"/>
                 <a:cs typeface="Calibri" pitchFamily="34" charset="-120"/>
               </a:rPr>
-              <a:t>a punctuation mark using two dots</a:t>
+              <a:t>punctuation mark with two dots</a:t>
             </a:r>
             <a:endParaRPr lang="en-US" sz="850" dirty="0"/>
           </a:p>
@@ -31903,7 +32071,7 @@
                 <a:ea typeface="Calibri" pitchFamily="34" charset="-122"/>
                 <a:cs typeface="Calibri" pitchFamily="34" charset="-120"/>
               </a:rPr>
-              <a:t>Word Labs  •  wordlabs.app  •  Prefix: 'semi-' = half, partly, or incomplete</a:t>
+              <a:t>Word Labs  •  wordlabs.app  •  Prefix: 'semi-' = half, partly, or almost</a:t>
             </a:r>
             <a:endParaRPr lang="en-US" sz="800" dirty="0"/>
           </a:p>
@@ -32243,11 +32411,11 @@
             </a:avLst>
           </a:prstGeom>
           <a:solidFill>
-            <a:srgbClr val="FCE7F3"/>
+            <a:srgbClr val="DDD6FE"/>
           </a:solidFill>
           <a:ln w="19050">
             <a:solidFill>
-              <a:srgbClr val="DB2777"/>
+              <a:srgbClr val="7C3AED"/>
             </a:solidFill>
             <a:prstDash val="solid"/>
           </a:ln>
@@ -32287,7 +32455,7 @@
             <a:r>
               <a:rPr lang="en-US" sz="1300" b="1" dirty="0">
                 <a:solidFill>
-                  <a:srgbClr val="9D174D"/>
+                  <a:srgbClr val="4C1D95"/>
                 </a:solidFill>
                 <a:latin typeface="Trebuchet MS" pitchFamily="34" charset="0"/>
                 <a:ea typeface="Trebuchet MS" pitchFamily="34" charset="-122"/>
@@ -32332,7 +32500,7 @@
                 <a:ea typeface="Calibri" pitchFamily="34" charset="-122"/>
                 <a:cs typeface="Calibri" pitchFamily="34" charset="-120"/>
               </a:rPr>
-              <a:t>a punctuation mark using two dots</a:t>
+              <a:t>punctuation mark with two dots</a:t>
             </a:r>
             <a:endParaRPr lang="en-US" sz="850" dirty="0"/>
           </a:p>
@@ -33230,7 +33398,7 @@
                 <a:ea typeface="Calibri" pitchFamily="34" charset="-122"/>
                 <a:cs typeface="Calibri" pitchFamily="34" charset="-120"/>
               </a:rPr>
-              <a:t>Word Labs  •  wordlabs.app  •  Prefix: 'semi-' = half, partly, or incomplete</a:t>
+              <a:t>Word Labs  •  wordlabs.app  •  Prefix: 'semi-' = half, partly, or almost</a:t>
             </a:r>
             <a:endParaRPr lang="en-US" sz="800" dirty="0"/>
           </a:p>
@@ -33570,11 +33738,11 @@
             </a:avLst>
           </a:prstGeom>
           <a:solidFill>
-            <a:srgbClr val="FCE7F3"/>
+            <a:srgbClr val="DDD6FE"/>
           </a:solidFill>
           <a:ln w="19050">
             <a:solidFill>
-              <a:srgbClr val="DB2777"/>
+              <a:srgbClr val="7C3AED"/>
             </a:solidFill>
             <a:prstDash val="solid"/>
           </a:ln>
@@ -33614,7 +33782,7 @@
             <a:r>
               <a:rPr lang="en-US" sz="1300" b="1" dirty="0">
                 <a:solidFill>
-                  <a:srgbClr val="9D174D"/>
+                  <a:srgbClr val="4C1D95"/>
                 </a:solidFill>
                 <a:latin typeface="Trebuchet MS" pitchFamily="34" charset="0"/>
                 <a:ea typeface="Trebuchet MS" pitchFamily="34" charset="-122"/>
@@ -33659,7 +33827,7 @@
                 <a:ea typeface="Calibri" pitchFamily="34" charset="-122"/>
                 <a:cs typeface="Calibri" pitchFamily="34" charset="-120"/>
               </a:rPr>
-              <a:t>a punctuation mark using two dots</a:t>
+              <a:t>punctuation mark with two dots</a:t>
             </a:r>
             <a:endParaRPr lang="en-US" sz="850" dirty="0"/>
           </a:p>
@@ -34214,11 +34382,11 @@
         <p:spPr>
           <a:xfrm>
             <a:off x="1874520" y="4096512"/>
-            <a:ext cx="6903720" cy="804672"/>
+            <a:ext cx="6903720" cy="658368"/>
           </a:xfrm>
           <a:prstGeom prst="rect">
             <a:avLst>
-              <a:gd name="adj" fmla="val 6818"/>
+              <a:gd name="adj" fmla="val 8333"/>
             </a:avLst>
           </a:prstGeom>
           <a:solidFill>
@@ -34241,11 +34409,11 @@
         <p:spPr>
           <a:xfrm>
             <a:off x="2023872" y="4169664"/>
-            <a:ext cx="685800" cy="384048"/>
+            <a:ext cx="685800" cy="475488"/>
           </a:xfrm>
           <a:prstGeom prst="rect">
             <a:avLst>
-              <a:gd name="adj" fmla="val 9524"/>
+              <a:gd name="adj" fmla="val 7692"/>
             </a:avLst>
           </a:prstGeom>
           <a:solidFill>
@@ -34268,7 +34436,7 @@
         <p:spPr>
           <a:xfrm>
             <a:off x="2023872" y="4169664"/>
-            <a:ext cx="685800" cy="384048"/>
+            <a:ext cx="685800" cy="475488"/>
           </a:xfrm>
           <a:prstGeom prst="rect">
             <a:avLst/>
@@ -34307,11 +34475,11 @@
         <p:spPr>
           <a:xfrm>
             <a:off x="2831592" y="4169664"/>
-            <a:ext cx="685800" cy="384048"/>
+            <a:ext cx="685800" cy="475488"/>
           </a:xfrm>
           <a:prstGeom prst="rect">
             <a:avLst>
-              <a:gd name="adj" fmla="val 9524"/>
+              <a:gd name="adj" fmla="val 7692"/>
             </a:avLst>
           </a:prstGeom>
           <a:solidFill>
@@ -34334,7 +34502,7 @@
         <p:spPr>
           <a:xfrm>
             <a:off x="2831592" y="4169664"/>
-            <a:ext cx="685800" cy="384048"/>
+            <a:ext cx="685800" cy="475488"/>
           </a:xfrm>
           <a:prstGeom prst="rect">
             <a:avLst/>
@@ -34373,11 +34541,11 @@
         <p:spPr>
           <a:xfrm>
             <a:off x="3639312" y="4169664"/>
-            <a:ext cx="685800" cy="384048"/>
+            <a:ext cx="685800" cy="475488"/>
           </a:xfrm>
           <a:prstGeom prst="rect">
             <a:avLst>
-              <a:gd name="adj" fmla="val 9524"/>
+              <a:gd name="adj" fmla="val 7692"/>
             </a:avLst>
           </a:prstGeom>
           <a:solidFill>
@@ -34400,7 +34568,7 @@
         <p:spPr>
           <a:xfrm>
             <a:off x="3639312" y="4169664"/>
-            <a:ext cx="685800" cy="384048"/>
+            <a:ext cx="685800" cy="475488"/>
           </a:xfrm>
           <a:prstGeom prst="rect">
             <a:avLst/>
@@ -34439,11 +34607,11 @@
         <p:spPr>
           <a:xfrm>
             <a:off x="4447032" y="4169664"/>
-            <a:ext cx="685800" cy="384048"/>
+            <a:ext cx="685800" cy="475488"/>
           </a:xfrm>
           <a:prstGeom prst="rect">
             <a:avLst>
-              <a:gd name="adj" fmla="val 9524"/>
+              <a:gd name="adj" fmla="val 7692"/>
             </a:avLst>
           </a:prstGeom>
           <a:solidFill>
@@ -34466,7 +34634,7 @@
         <p:spPr>
           <a:xfrm>
             <a:off x="4447032" y="4169664"/>
-            <a:ext cx="685800" cy="384048"/>
+            <a:ext cx="685800" cy="475488"/>
           </a:xfrm>
           <a:prstGeom prst="rect">
             <a:avLst/>
@@ -34505,11 +34673,11 @@
         <p:spPr>
           <a:xfrm>
             <a:off x="5254752" y="4169664"/>
-            <a:ext cx="685800" cy="384048"/>
+            <a:ext cx="685800" cy="475488"/>
           </a:xfrm>
           <a:prstGeom prst="rect">
             <a:avLst>
-              <a:gd name="adj" fmla="val 9524"/>
+              <a:gd name="adj" fmla="val 7692"/>
             </a:avLst>
           </a:prstGeom>
           <a:solidFill>
@@ -34532,7 +34700,7 @@
         <p:spPr>
           <a:xfrm>
             <a:off x="5254752" y="4169664"/>
-            <a:ext cx="685800" cy="384048"/>
+            <a:ext cx="685800" cy="475488"/>
           </a:xfrm>
           <a:prstGeom prst="rect">
             <a:avLst/>
@@ -34564,57 +34732,18 @@
       </p:sp>
       <p:sp>
         <p:nvSpPr>
-          <p:cNvPr id="49" name="Text 47"/>
-          <p:cNvSpPr/>
-          <p:nvPr/>
-        </p:nvSpPr>
-        <p:spPr>
-          <a:xfrm>
-            <a:off x="5254752" y="4572000"/>
-            <a:ext cx="685800" cy="219456"/>
-          </a:xfrm>
-          <a:prstGeom prst="rect">
-            <a:avLst/>
-          </a:prstGeom>
-          <a:noFill/>
-          <a:ln/>
-        </p:spPr>
-        <p:txBody>
-          <a:bodyPr wrap="square" lIns="0" tIns="0" rIns="0" bIns="0" rtlCol="0" anchor="t"/>
-          <a:lstStyle/>
-          <a:p>
-            <a:pPr algn="ctr" indent="0" marL="0">
-              <a:buNone/>
-            </a:pPr>
-            <a:r>
-              <a:rPr lang="en-US" sz="750" i="1" dirty="0">
-                <a:solidFill>
-                  <a:srgbClr val="94A3B8"/>
-                </a:solidFill>
-                <a:latin typeface="Calibri" pitchFamily="34" charset="0"/>
-                <a:ea typeface="Calibri" pitchFamily="34" charset="-122"/>
-                <a:cs typeface="Calibri" pitchFamily="34" charset="-120"/>
-              </a:rPr>
-              <a:t>/s/</a:t>
-            </a:r>
-            <a:endParaRPr lang="en-US" sz="750" dirty="0"/>
-          </a:p>
-        </p:txBody>
-      </p:sp>
-      <p:sp>
-        <p:nvSpPr>
-          <p:cNvPr id="50" name="Shape 48"/>
+          <p:cNvPr id="49" name="Shape 47"/>
           <p:cNvSpPr/>
           <p:nvPr/>
         </p:nvSpPr>
         <p:spPr>
           <a:xfrm>
             <a:off x="6062472" y="4169664"/>
-            <a:ext cx="685800" cy="384048"/>
+            <a:ext cx="685800" cy="475488"/>
           </a:xfrm>
           <a:prstGeom prst="rect">
             <a:avLst>
-              <a:gd name="adj" fmla="val 9524"/>
+              <a:gd name="adj" fmla="val 7692"/>
             </a:avLst>
           </a:prstGeom>
           <a:solidFill>
@@ -34630,14 +34759,14 @@
       </p:sp>
       <p:sp>
         <p:nvSpPr>
-          <p:cNvPr id="51" name="Text 49"/>
+          <p:cNvPr id="50" name="Text 48"/>
           <p:cNvSpPr/>
           <p:nvPr/>
         </p:nvSpPr>
         <p:spPr>
           <a:xfrm>
             <a:off x="6062472" y="4169664"/>
-            <a:ext cx="685800" cy="384048"/>
+            <a:ext cx="685800" cy="475488"/>
           </a:xfrm>
           <a:prstGeom prst="rect">
             <a:avLst/>
@@ -34669,18 +34798,18 @@
       </p:sp>
       <p:sp>
         <p:nvSpPr>
-          <p:cNvPr id="52" name="Shape 50"/>
+          <p:cNvPr id="51" name="Shape 49"/>
           <p:cNvSpPr/>
           <p:nvPr/>
         </p:nvSpPr>
         <p:spPr>
           <a:xfrm>
             <a:off x="6870192" y="4169664"/>
-            <a:ext cx="685800" cy="384048"/>
+            <a:ext cx="685800" cy="475488"/>
           </a:xfrm>
           <a:prstGeom prst="rect">
             <a:avLst>
-              <a:gd name="adj" fmla="val 9524"/>
+              <a:gd name="adj" fmla="val 7692"/>
             </a:avLst>
           </a:prstGeom>
           <a:solidFill>
@@ -34696,14 +34825,14 @@
       </p:sp>
       <p:sp>
         <p:nvSpPr>
-          <p:cNvPr id="53" name="Text 51"/>
+          <p:cNvPr id="52" name="Text 50"/>
           <p:cNvSpPr/>
           <p:nvPr/>
         </p:nvSpPr>
         <p:spPr>
           <a:xfrm>
             <a:off x="6870192" y="4169664"/>
-            <a:ext cx="685800" cy="384048"/>
+            <a:ext cx="685800" cy="475488"/>
           </a:xfrm>
           <a:prstGeom prst="rect">
             <a:avLst/>
@@ -34735,18 +34864,18 @@
       </p:sp>
       <p:sp>
         <p:nvSpPr>
-          <p:cNvPr id="54" name="Shape 52"/>
+          <p:cNvPr id="53" name="Shape 51"/>
           <p:cNvSpPr/>
           <p:nvPr/>
         </p:nvSpPr>
         <p:spPr>
           <a:xfrm>
             <a:off x="7677912" y="4169664"/>
-            <a:ext cx="685800" cy="384048"/>
+            <a:ext cx="685800" cy="475488"/>
           </a:xfrm>
           <a:prstGeom prst="rect">
             <a:avLst>
-              <a:gd name="adj" fmla="val 9524"/>
+              <a:gd name="adj" fmla="val 7692"/>
             </a:avLst>
           </a:prstGeom>
           <a:solidFill>
@@ -34762,14 +34891,14 @@
       </p:sp>
       <p:sp>
         <p:nvSpPr>
-          <p:cNvPr id="55" name="Text 53"/>
+          <p:cNvPr id="54" name="Text 52"/>
           <p:cNvSpPr/>
           <p:nvPr/>
         </p:nvSpPr>
         <p:spPr>
           <a:xfrm>
             <a:off x="7677912" y="4169664"/>
-            <a:ext cx="685800" cy="384048"/>
+            <a:ext cx="685800" cy="475488"/>
           </a:xfrm>
           <a:prstGeom prst="rect">
             <a:avLst/>
@@ -35085,7 +35214,7 @@
                 <a:ea typeface="Calibri" pitchFamily="34" charset="-122"/>
                 <a:cs typeface="Calibri" pitchFamily="34" charset="-120"/>
               </a:rPr>
-              <a:t>Word Labs  •  wordlabs.app  •  Prefix: 'semi-' = half, partly, or incomplete</a:t>
+              <a:t>Word Labs  •  wordlabs.app  •  Prefix: 'semi-' = half, partly, or almost</a:t>
             </a:r>
             <a:endParaRPr lang="en-US" sz="800" dirty="0"/>
           </a:p>
@@ -36254,7 +36383,7 @@
                 <a:ea typeface="Calibri" pitchFamily="34" charset="-122"/>
                 <a:cs typeface="Calibri" pitchFamily="34" charset="-120"/>
               </a:rPr>
-              <a:t>Word Labs  •  wordlabs.app  •  Prefix: 'semi-' = half, partly, or incomplete</a:t>
+              <a:t>Word Labs  •  wordlabs.app  •  Prefix: 'semi-' = half, partly, or almost</a:t>
             </a:r>
             <a:endParaRPr lang="en-US" sz="800" dirty="0"/>
           </a:p>
@@ -36836,7 +36965,7 @@
                 <a:ea typeface="Trebuchet MS" pitchFamily="34" charset="-122"/>
                 <a:cs typeface="Trebuchet MS" pitchFamily="34" charset="-120"/>
               </a:rPr>
-              <a:t>-s</a:t>
+              <a:t>-ing</a:t>
             </a:r>
             <a:endParaRPr lang="en-US" sz="1300" dirty="0"/>
           </a:p>
@@ -36989,7 +37118,7 @@
                 <a:ea typeface="Trebuchet MS" pitchFamily="34" charset="-122"/>
                 <a:cs typeface="Trebuchet MS" pitchFamily="34" charset="-120"/>
               </a:rPr>
-              <a:t>-ing</a:t>
+              <a:t>-s</a:t>
             </a:r>
             <a:endParaRPr lang="en-US" sz="1300" dirty="0"/>
           </a:p>
@@ -37730,7 +37859,7 @@
                 <a:ea typeface="Trebuchet MS" pitchFamily="34" charset="-122"/>
                 <a:cs typeface="Trebuchet MS" pitchFamily="34" charset="-120"/>
               </a:rPr>
-              <a:t>semitone</a:t>
+              <a:t>semiprecious</a:t>
             </a:r>
             <a:endParaRPr lang="en-US" sz="1200" dirty="0"/>
           </a:p>
@@ -37796,7 +37925,7 @@
                 <a:ea typeface="Trebuchet MS" pitchFamily="34" charset="-122"/>
                 <a:cs typeface="Trebuchet MS" pitchFamily="34" charset="-120"/>
               </a:rPr>
-              <a:t>semiskilled</a:t>
+              <a:t>semitrailer</a:t>
             </a:r>
             <a:endParaRPr lang="en-US" sz="1200" dirty="0"/>
           </a:p>
@@ -37862,7 +37991,7 @@
                 <a:ea typeface="Trebuchet MS" pitchFamily="34" charset="-122"/>
                 <a:cs typeface="Trebuchet MS" pitchFamily="34" charset="-120"/>
               </a:rPr>
-              <a:t>semiaquatic</a:t>
+              <a:t>semiformal</a:t>
             </a:r>
             <a:endParaRPr lang="en-US" sz="1200" dirty="0"/>
           </a:p>
@@ -38154,7 +38283,7 @@
                 <a:ea typeface="Calibri" pitchFamily="34" charset="-122"/>
                 <a:cs typeface="Calibri" pitchFamily="34" charset="-120"/>
               </a:rPr>
-              <a:t>Word Labs  •  wordlabs.app  •  Prefix: 'semi-' = half, partly, or incomplete</a:t>
+              <a:t>Word Labs  •  wordlabs.app  •  Prefix: 'semi-' = half, partly, or almost</a:t>
             </a:r>
             <a:endParaRPr lang="en-US" sz="800" dirty="0"/>
           </a:p>
@@ -38318,7 +38447,7 @@
                 <a:ea typeface="Calibri" pitchFamily="34" charset="-122"/>
                 <a:cs typeface="Calibri" pitchFamily="34" charset="-120"/>
               </a:rPr>
-              <a:t>A meaningful word part added to the beginning of a root to change its meaning. The prefix 'semi-' means 'half, partly, or incomplete'.</a:t>
+              <a:t>A meaningful word part added to the beginning of a root to change its meaning. The prefix 'semi-' means 'half, partly, or almost'.</a:t>
             </a:r>
             <a:endParaRPr lang="en-US" sz="1350" dirty="0"/>
           </a:p>
@@ -38938,7 +39067,7 @@
                 <a:ea typeface="Calibri" pitchFamily="34" charset="-122"/>
                 <a:cs typeface="Calibri" pitchFamily="34" charset="-120"/>
               </a:rPr>
-              <a:t>Word Labs  •  wordlabs.app  •  Prefix: 'semi-' = half, partly, or incomplete</a:t>
+              <a:t>Word Labs  •  wordlabs.app  •  Prefix: 'semi-' = half, partly, or almost</a:t>
             </a:r>
             <a:endParaRPr lang="en-US" sz="800" dirty="0"/>
           </a:p>
@@ -39050,7 +39179,7 @@
                 <a:ea typeface="Calibri" pitchFamily="34" charset="-122"/>
                 <a:cs typeface="Calibri" pitchFamily="34" charset="-120"/>
               </a:rPr>
-              <a:t>1.  The prefix 'semi-' means half or partly.</a:t>
+              <a:t>1.  'Semi-' always means something is completely finished or whole.</a:t>
             </a:r>
             <a:endParaRPr lang="en-US" sz="1300" dirty="0"/>
           </a:p>
@@ -39073,11 +39202,11 @@
             </a:avLst>
           </a:prstGeom>
           <a:solidFill>
-            <a:srgbClr val="DCFCE7"/>
-          </a:solidFill>
-          <a:ln w="12700">
-            <a:solidFill>
-              <a:srgbClr val="16A34A"/>
+            <a:srgbClr val="FEE2E2"/>
+          </a:solidFill>
+          <a:ln w="12700">
+            <a:solidFill>
+              <a:srgbClr val="DC2626"/>
             </a:solidFill>
             <a:prstDash val="solid"/>
           </a:ln>
@@ -39110,13 +39239,13 @@
             <a:r>
               <a:rPr lang="en-US" sz="1100" b="1" dirty="0">
                 <a:solidFill>
-                  <a:srgbClr val="16A34A"/>
+                  <a:srgbClr val="DC2626"/>
                 </a:solidFill>
                 <a:latin typeface="Trebuchet MS" pitchFamily="34" charset="0"/>
                 <a:ea typeface="Trebuchet MS" pitchFamily="34" charset="-122"/>
                 <a:cs typeface="Trebuchet MS" pitchFamily="34" charset="-120"/>
               </a:rPr>
-              <a:t>TRUE</a:t>
+              <a:t>FALSE</a:t>
             </a:r>
             <a:endParaRPr lang="en-US" sz="1100" dirty="0"/>
           </a:p>
@@ -39189,7 +39318,7 @@
                 <a:ea typeface="Calibri" pitchFamily="34" charset="-122"/>
                 <a:cs typeface="Calibri" pitchFamily="34" charset="-120"/>
               </a:rPr>
-              <a:t>2.  A semicircle is a full, complete circle.</a:t>
+              <a:t>2.  A semifinal happens before the final round of a competition.</a:t>
             </a:r>
             <a:endParaRPr lang="en-US" sz="1300" dirty="0"/>
           </a:p>
@@ -39212,11 +39341,11 @@
             </a:avLst>
           </a:prstGeom>
           <a:solidFill>
-            <a:srgbClr val="FEE2E2"/>
-          </a:solidFill>
-          <a:ln w="12700">
-            <a:solidFill>
-              <a:srgbClr val="DC2626"/>
+            <a:srgbClr val="DCFCE7"/>
+          </a:solidFill>
+          <a:ln w="12700">
+            <a:solidFill>
+              <a:srgbClr val="16A34A"/>
             </a:solidFill>
             <a:prstDash val="solid"/>
           </a:ln>
@@ -39249,13 +39378,13 @@
             <a:r>
               <a:rPr lang="en-US" sz="1100" b="1" dirty="0">
                 <a:solidFill>
-                  <a:srgbClr val="DC2626"/>
+                  <a:srgbClr val="16A34A"/>
                 </a:solidFill>
                 <a:latin typeface="Trebuchet MS" pitchFamily="34" charset="0"/>
                 <a:ea typeface="Trebuchet MS" pitchFamily="34" charset="-122"/>
                 <a:cs typeface="Trebuchet MS" pitchFamily="34" charset="-120"/>
               </a:rPr>
-              <a:t>FALSE</a:t>
+              <a:t>TRUE</a:t>
             </a:r>
             <a:endParaRPr lang="en-US" sz="1100" dirty="0"/>
           </a:p>
@@ -39328,7 +39457,7 @@
                 <a:ea typeface="Calibri" pitchFamily="34" charset="-122"/>
                 <a:cs typeface="Calibri" pitchFamily="34" charset="-120"/>
               </a:rPr>
-              <a:t>3.  The prefix 'semi-' comes from Latin.</a:t>
+              <a:t>3.  A semicircle is half of a full circle.</a:t>
             </a:r>
             <a:endParaRPr lang="en-US" sz="1300" dirty="0"/>
           </a:p>
@@ -39467,7 +39596,7 @@
                 <a:ea typeface="Calibri" pitchFamily="34" charset="-122"/>
                 <a:cs typeface="Calibri" pitchFamily="34" charset="-120"/>
               </a:rPr>
-              <a:t>4.  A semifinal happens before the final round of a competition.</a:t>
+              <a:t>4.  A semidetached house is joined to another house on one side.</a:t>
             </a:r>
             <a:endParaRPr lang="en-US" sz="1300" dirty="0"/>
           </a:p>
@@ -39606,7 +39735,7 @@
                 <a:ea typeface="Calibri" pitchFamily="34" charset="-122"/>
                 <a:cs typeface="Calibri" pitchFamily="34" charset="-120"/>
               </a:rPr>
-              <a:t>5.  Words with 'semi-' always describe something that is completely finished.</a:t>
+              <a:t>5.  The prefix 'semi-' means 'three times' or 'triple'.</a:t>
             </a:r>
             <a:endParaRPr lang="en-US" sz="1300" dirty="0"/>
           </a:p>
@@ -39964,7 +40093,7 @@
                 <a:ea typeface="Calibri" pitchFamily="34" charset="-122"/>
                 <a:cs typeface="Calibri" pitchFamily="34" charset="-120"/>
               </a:rPr>
-              <a:t>Word Labs  •  wordlabs.app  •  Prefix: 'semi-' = half, partly, or incomplete</a:t>
+              <a:t>Word Labs  •  wordlabs.app  •  Prefix: 'semi-' = half, partly, or almost</a:t>
             </a:r>
             <a:endParaRPr lang="en-US" sz="800" dirty="0"/>
           </a:p>
@@ -40101,7 +40230,7 @@
                 <a:ea typeface="Trebuchet MS" pitchFamily="34" charset="-122"/>
                 <a:cs typeface="Trebuchet MS" pitchFamily="34" charset="-120"/>
               </a:rPr>
-              <a:t>half, partly, or incomplete</a:t>
+              <a:t>half, partly, or almost</a:t>
             </a:r>
             <a:endParaRPr lang="en-US" sz="2000" dirty="0"/>
           </a:p>
@@ -40575,7 +40704,7 @@
                 <a:ea typeface="Trebuchet MS" pitchFamily="34" charset="-122"/>
                 <a:cs typeface="Trebuchet MS" pitchFamily="34" charset="-120"/>
               </a:rPr>
-              <a:t>semitone</a:t>
+              <a:t>semiprecious</a:t>
             </a:r>
             <a:endParaRPr lang="en-US" sz="1300" dirty="0"/>
           </a:p>
@@ -40641,7 +40770,7 @@
                 <a:ea typeface="Trebuchet MS" pitchFamily="34" charset="-122"/>
                 <a:cs typeface="Trebuchet MS" pitchFamily="34" charset="-120"/>
               </a:rPr>
-              <a:t>semiskilled</a:t>
+              <a:t>semitrailer</a:t>
             </a:r>
             <a:endParaRPr lang="en-US" sz="1300" dirty="0"/>
           </a:p>
@@ -40933,7 +41062,7 @@
                 <a:ea typeface="Calibri" pitchFamily="34" charset="-122"/>
                 <a:cs typeface="Calibri" pitchFamily="34" charset="-120"/>
               </a:rPr>
-              <a:t>Word Labs  •  wordlabs.app  •  Prefix: 'semi-' = half, partly, or incomplete</a:t>
+              <a:t>Word Labs  •  wordlabs.app  •  Prefix: 'semi-' = half, partly, or almost</a:t>
             </a:r>
             <a:endParaRPr lang="en-US" sz="800" dirty="0"/>
           </a:p>
@@ -41515,7 +41644,7 @@
                 <a:ea typeface="Trebuchet MS" pitchFamily="34" charset="-122"/>
                 <a:cs typeface="Trebuchet MS" pitchFamily="34" charset="-120"/>
               </a:rPr>
-              <a:t>-s</a:t>
+              <a:t>-ing</a:t>
             </a:r>
             <a:endParaRPr lang="en-US" sz="1300" dirty="0"/>
           </a:p>
@@ -41668,7 +41797,7 @@
                 <a:ea typeface="Trebuchet MS" pitchFamily="34" charset="-122"/>
                 <a:cs typeface="Trebuchet MS" pitchFamily="34" charset="-120"/>
               </a:rPr>
-              <a:t>-ing</a:t>
+              <a:t>-s</a:t>
             </a:r>
             <a:endParaRPr lang="en-US" sz="1300" dirty="0"/>
           </a:p>
@@ -42707,7 +42836,7 @@
                 <a:ea typeface="Calibri" pitchFamily="34" charset="-122"/>
                 <a:cs typeface="Calibri" pitchFamily="34" charset="-120"/>
               </a:rPr>
-              <a:t>Word Labs  •  wordlabs.app  •  Prefix: 'semi-' = half, partly, or incomplete</a:t>
+              <a:t>Word Labs  •  wordlabs.app  •  Prefix: 'semi-' = half, partly, or almost</a:t>
             </a:r>
             <a:endParaRPr lang="en-US" sz="800" dirty="0"/>
           </a:p>
@@ -42885,7 +43014,7 @@
                 <a:ea typeface="Calibri" pitchFamily="34" charset="-122"/>
                 <a:cs typeface="Calibri" pitchFamily="34" charset="-120"/>
               </a:rPr>
-              <a:t>Having some training or skill for a job, but not fully qualified.</a:t>
+              <a:t>A large truck where the back section has no front wheels and connects to the cab section.</a:t>
             </a:r>
             <a:endParaRPr lang="en-US" sz="1200" dirty="0"/>
           </a:p>
@@ -43024,7 +43153,7 @@
                 <a:ea typeface="Calibri" pitchFamily="34" charset="-122"/>
                 <a:cs typeface="Calibri" pitchFamily="34" charset="-120"/>
               </a:rPr>
-              <a:t>A house that is joined to one other house on one side, sharing a wall.</a:t>
+              <a:t>A house that is joined to one other house on one side but is separate on the other side.</a:t>
             </a:r>
             <a:endParaRPr lang="en-US" sz="1200" dirty="0"/>
           </a:p>
@@ -43163,7 +43292,7 @@
                 <a:ea typeface="Calibri" pitchFamily="34" charset="-122"/>
                 <a:cs typeface="Calibri" pitchFamily="34" charset="-120"/>
               </a:rPr>
-              <a:t>A material that only partly conducts electricity, used inside computers and phones.</a:t>
+              <a:t>A material that only partly conducts electricity, used in computers and phones.</a:t>
             </a:r>
             <a:endParaRPr lang="en-US" sz="1200" dirty="0"/>
           </a:p>
@@ -43302,7 +43431,7 @@
                 <a:ea typeface="Calibri" pitchFamily="34" charset="-122"/>
                 <a:cs typeface="Calibri" pitchFamily="34" charset="-120"/>
               </a:rPr>
-              <a:t>The smallest step between two notes in music — half of a full tone.</a:t>
+              <a:t>Describing a gem or stone that is valuable, but not as rare or expensive as a precious stone like a diamond.</a:t>
             </a:r>
             <a:endParaRPr lang="en-US" sz="1200" dirty="0"/>
           </a:p>
@@ -43441,7 +43570,7 @@
                 <a:ea typeface="Calibri" pitchFamily="34" charset="-122"/>
                 <a:cs typeface="Calibri" pitchFamily="34" charset="-120"/>
               </a:rPr>
-              <a:t>A punctuation mark (;) that is a mix between a comma and a full stop, used to join related sentences.</a:t>
+              <a:t>A punctuation mark (;) that is stronger than a comma but not as final as a full stop.</a:t>
             </a:r>
             <a:endParaRPr lang="en-US" sz="1200" dirty="0"/>
           </a:p>
@@ -43514,7 +43643,7 @@
                 <a:ea typeface="Trebuchet MS" pitchFamily="34" charset="-122"/>
                 <a:cs typeface="Trebuchet MS" pitchFamily="34" charset="-120"/>
               </a:rPr>
-              <a:t>semitone</a:t>
+              <a:t>semiprecious</a:t>
             </a:r>
             <a:endParaRPr lang="en-US" sz="1200" dirty="0"/>
           </a:p>
@@ -43580,7 +43709,7 @@
                 <a:ea typeface="Calibri" pitchFamily="34" charset="-122"/>
                 <a:cs typeface="Calibri" pitchFamily="34" charset="-120"/>
               </a:rPr>
-              <a:t>Half of a circle — like the shape of a rainbow or a half-moon.</a:t>
+              <a:t>A half circle — exactly one half of a round shape.</a:t>
             </a:r>
             <a:endParaRPr lang="en-US" sz="1200" dirty="0"/>
           </a:p>
@@ -43653,7 +43782,7 @@
                 <a:ea typeface="Trebuchet MS" pitchFamily="34" charset="-122"/>
                 <a:cs typeface="Trebuchet MS" pitchFamily="34" charset="-120"/>
               </a:rPr>
-              <a:t>semiskilled</a:t>
+              <a:t>semitrailer</a:t>
             </a:r>
             <a:endParaRPr lang="en-US" sz="1200" dirty="0"/>
           </a:p>
@@ -43719,7 +43848,7 @@
                 <a:ea typeface="Calibri" pitchFamily="34" charset="-122"/>
                 <a:cs typeface="Calibri" pitchFamily="34" charset="-120"/>
               </a:rPr>
-              <a:t>The round before the final in a competition, where winners go on to play in the last round.</a:t>
+              <a:t>The round of a competition just before the final, where the last two winners are decided.</a:t>
             </a:r>
             <a:endParaRPr lang="en-US" sz="1200" dirty="0"/>
           </a:p>
@@ -44011,7 +44140,7 @@
                 <a:ea typeface="Calibri" pitchFamily="34" charset="-122"/>
                 <a:cs typeface="Calibri" pitchFamily="34" charset="-120"/>
               </a:rPr>
-              <a:t>Word Labs  •  wordlabs.app  •  Prefix: 'semi-' = half, partly, or incomplete</a:t>
+              <a:t>Word Labs  •  wordlabs.app  •  Prefix: 'semi-' = half, partly, or almost</a:t>
             </a:r>
             <a:endParaRPr lang="en-US" sz="800" dirty="0"/>
           </a:p>
@@ -44214,7 +44343,7 @@
                 <a:ea typeface="Calibri" pitchFamily="34" charset="-122"/>
                 <a:cs typeface="Calibri" pitchFamily="34" charset="-120"/>
               </a:rPr>
-              <a:t>The students used a ruler to draw a perfect semicircle on their art project.</a:t>
+              <a:t>The students arranged their desks into a semicircle so everyone could see the board.</a:t>
             </a:r>
             <a:endParaRPr lang="en-US" sz="1500" dirty="0"/>
           </a:p>
@@ -44378,7 +44507,7 @@
                 <a:ea typeface="Calibri" pitchFamily="34" charset="-122"/>
                 <a:cs typeface="Calibri" pitchFamily="34" charset="-120"/>
               </a:rPr>
-              <a:t>Our school football team made it to the semifinal of the regional tournament.</a:t>
+              <a:t>Our school soccer team made it to the semifinal of the regional tournament.</a:t>
             </a:r>
             <a:endParaRPr lang="en-US" sz="1500" dirty="0"/>
           </a:p>
@@ -44542,7 +44671,7 @@
                 <a:ea typeface="Calibri" pitchFamily="34" charset="-122"/>
                 <a:cs typeface="Calibri" pitchFamily="34" charset="-120"/>
               </a:rPr>
-              <a:t>The teacher explained how to use a semicolon to connect two related ideas in a sentence.</a:t>
+              <a:t>Mia learned how to use a semicolon correctly in her creative writing piece.</a:t>
             </a:r>
             <a:endParaRPr lang="en-US" sz="1500" dirty="0"/>
           </a:p>

--- a/output/wordlabs-semi-prefix-3day.pptx
+++ b/output/wordlabs-semi-prefix-3day.pptx
@@ -29321,8 +29321,8 @@
         </p:nvSpPr>
         <p:spPr>
           <a:xfrm>
-            <a:off x="1951828" y="4169664"/>
-            <a:ext cx="603504" cy="475488"/>
+            <a:off x="1952244" y="4169664"/>
+            <a:ext cx="543652" cy="475488"/>
           </a:xfrm>
           <a:prstGeom prst="rect">
             <a:avLst>
@@ -29348,8 +29348,8 @@
         </p:nvSpPr>
         <p:spPr>
           <a:xfrm>
-            <a:off x="1951828" y="4169664"/>
-            <a:ext cx="603504" cy="475488"/>
+            <a:off x="1952244" y="4169664"/>
+            <a:ext cx="543652" cy="475488"/>
           </a:xfrm>
           <a:prstGeom prst="rect">
             <a:avLst/>
@@ -29387,8 +29387,8 @@
         </p:nvSpPr>
         <p:spPr>
           <a:xfrm>
-            <a:off x="2605209" y="4169664"/>
-            <a:ext cx="603504" cy="475488"/>
+            <a:off x="2546188" y="4169664"/>
+            <a:ext cx="543652" cy="475488"/>
           </a:xfrm>
           <a:prstGeom prst="rect">
             <a:avLst>
@@ -29414,8 +29414,8 @@
         </p:nvSpPr>
         <p:spPr>
           <a:xfrm>
-            <a:off x="2605209" y="4169664"/>
-            <a:ext cx="603504" cy="475488"/>
+            <a:off x="2546188" y="4169664"/>
+            <a:ext cx="543652" cy="475488"/>
           </a:xfrm>
           <a:prstGeom prst="rect">
             <a:avLst/>
@@ -29453,8 +29453,8 @@
         </p:nvSpPr>
         <p:spPr>
           <a:xfrm>
-            <a:off x="3258589" y="4169664"/>
-            <a:ext cx="603504" cy="475488"/>
+            <a:off x="3140133" y="4169664"/>
+            <a:ext cx="543652" cy="475488"/>
           </a:xfrm>
           <a:prstGeom prst="rect">
             <a:avLst>
@@ -29480,8 +29480,8 @@
         </p:nvSpPr>
         <p:spPr>
           <a:xfrm>
-            <a:off x="3258589" y="4169664"/>
-            <a:ext cx="603504" cy="475488"/>
+            <a:off x="3140133" y="4169664"/>
+            <a:ext cx="543652" cy="475488"/>
           </a:xfrm>
           <a:prstGeom prst="rect">
             <a:avLst/>
@@ -29519,8 +29519,8 @@
         </p:nvSpPr>
         <p:spPr>
           <a:xfrm>
-            <a:off x="3911969" y="4169664"/>
-            <a:ext cx="603504" cy="475488"/>
+            <a:off x="3734077" y="4169664"/>
+            <a:ext cx="543652" cy="475488"/>
           </a:xfrm>
           <a:prstGeom prst="rect">
             <a:avLst>
@@ -29546,8 +29546,8 @@
         </p:nvSpPr>
         <p:spPr>
           <a:xfrm>
-            <a:off x="3911969" y="4169664"/>
-            <a:ext cx="603504" cy="475488"/>
+            <a:off x="3734077" y="4169664"/>
+            <a:ext cx="543652" cy="475488"/>
           </a:xfrm>
           <a:prstGeom prst="rect">
             <a:avLst/>
@@ -29585,8 +29585,8 @@
         </p:nvSpPr>
         <p:spPr>
           <a:xfrm>
-            <a:off x="4565350" y="4169664"/>
-            <a:ext cx="603504" cy="475488"/>
+            <a:off x="4328021" y="4169664"/>
+            <a:ext cx="543652" cy="475488"/>
           </a:xfrm>
           <a:prstGeom prst="rect">
             <a:avLst>
@@ -29612,8 +29612,8 @@
         </p:nvSpPr>
         <p:spPr>
           <a:xfrm>
-            <a:off x="4565350" y="4169664"/>
-            <a:ext cx="603504" cy="475488"/>
+            <a:off x="4328021" y="4169664"/>
+            <a:ext cx="543652" cy="475488"/>
           </a:xfrm>
           <a:prstGeom prst="rect">
             <a:avLst/>
@@ -29651,8 +29651,8 @@
         </p:nvSpPr>
         <p:spPr>
           <a:xfrm>
-            <a:off x="5218730" y="4169664"/>
-            <a:ext cx="603504" cy="475488"/>
+            <a:off x="4921966" y="4169664"/>
+            <a:ext cx="543652" cy="475488"/>
           </a:xfrm>
           <a:prstGeom prst="rect">
             <a:avLst>
@@ -29678,8 +29678,8 @@
         </p:nvSpPr>
         <p:spPr>
           <a:xfrm>
-            <a:off x="5218730" y="4169664"/>
-            <a:ext cx="603504" cy="475488"/>
+            <a:off x="4921966" y="4169664"/>
+            <a:ext cx="543652" cy="475488"/>
           </a:xfrm>
           <a:prstGeom prst="rect">
             <a:avLst/>
@@ -29717,8 +29717,8 @@
         </p:nvSpPr>
         <p:spPr>
           <a:xfrm>
-            <a:off x="5872111" y="4169664"/>
-            <a:ext cx="603504" cy="475488"/>
+            <a:off x="5515910" y="4169664"/>
+            <a:ext cx="543652" cy="475488"/>
           </a:xfrm>
           <a:prstGeom prst="rect">
             <a:avLst>
@@ -29744,8 +29744,8 @@
         </p:nvSpPr>
         <p:spPr>
           <a:xfrm>
-            <a:off x="5872111" y="4169664"/>
-            <a:ext cx="603504" cy="475488"/>
+            <a:off x="5515910" y="4169664"/>
+            <a:ext cx="543652" cy="475488"/>
           </a:xfrm>
           <a:prstGeom prst="rect">
             <a:avLst/>
@@ -29783,8 +29783,8 @@
         </p:nvSpPr>
         <p:spPr>
           <a:xfrm>
-            <a:off x="6525491" y="4169664"/>
-            <a:ext cx="603504" cy="475488"/>
+            <a:off x="6109855" y="4169664"/>
+            <a:ext cx="543652" cy="475488"/>
           </a:xfrm>
           <a:prstGeom prst="rect">
             <a:avLst>
@@ -29810,8 +29810,8 @@
         </p:nvSpPr>
         <p:spPr>
           <a:xfrm>
-            <a:off x="6525491" y="4169664"/>
-            <a:ext cx="603504" cy="475488"/>
+            <a:off x="6109855" y="4169664"/>
+            <a:ext cx="543652" cy="475488"/>
           </a:xfrm>
           <a:prstGeom prst="rect">
             <a:avLst/>
@@ -29849,8 +29849,8 @@
         </p:nvSpPr>
         <p:spPr>
           <a:xfrm>
-            <a:off x="7178871" y="4169664"/>
-            <a:ext cx="603504" cy="475488"/>
+            <a:off x="6703799" y="4169664"/>
+            <a:ext cx="543652" cy="475488"/>
           </a:xfrm>
           <a:prstGeom prst="rect">
             <a:avLst>
@@ -29876,8 +29876,8 @@
         </p:nvSpPr>
         <p:spPr>
           <a:xfrm>
-            <a:off x="7178871" y="4169664"/>
-            <a:ext cx="603504" cy="475488"/>
+            <a:off x="6703799" y="4169664"/>
+            <a:ext cx="543652" cy="475488"/>
           </a:xfrm>
           <a:prstGeom prst="rect">
             <a:avLst/>
@@ -29901,7 +29901,7 @@
                 <a:ea typeface="Trebuchet MS" pitchFamily="34" charset="-122"/>
                 <a:cs typeface="Trebuchet MS" pitchFamily="34" charset="-120"/>
               </a:rPr>
-              <a:t>tch</a:t>
+              <a:t>ch</a:t>
             </a:r>
             <a:endParaRPr lang="en-US" sz="900" dirty="0"/>
           </a:p>
@@ -29915,8 +29915,8 @@
         </p:nvSpPr>
         <p:spPr>
           <a:xfrm>
-            <a:off x="7832252" y="4169664"/>
-            <a:ext cx="603504" cy="475488"/>
+            <a:off x="7297743" y="4169664"/>
+            <a:ext cx="543652" cy="475488"/>
           </a:xfrm>
           <a:prstGeom prst="rect">
             <a:avLst>
@@ -29942,8 +29942,8 @@
         </p:nvSpPr>
         <p:spPr>
           <a:xfrm>
-            <a:off x="7832252" y="4169664"/>
-            <a:ext cx="603504" cy="475488"/>
+            <a:off x="7297743" y="4169664"/>
+            <a:ext cx="543652" cy="475488"/>
           </a:xfrm>
           <a:prstGeom prst="rect">
             <a:avLst/>
@@ -29967,7 +29967,73 @@
                 <a:ea typeface="Trebuchet MS" pitchFamily="34" charset="-122"/>
                 <a:cs typeface="Trebuchet MS" pitchFamily="34" charset="-120"/>
               </a:rPr>
-              <a:t>ed</a:t>
+              <a:t>e</a:t>
+            </a:r>
+            <a:endParaRPr lang="en-US" sz="900" dirty="0"/>
+          </a:p>
+        </p:txBody>
+      </p:sp>
+      <p:sp>
+        <p:nvSpPr>
+          <p:cNvPr id="62" name="Shape 60"/>
+          <p:cNvSpPr/>
+          <p:nvPr/>
+        </p:nvSpPr>
+        <p:spPr>
+          <a:xfrm>
+            <a:off x="7891688" y="4169664"/>
+            <a:ext cx="543652" cy="475488"/>
+          </a:xfrm>
+          <a:prstGeom prst="rect">
+            <a:avLst>
+              <a:gd name="adj" fmla="val 7692"/>
+            </a:avLst>
+          </a:prstGeom>
+          <a:solidFill>
+            <a:srgbClr val="FFFFFF"/>
+          </a:solidFill>
+          <a:ln w="12700">
+            <a:solidFill>
+              <a:srgbClr val="DB2777"/>
+            </a:solidFill>
+            <a:prstDash val="solid"/>
+          </a:ln>
+        </p:spPr>
+      </p:sp>
+      <p:sp>
+        <p:nvSpPr>
+          <p:cNvPr id="63" name="Text 61"/>
+          <p:cNvSpPr/>
+          <p:nvPr/>
+        </p:nvSpPr>
+        <p:spPr>
+          <a:xfrm>
+            <a:off x="7891688" y="4169664"/>
+            <a:ext cx="543652" cy="475488"/>
+          </a:xfrm>
+          <a:prstGeom prst="rect">
+            <a:avLst/>
+          </a:prstGeom>
+          <a:noFill/>
+          <a:ln/>
+        </p:spPr>
+        <p:txBody>
+          <a:bodyPr wrap="square" lIns="0" tIns="0" rIns="0" bIns="0" rtlCol="0" anchor="ctr"/>
+          <a:lstStyle/>
+          <a:p>
+            <a:pPr algn="ctr" indent="0" marL="0">
+              <a:buNone/>
+            </a:pPr>
+            <a:r>
+              <a:rPr lang="en-US" sz="900" b="1" dirty="0">
+                <a:solidFill>
+                  <a:srgbClr val="9D174D"/>
+                </a:solidFill>
+                <a:latin typeface="Trebuchet MS" pitchFamily="34" charset="0"/>
+                <a:ea typeface="Trebuchet MS" pitchFamily="34" charset="-122"/>
+                <a:cs typeface="Trebuchet MS" pitchFamily="34" charset="-120"/>
+              </a:rPr>
+              <a:t>d</a:t>
             </a:r>
             <a:endParaRPr lang="en-US" sz="900" dirty="0"/>
           </a:p>
@@ -39179,7 +39245,7 @@
                 <a:ea typeface="Calibri" pitchFamily="34" charset="-122"/>
                 <a:cs typeface="Calibri" pitchFamily="34" charset="-120"/>
               </a:rPr>
-              <a:t>1.  'Semi-' always means something is completely finished or whole.</a:t>
+              <a:t>1.  A semidetached house is joined to another house on one side.</a:t>
             </a:r>
             <a:endParaRPr lang="en-US" sz="1300" dirty="0"/>
           </a:p>
@@ -39202,11 +39268,11 @@
             </a:avLst>
           </a:prstGeom>
           <a:solidFill>
-            <a:srgbClr val="FEE2E2"/>
-          </a:solidFill>
-          <a:ln w="12700">
-            <a:solidFill>
-              <a:srgbClr val="DC2626"/>
+            <a:srgbClr val="DCFCE7"/>
+          </a:solidFill>
+          <a:ln w="12700">
+            <a:solidFill>
+              <a:srgbClr val="16A34A"/>
             </a:solidFill>
             <a:prstDash val="solid"/>
           </a:ln>
@@ -39239,13 +39305,13 @@
             <a:r>
               <a:rPr lang="en-US" sz="1100" b="1" dirty="0">
                 <a:solidFill>
-                  <a:srgbClr val="DC2626"/>
+                  <a:srgbClr val="16A34A"/>
                 </a:solidFill>
                 <a:latin typeface="Trebuchet MS" pitchFamily="34" charset="0"/>
                 <a:ea typeface="Trebuchet MS" pitchFamily="34" charset="-122"/>
                 <a:cs typeface="Trebuchet MS" pitchFamily="34" charset="-120"/>
               </a:rPr>
-              <a:t>FALSE</a:t>
+              <a:t>TRUE</a:t>
             </a:r>
             <a:endParaRPr lang="en-US" sz="1100" dirty="0"/>
           </a:p>
@@ -39457,7 +39523,7 @@
                 <a:ea typeface="Calibri" pitchFamily="34" charset="-122"/>
                 <a:cs typeface="Calibri" pitchFamily="34" charset="-120"/>
               </a:rPr>
-              <a:t>3.  A semicircle is half of a full circle.</a:t>
+              <a:t>3.  'Semi-' always means something is completely finished or whole.</a:t>
             </a:r>
             <a:endParaRPr lang="en-US" sz="1300" dirty="0"/>
           </a:p>
@@ -39480,11 +39546,11 @@
             </a:avLst>
           </a:prstGeom>
           <a:solidFill>
-            <a:srgbClr val="DCFCE7"/>
-          </a:solidFill>
-          <a:ln w="12700">
-            <a:solidFill>
-              <a:srgbClr val="16A34A"/>
+            <a:srgbClr val="FEE2E2"/>
+          </a:solidFill>
+          <a:ln w="12700">
+            <a:solidFill>
+              <a:srgbClr val="DC2626"/>
             </a:solidFill>
             <a:prstDash val="solid"/>
           </a:ln>
@@ -39517,13 +39583,13 @@
             <a:r>
               <a:rPr lang="en-US" sz="1100" b="1" dirty="0">
                 <a:solidFill>
-                  <a:srgbClr val="16A34A"/>
+                  <a:srgbClr val="DC2626"/>
                 </a:solidFill>
                 <a:latin typeface="Trebuchet MS" pitchFamily="34" charset="0"/>
                 <a:ea typeface="Trebuchet MS" pitchFamily="34" charset="-122"/>
                 <a:cs typeface="Trebuchet MS" pitchFamily="34" charset="-120"/>
               </a:rPr>
-              <a:t>TRUE</a:t>
+              <a:t>FALSE</a:t>
             </a:r>
             <a:endParaRPr lang="en-US" sz="1100" dirty="0"/>
           </a:p>
@@ -39596,7 +39662,7 @@
                 <a:ea typeface="Calibri" pitchFamily="34" charset="-122"/>
                 <a:cs typeface="Calibri" pitchFamily="34" charset="-120"/>
               </a:rPr>
-              <a:t>4.  A semidetached house is joined to another house on one side.</a:t>
+              <a:t>4.  A semicircle is half of a full circle.</a:t>
             </a:r>
             <a:endParaRPr lang="en-US" sz="1300" dirty="0"/>
           </a:p>
